--- a/docs/CareerStar-CapitalOne.pptx
+++ b/docs/CareerStar-CapitalOne.pptx
@@ -19,9 +19,10 @@
     <p:sldId id="267" r:id="rId13"/>
     <p:sldId id="268" r:id="rId14"/>
     <p:sldId id="269" r:id="rId15"/>
+    <p:sldId id="270" r:id="rId16"/>
   </p:sldIdLst>
   <p:notesMasterIdLst>
-    <p:notesMasterId r:id="rId16"/>
+    <p:notesMasterId r:id="rId17"/>
   </p:notesMasterIdLst>
   <p:sldSz cx="12191695" cy="6858000"/>
   <p:notesSz cx="6858000" cy="12191695"/>
@@ -603,7 +604,7 @@
           <a:p>
             <a:r>
               <a:rPr lang="en-US" dirty="0"/>
-              <a:t>My favorite bug. I did the textbook thing — trust the last X-Forwarded-For hop, since clients can forge everything to its left. Then production: thirty rapid requests, zero rate limits. Amplify's internal router was appending CloudFront's own edge IP after the real client IP. So the last hop was never the client. It was Amazon. Fix: second-to-last hop, a global backstop, and a regression test pinning the exact header shapes. Forty seconds of story, a semester of networking. (1:30)</a:t>
+              <a:t>Deployment: push to main, Amplify builds the Next.js app, CloudFront serves it from the edge, Route 53 holds the domain. I'm studying for Cloud Practitioner right now, and this is where the flashcard concepts became real things I'd debugged: managed services, edge caching, shared responsibility. Speaking of shared responsibility — the next slide is my favorite bug of the whole summer. (1:30)</a:t>
             </a:r>
             <a:endParaRPr lang="en-US" dirty="0"/>
           </a:p>
@@ -691,7 +692,7 @@
           <a:p>
             <a:r>
               <a:rPr lang="en-US" dirty="0"/>
-              <a:t>Three things worth stealing: write the spec before the prompt. Publish what your model gets wrong — the awkward numbers bought me more trust than the good ones. And pick tools that make rigor fun, because fun is load-bearing. Last thing: the model claims its AI term is a bet about the next decade, so in 2034 I re-run the back-test and publish how my ratings aged. Ratings agencies should eat their own cooking. Thanks. (0:45)</a:t>
+              <a:t>My favorite bug. I did the textbook thing — trust the last X-Forwarded-For hop, since clients can forge everything to its left. Then production: thirty rapid requests, zero rate limits. Amplify's internal router was appending CloudFront's own edge IP after the real client IP. So the last hop was never the client. It was Amazon. Fix: second-to-last hop, a global backstop, and a regression test pinning the exact header shapes. Forty seconds of story, a semester of networking. (1:30)</a:t>
             </a:r>
             <a:endParaRPr lang="en-US" dirty="0"/>
           </a:p>
@@ -779,7 +780,7 @@
           <a:p>
             <a:r>
               <a:rPr lang="en-US" dirty="0"/>
-              <a:t/>
+              <a:t>Three things worth stealing: write the spec before the prompt. Publish what your model gets wrong — the awkward numbers bought me more trust than the good ones. And pick tools that make rigor fun, because fun is load-bearing. Last thing: the model claims its AI term is a bet about the next decade, so in 2034 I re-run the back-test and publish how my ratings aged. Ratings agencies should eat their own cooking. Thanks. (0:45)</a:t>
             </a:r>
             <a:endParaRPr lang="en-US" dirty="0"/>
           </a:p>
@@ -997,6 +998,94 @@
 </p:notes>
 </file>
 
+<file path=ppt/notesSlides/notesSlide15.xml><?xml version="1.0" encoding="utf-8"?>
+<p:notes xmlns:a="http://schemas.openxmlformats.org/drawingml/2006/main" xmlns:r="http://schemas.openxmlformats.org/officeDocument/2006/relationships" xmlns:p="http://schemas.openxmlformats.org/presentationml/2006/main">
+  <p:cSld>
+    <p:spTree>
+      <p:nvGrpSpPr>
+        <p:cNvPr id="1" name=""/>
+        <p:cNvGrpSpPr/>
+        <p:nvPr/>
+      </p:nvGrpSpPr>
+      <p:grpSpPr>
+        <a:xfrm>
+          <a:off x="0" y="0"/>
+          <a:ext cx="0" cy="0"/>
+          <a:chOff x="0" y="0"/>
+          <a:chExt cx="0" cy="0"/>
+        </a:xfrm>
+      </p:grpSpPr>
+      <p:sp>
+        <p:nvSpPr>
+          <p:cNvPr id="2" name="Slide Image Placeholder 1"/>
+          <p:cNvSpPr>
+            <a:spLocks noGrp="1" noRot="1" noChangeAspect="1"/>
+          </p:cNvSpPr>
+          <p:nvPr>
+            <p:ph type="sldImg"/>
+          </p:nvPr>
+        </p:nvSpPr>
+        <p:spPr/>
+      </p:sp>
+      <p:sp>
+        <p:nvSpPr>
+          <p:cNvPr id="3" name="Notes Placeholder 2"/>
+          <p:cNvSpPr>
+            <a:spLocks noGrp="1"/>
+          </p:cNvSpPr>
+          <p:nvPr>
+            <p:ph type="body" idx="1"/>
+          </p:nvPr>
+        </p:nvSpPr>
+        <p:spPr/>
+        <p:txBody>
+          <a:bodyPr/>
+          <a:lstStyle/>
+          <a:p>
+            <a:r>
+              <a:rPr lang="en-US" dirty="0"/>
+              <a:t/>
+            </a:r>
+            <a:endParaRPr lang="en-US" dirty="0"/>
+          </a:p>
+        </p:txBody>
+      </p:sp>
+      <p:sp>
+        <p:nvSpPr>
+          <p:cNvPr id="4" name="Slide Number Placeholder 3"/>
+          <p:cNvSpPr>
+            <a:spLocks noGrp="1"/>
+          </p:cNvSpPr>
+          <p:nvPr>
+            <p:ph type="sldNum" sz="quarter" idx="10"/>
+          </p:nvPr>
+        </p:nvSpPr>
+        <p:spPr/>
+        <p:txBody>
+          <a:bodyPr/>
+          <a:lstStyle/>
+          <a:p>
+            <a:fld id="{F7021451-1387-4CA6-816F-3879F97B5CBC}" type="slidenum">
+              <a:rPr lang="en-US"/>
+              <a:t>15</a:t>
+            </a:fld>
+            <a:endParaRPr lang="en-US"/>
+          </a:p>
+        </p:txBody>
+      </p:sp>
+    </p:spTree>
+    <p:extLst>
+      <p:ext uri="{BB962C8B-B14F-4D97-AF65-F5344CB8AC3E}">
+        <p14:creationId xmlns:p14="http://schemas.microsoft.com/office/powerpoint/2010/main" val="1024086991"/>
+      </p:ext>
+    </p:extLst>
+  </p:cSld>
+  <p:clrMapOvr>
+    <a:masterClrMapping/>
+  </p:clrMapOvr>
+</p:notes>
+</file>
+
 <file path=ppt/notesSlides/notesSlide2.xml><?xml version="1.0" encoding="utf-8"?>
 <p:notes xmlns:a="http://schemas.openxmlformats.org/drawingml/2006/main" xmlns:r="http://schemas.openxmlformats.org/officeDocument/2006/relationships" xmlns:p="http://schemas.openxmlformats.org/presentationml/2006/main">
   <p:cSld>
@@ -1483,7 +1572,7 @@
           <a:p>
             <a:r>
               <a:rPr lang="en-US" dirty="0"/>
-              <a:t>For this room the equations mostly explain themselves. Percentile ranks because the real question is 'versus my alternatives.' Risk discounts multiplicatively, same as you'd treat a return. And the weights are priors — no ground truth exists to fit them on — so instead of pretending precision, every ranking gets stress-tested: 729 perturbations, five structurally different models, and a 1/N control, because if the clever model can't beat equal weights, that's worth knowing. (1:30)</a:t>
+              <a:t>Before I show you the formula, here's where it comes from — it's just how you'd size up a stock, asked about a career. What do you get: growth and pay, from BLS. What can kill it: AI, from published exposure research. Does it fit you: real skills data from O*NET. Three questions, three public datasets. The formula on the next slide is just these three sentences written down. (1:00)</a:t>
             </a:r>
             <a:endParaRPr lang="en-US" dirty="0"/>
           </a:p>
@@ -1571,7 +1660,7 @@
           <a:p>
             <a:r>
               <a:rPr lang="en-US" dirty="0"/>
-              <a:t>Slow down here. I pulled the 2014 BLS projections out of the Internet Archive, scored 2014's job market with today's formula, and graded it against what actually happened by 2024. It works — decliners flagged at 48% versus 33% by chance. Then I volunteer the awkward number before anyone asks: plain BLS beat my full model on that decade. And that's the model working. No LLMs existed, so the AI term had nothing to price. The test stays held out. Tune to it and it stops being a test. (1:30)</a:t>
+              <a:t>Line by line: return is growth plus pay, each as a percentile rank against all 730 careers — because the real question is 'versus my alternatives.' Risk is mostly AI exposure. Value is return discounted by risk — multiplied, not subtracted, because that's how you treat a return. Then blend in fit. The honest part: the exact weights are judgment calls. There's no dataset of correct career choices to fit them on. So instead of pretending precision, every ranking gets re-scored 729 times with shaken weights, plus five rival formulas — including a plain average as the control. Disagreement gets labeled, not hidden. (1:30)</a:t>
             </a:r>
             <a:endParaRPr lang="en-US" dirty="0"/>
           </a:p>
@@ -1659,7 +1748,7 @@
           <a:p>
             <a:r>
               <a:rPr lang="en-US" dirty="0"/>
-              <a:t>Deployment: push to main, Amplify builds the Next.js app, CloudFront serves it from the edge, Route 53 holds the domain. I'm studying for Cloud Practitioner right now, and this is where the flashcard concepts became real things I'd debugged: managed services, edge caching, shared responsibility. Speaking of shared responsibility — the next slide is my favorite bug of the whole summer. (1:30)</a:t>
+              <a:t>Slow down here. I pulled the 2014 BLS projections out of the Internet Archive, scored 2014's job market with today's formula, and graded it against what actually happened by 2024. It works — decliners flagged at 48% versus 33% by chance. Then I volunteer the awkward number before anyone asks: plain BLS beat my full model on that decade. And that's the model working. No LLMs existed, so the AI term had nothing to price. The test stays held out. Tune to it and it stops being a test. (1:30)</a:t>
             </a:r>
             <a:endParaRPr lang="en-US" dirty="0"/>
           </a:p>
@@ -2329,7 +2418,7 @@
                 <a:ea typeface="Arial" pitchFamily="34" charset="-122"/>
                 <a:cs typeface="Arial" pitchFamily="34" charset="-120"/>
               </a:rPr>
-              <a:t>09 · WAR STORY</a:t>
+              <a:t>09 · THE INFRASTRUCTURE</a:t>
             </a:r>
             <a:endParaRPr lang="en-US" sz="1100" dirty="0"/>
           </a:p>
@@ -2368,7 +2457,7 @@
                 <a:ea typeface="Arial" pitchFamily="34" charset="-122"/>
                 <a:cs typeface="Arial" pitchFamily="34" charset="-120"/>
               </a:rPr>
-              <a:t>The rate limiter that never fired</a:t>
+              <a:t>Deploying it taught me more AWS than the practice exams</a:t>
             </a:r>
             <a:endParaRPr lang="en-US" sz="3100" dirty="0"/>
           </a:p>
@@ -2383,11 +2472,11 @@
         <p:spPr>
           <a:xfrm>
             <a:off x="548640" y="1691640"/>
-            <a:ext cx="11091672" cy="932688"/>
+            <a:ext cx="2514600" cy="914400"/>
           </a:xfrm>
           <a:prstGeom prst="roundRect">
             <a:avLst>
-              <a:gd name="adj" fmla="val 8824"/>
+              <a:gd name="adj" fmla="val 9000"/>
             </a:avLst>
           </a:prstGeom>
           <a:solidFill>
@@ -2409,24 +2498,63 @@
         </p:nvSpPr>
         <p:spPr>
           <a:xfrm>
-            <a:off x="822960" y="1783080"/>
-            <a:ext cx="2377440" cy="731520"/>
-          </a:xfrm>
-          <a:prstGeom prst="rect">
-            <a:avLst/>
-          </a:prstGeom>
-          <a:noFill/>
-          <a:ln/>
-        </p:spPr>
-        <p:txBody>
-          <a:bodyPr wrap="square" lIns="0" tIns="0" rIns="0" bIns="0" rtlCol="0" anchor="ctr"/>
-          <a:lstStyle/>
-          <a:p>
-            <a:pPr indent="0" marL="0">
-              <a:buNone/>
-            </a:pPr>
-            <a:r>
-              <a:rPr lang="en-US" sz="1350" b="1" dirty="0">
+            <a:off x="548640" y="1691640"/>
+            <a:ext cx="2514600" cy="914400"/>
+          </a:xfrm>
+          <a:prstGeom prst="rect">
+            <a:avLst/>
+          </a:prstGeom>
+          <a:noFill/>
+          <a:ln/>
+        </p:spPr>
+        <p:txBody>
+          <a:bodyPr wrap="square" lIns="0" tIns="0" rIns="0" bIns="0" rtlCol="0" anchor="ctr"/>
+          <a:lstStyle/>
+          <a:p>
+            <a:pPr algn="ctr" indent="0" marL="0">
+              <a:buNone/>
+            </a:pPr>
+            <a:r>
+              <a:rPr lang="en-US" sz="1250" b="1" dirty="0">
+                <a:solidFill>
+                  <a:srgbClr val="E8EEFC"/>
+                </a:solidFill>
+                <a:latin typeface="Arial" pitchFamily="34" charset="0"/>
+                <a:ea typeface="Arial" pitchFamily="34" charset="-122"/>
+                <a:cs typeface="Arial" pitchFamily="34" charset="-120"/>
+              </a:rPr>
+              <a:t>GitHub</a:t>
+            </a:r>
+            <a:endParaRPr lang="en-US" sz="1250" dirty="0"/>
+          </a:p>
+        </p:txBody>
+      </p:sp>
+      <p:sp>
+        <p:nvSpPr>
+          <p:cNvPr id="7" name="Text 4"/>
+          <p:cNvSpPr/>
+          <p:nvPr/>
+        </p:nvSpPr>
+        <p:spPr>
+          <a:xfrm>
+            <a:off x="3044952" y="1691640"/>
+            <a:ext cx="329184" cy="914400"/>
+          </a:xfrm>
+          <a:prstGeom prst="rect">
+            <a:avLst/>
+          </a:prstGeom>
+          <a:noFill/>
+          <a:ln/>
+        </p:spPr>
+        <p:txBody>
+          <a:bodyPr wrap="square" lIns="0" tIns="0" rIns="0" bIns="0" rtlCol="0" anchor="ctr"/>
+          <a:lstStyle/>
+          <a:p>
+            <a:pPr algn="ctr" indent="0" marL="0">
+              <a:buNone/>
+            </a:pPr>
+            <a:r>
+              <a:rPr lang="en-US" sz="1600" dirty="0">
                 <a:solidFill>
                   <a:srgbClr val="4F74F0"/>
                 </a:solidFill>
@@ -2434,48 +2562,9 @@
                 <a:ea typeface="Arial" pitchFamily="34" charset="-122"/>
                 <a:cs typeface="Arial" pitchFamily="34" charset="-120"/>
               </a:rPr>
-              <a:t>What I did</a:t>
-            </a:r>
-            <a:endParaRPr lang="en-US" sz="1350" dirty="0"/>
-          </a:p>
-        </p:txBody>
-      </p:sp>
-      <p:sp>
-        <p:nvSpPr>
-          <p:cNvPr id="7" name="Text 4"/>
-          <p:cNvSpPr/>
-          <p:nvPr/>
-        </p:nvSpPr>
-        <p:spPr>
-          <a:xfrm>
-            <a:off x="3291840" y="1783080"/>
-            <a:ext cx="8138160" cy="777240"/>
-          </a:xfrm>
-          <a:prstGeom prst="rect">
-            <a:avLst/>
-          </a:prstGeom>
-          <a:noFill/>
-          <a:ln/>
-        </p:spPr>
-        <p:txBody>
-          <a:bodyPr wrap="square" lIns="0" tIns="0" rIns="0" bIns="0" rtlCol="0" anchor="ctr"/>
-          <a:lstStyle/>
-          <a:p>
-            <a:pPr indent="0" marL="0">
-              <a:buNone/>
-            </a:pPr>
-            <a:r>
-              <a:rPr lang="en-US" sz="1250" dirty="0">
-                <a:solidFill>
-                  <a:srgbClr val="9DB0D9"/>
-                </a:solidFill>
-                <a:latin typeface="Arial" pitchFamily="34" charset="0"/>
-                <a:ea typeface="Arial" pitchFamily="34" charset="-122"/>
-                <a:cs typeface="Arial" pitchFamily="34" charset="-120"/>
-              </a:rPr>
-              <a:t>keyed rate limits on the last X-Forwarded-For hop. That’s the textbook advice — everything left of it is client-forgeable.</a:t>
-            </a:r>
-            <a:endParaRPr lang="en-US" sz="1250" dirty="0"/>
+              <a:t>→</a:t>
+            </a:r>
+            <a:endParaRPr lang="en-US" sz="1600" dirty="0"/>
           </a:p>
         </p:txBody>
       </p:sp>
@@ -2487,12 +2576,12 @@
         </p:nvSpPr>
         <p:spPr>
           <a:xfrm>
-            <a:off x="548640" y="2761488"/>
-            <a:ext cx="11091672" cy="932688"/>
+            <a:off x="3346704" y="1691640"/>
+            <a:ext cx="2514600" cy="914400"/>
           </a:xfrm>
           <a:prstGeom prst="roundRect">
             <a:avLst>
-              <a:gd name="adj" fmla="val 8824"/>
+              <a:gd name="adj" fmla="val 9000"/>
             </a:avLst>
           </a:prstGeom>
           <a:solidFill>
@@ -2514,24 +2603,80 @@
         </p:nvSpPr>
         <p:spPr>
           <a:xfrm>
-            <a:off x="822960" y="2852928"/>
-            <a:ext cx="2377440" cy="731520"/>
-          </a:xfrm>
-          <a:prstGeom prst="rect">
-            <a:avLst/>
-          </a:prstGeom>
-          <a:noFill/>
-          <a:ln/>
-        </p:spPr>
-        <p:txBody>
-          <a:bodyPr wrap="square" lIns="0" tIns="0" rIns="0" bIns="0" rtlCol="0" anchor="ctr"/>
-          <a:lstStyle/>
-          <a:p>
-            <a:pPr indent="0" marL="0">
-              <a:buNone/>
-            </a:pPr>
-            <a:r>
-              <a:rPr lang="en-US" sz="1350" b="1" dirty="0">
+            <a:off x="3346704" y="1691640"/>
+            <a:ext cx="2514600" cy="914400"/>
+          </a:xfrm>
+          <a:prstGeom prst="rect">
+            <a:avLst/>
+          </a:prstGeom>
+          <a:noFill/>
+          <a:ln/>
+        </p:spPr>
+        <p:txBody>
+          <a:bodyPr wrap="square" lIns="0" tIns="0" rIns="0" bIns="0" rtlCol="0" anchor="ctr"/>
+          <a:lstStyle/>
+          <a:p>
+            <a:pPr algn="ctr" indent="0" marL="0">
+              <a:buNone/>
+            </a:pPr>
+            <a:r>
+              <a:rPr lang="en-US" sz="1250" b="1" dirty="0">
+                <a:solidFill>
+                  <a:srgbClr val="E8EEFC"/>
+                </a:solidFill>
+                <a:latin typeface="Arial" pitchFamily="34" charset="0"/>
+                <a:ea typeface="Arial" pitchFamily="34" charset="-122"/>
+                <a:cs typeface="Arial" pitchFamily="34" charset="-120"/>
+              </a:rPr>
+              <a:t>Amplify Hosting</a:t>
+            </a:r>
+            <a:endParaRPr lang="en-US" sz="1250" dirty="0"/>
+          </a:p>
+          <a:p>
+            <a:pPr algn="ctr" indent="0" marL="0">
+              <a:buNone/>
+            </a:pPr>
+            <a:r>
+              <a:rPr lang="en-US" sz="1250" b="1" dirty="0">
+                <a:solidFill>
+                  <a:srgbClr val="E8EEFC"/>
+                </a:solidFill>
+                <a:latin typeface="Arial" pitchFamily="34" charset="0"/>
+                <a:ea typeface="Arial" pitchFamily="34" charset="-122"/>
+                <a:cs typeface="Arial" pitchFamily="34" charset="-120"/>
+              </a:rPr>
+              <a:t>build + SSR</a:t>
+            </a:r>
+            <a:endParaRPr lang="en-US" sz="1250" dirty="0"/>
+          </a:p>
+        </p:txBody>
+      </p:sp>
+      <p:sp>
+        <p:nvSpPr>
+          <p:cNvPr id="10" name="Text 7"/>
+          <p:cNvSpPr/>
+          <p:nvPr/>
+        </p:nvSpPr>
+        <p:spPr>
+          <a:xfrm>
+            <a:off x="5843016" y="1691640"/>
+            <a:ext cx="329184" cy="914400"/>
+          </a:xfrm>
+          <a:prstGeom prst="rect">
+            <a:avLst/>
+          </a:prstGeom>
+          <a:noFill/>
+          <a:ln/>
+        </p:spPr>
+        <p:txBody>
+          <a:bodyPr wrap="square" lIns="0" tIns="0" rIns="0" bIns="0" rtlCol="0" anchor="ctr"/>
+          <a:lstStyle/>
+          <a:p>
+            <a:pPr algn="ctr" indent="0" marL="0">
+              <a:buNone/>
+            </a:pPr>
+            <a:r>
+              <a:rPr lang="en-US" sz="1600" dirty="0">
                 <a:solidFill>
                   <a:srgbClr val="4F74F0"/>
                 </a:solidFill>
@@ -2539,48 +2684,9 @@
                 <a:ea typeface="Arial" pitchFamily="34" charset="-122"/>
                 <a:cs typeface="Arial" pitchFamily="34" charset="-120"/>
               </a:rPr>
-              <a:t>What production did</a:t>
-            </a:r>
-            <a:endParaRPr lang="en-US" sz="1350" dirty="0"/>
-          </a:p>
-        </p:txBody>
-      </p:sp>
-      <p:sp>
-        <p:nvSpPr>
-          <p:cNvPr id="10" name="Text 7"/>
-          <p:cNvSpPr/>
-          <p:nvPr/>
-        </p:nvSpPr>
-        <p:spPr>
-          <a:xfrm>
-            <a:off x="3291840" y="2852928"/>
-            <a:ext cx="8138160" cy="777240"/>
-          </a:xfrm>
-          <a:prstGeom prst="rect">
-            <a:avLst/>
-          </a:prstGeom>
-          <a:noFill/>
-          <a:ln/>
-        </p:spPr>
-        <p:txBody>
-          <a:bodyPr wrap="square" lIns="0" tIns="0" rIns="0" bIns="0" rtlCol="0" anchor="ctr"/>
-          <a:lstStyle/>
-          <a:p>
-            <a:pPr indent="0" marL="0">
-              <a:buNone/>
-            </a:pPr>
-            <a:r>
-              <a:rPr lang="en-US" sz="1250" dirty="0">
-                <a:solidFill>
-                  <a:srgbClr val="9DB0D9"/>
-                </a:solidFill>
-                <a:latin typeface="Arial" pitchFamily="34" charset="0"/>
-                <a:ea typeface="Arial" pitchFamily="34" charset="-122"/>
-                <a:cs typeface="Arial" pitchFamily="34" charset="-120"/>
-              </a:rPr>
-              <a:t>30 rapid requests. Zero 429s. Every request was getting a fresh bucket.</a:t>
-            </a:r>
-            <a:endParaRPr lang="en-US" sz="1250" dirty="0"/>
+              <a:t>→</a:t>
+            </a:r>
+            <a:endParaRPr lang="en-US" sz="1600" dirty="0"/>
           </a:p>
         </p:txBody>
       </p:sp>
@@ -2592,12 +2698,12 @@
         </p:nvSpPr>
         <p:spPr>
           <a:xfrm>
-            <a:off x="548640" y="3831336"/>
-            <a:ext cx="11091672" cy="932688"/>
+            <a:off x="6144768" y="1691640"/>
+            <a:ext cx="2514600" cy="914400"/>
           </a:xfrm>
           <a:prstGeom prst="roundRect">
             <a:avLst>
-              <a:gd name="adj" fmla="val 8824"/>
+              <a:gd name="adj" fmla="val 9000"/>
             </a:avLst>
           </a:prstGeom>
           <a:solidFill>
@@ -2619,24 +2725,80 @@
         </p:nvSpPr>
         <p:spPr>
           <a:xfrm>
-            <a:off x="822960" y="3922776"/>
-            <a:ext cx="2377440" cy="731520"/>
-          </a:xfrm>
-          <a:prstGeom prst="rect">
-            <a:avLst/>
-          </a:prstGeom>
-          <a:noFill/>
-          <a:ln/>
-        </p:spPr>
-        <p:txBody>
-          <a:bodyPr wrap="square" lIns="0" tIns="0" rIns="0" bIns="0" rtlCol="0" anchor="ctr"/>
-          <a:lstStyle/>
-          <a:p>
-            <a:pPr indent="0" marL="0">
-              <a:buNone/>
-            </a:pPr>
-            <a:r>
-              <a:rPr lang="en-US" sz="1350" b="1" dirty="0">
+            <a:off x="6144768" y="1691640"/>
+            <a:ext cx="2514600" cy="914400"/>
+          </a:xfrm>
+          <a:prstGeom prst="rect">
+            <a:avLst/>
+          </a:prstGeom>
+          <a:noFill/>
+          <a:ln/>
+        </p:spPr>
+        <p:txBody>
+          <a:bodyPr wrap="square" lIns="0" tIns="0" rIns="0" bIns="0" rtlCol="0" anchor="ctr"/>
+          <a:lstStyle/>
+          <a:p>
+            <a:pPr algn="ctr" indent="0" marL="0">
+              <a:buNone/>
+            </a:pPr>
+            <a:r>
+              <a:rPr lang="en-US" sz="1250" b="1" dirty="0">
+                <a:solidFill>
+                  <a:srgbClr val="E8EEFC"/>
+                </a:solidFill>
+                <a:latin typeface="Arial" pitchFamily="34" charset="0"/>
+                <a:ea typeface="Arial" pitchFamily="34" charset="-122"/>
+                <a:cs typeface="Arial" pitchFamily="34" charset="-120"/>
+              </a:rPr>
+              <a:t>CloudFront</a:t>
+            </a:r>
+            <a:endParaRPr lang="en-US" sz="1250" dirty="0"/>
+          </a:p>
+          <a:p>
+            <a:pPr algn="ctr" indent="0" marL="0">
+              <a:buNone/>
+            </a:pPr>
+            <a:r>
+              <a:rPr lang="en-US" sz="1250" b="1" dirty="0">
+                <a:solidFill>
+                  <a:srgbClr val="E8EEFC"/>
+                </a:solidFill>
+                <a:latin typeface="Arial" pitchFamily="34" charset="0"/>
+                <a:ea typeface="Arial" pitchFamily="34" charset="-122"/>
+                <a:cs typeface="Arial" pitchFamily="34" charset="-120"/>
+              </a:rPr>
+              <a:t>edge network</a:t>
+            </a:r>
+            <a:endParaRPr lang="en-US" sz="1250" dirty="0"/>
+          </a:p>
+        </p:txBody>
+      </p:sp>
+      <p:sp>
+        <p:nvSpPr>
+          <p:cNvPr id="13" name="Text 10"/>
+          <p:cNvSpPr/>
+          <p:nvPr/>
+        </p:nvSpPr>
+        <p:spPr>
+          <a:xfrm>
+            <a:off x="8641080" y="1691640"/>
+            <a:ext cx="329184" cy="914400"/>
+          </a:xfrm>
+          <a:prstGeom prst="rect">
+            <a:avLst/>
+          </a:prstGeom>
+          <a:noFill/>
+          <a:ln/>
+        </p:spPr>
+        <p:txBody>
+          <a:bodyPr wrap="square" lIns="0" tIns="0" rIns="0" bIns="0" rtlCol="0" anchor="ctr"/>
+          <a:lstStyle/>
+          <a:p>
+            <a:pPr algn="ctr" indent="0" marL="0">
+              <a:buNone/>
+            </a:pPr>
+            <a:r>
+              <a:rPr lang="en-US" sz="1600" dirty="0">
                 <a:solidFill>
                   <a:srgbClr val="4F74F0"/>
                 </a:solidFill>
@@ -2644,48 +2806,9 @@
                 <a:ea typeface="Arial" pitchFamily="34" charset="-122"/>
                 <a:cs typeface="Arial" pitchFamily="34" charset="-120"/>
               </a:rPr>
-              <a:t>Why</a:t>
-            </a:r>
-            <a:endParaRPr lang="en-US" sz="1350" dirty="0"/>
-          </a:p>
-        </p:txBody>
-      </p:sp>
-      <p:sp>
-        <p:nvSpPr>
-          <p:cNvPr id="13" name="Text 10"/>
-          <p:cNvSpPr/>
-          <p:nvPr/>
-        </p:nvSpPr>
-        <p:spPr>
-          <a:xfrm>
-            <a:off x="3291840" y="3922776"/>
-            <a:ext cx="8138160" cy="777240"/>
-          </a:xfrm>
-          <a:prstGeom prst="rect">
-            <a:avLst/>
-          </a:prstGeom>
-          <a:noFill/>
-          <a:ln/>
-        </p:spPr>
-        <p:txBody>
-          <a:bodyPr wrap="square" lIns="0" tIns="0" rIns="0" bIns="0" rtlCol="0" anchor="ctr"/>
-          <a:lstStyle/>
-          <a:p>
-            <a:pPr indent="0" marL="0">
-              <a:buNone/>
-            </a:pPr>
-            <a:r>
-              <a:rPr lang="en-US" sz="1250" dirty="0">
-                <a:solidFill>
-                  <a:srgbClr val="9DB0D9"/>
-                </a:solidFill>
-                <a:latin typeface="Arial" pitchFamily="34" charset="0"/>
-                <a:ea typeface="Arial" pitchFamily="34" charset="-122"/>
-                <a:cs typeface="Arial" pitchFamily="34" charset="-120"/>
-              </a:rPr>
-              <a:t>Amplify’s router appends CloudFront’s own edge IP after the viewer IP CloudFront appended. The “last hop” was never the client — it was Amazon.</a:t>
-            </a:r>
-            <a:endParaRPr lang="en-US" sz="1250" dirty="0"/>
+              <a:t>→</a:t>
+            </a:r>
+            <a:endParaRPr lang="en-US" sz="1600" dirty="0"/>
           </a:p>
         </p:txBody>
       </p:sp>
@@ -2697,12 +2820,12 @@
         </p:nvSpPr>
         <p:spPr>
           <a:xfrm>
-            <a:off x="548640" y="4901184"/>
-            <a:ext cx="11091672" cy="932688"/>
+            <a:off x="8942832" y="1691640"/>
+            <a:ext cx="2514600" cy="914400"/>
           </a:xfrm>
           <a:prstGeom prst="roundRect">
             <a:avLst>
-              <a:gd name="adj" fmla="val 8824"/>
+              <a:gd name="adj" fmla="val 9000"/>
             </a:avLst>
           </a:prstGeom>
           <a:solidFill>
@@ -2724,24 +2847,146 @@
         </p:nvSpPr>
         <p:spPr>
           <a:xfrm>
-            <a:off x="822960" y="4992624"/>
-            <a:ext cx="2377440" cy="731520"/>
-          </a:xfrm>
-          <a:prstGeom prst="rect">
-            <a:avLst/>
-          </a:prstGeom>
-          <a:noFill/>
-          <a:ln/>
-        </p:spPr>
-        <p:txBody>
-          <a:bodyPr wrap="square" lIns="0" tIns="0" rIns="0" bIns="0" rtlCol="0" anchor="ctr"/>
-          <a:lstStyle/>
-          <a:p>
-            <a:pPr indent="0" marL="0">
-              <a:buNone/>
-            </a:pPr>
-            <a:r>
-              <a:rPr lang="en-US" sz="1350" b="1" dirty="0">
+            <a:off x="8942832" y="1691640"/>
+            <a:ext cx="2514600" cy="914400"/>
+          </a:xfrm>
+          <a:prstGeom prst="rect">
+            <a:avLst/>
+          </a:prstGeom>
+          <a:noFill/>
+          <a:ln/>
+        </p:spPr>
+        <p:txBody>
+          <a:bodyPr wrap="square" lIns="0" tIns="0" rIns="0" bIns="0" rtlCol="0" anchor="ctr"/>
+          <a:lstStyle/>
+          <a:p>
+            <a:pPr algn="ctr" indent="0" marL="0">
+              <a:buNone/>
+            </a:pPr>
+            <a:r>
+              <a:rPr lang="en-US" sz="1250" b="1" dirty="0">
+                <a:solidFill>
+                  <a:srgbClr val="E8EEFC"/>
+                </a:solidFill>
+                <a:latin typeface="Arial" pitchFamily="34" charset="0"/>
+                <a:ea typeface="Arial" pitchFamily="34" charset="-122"/>
+                <a:cs typeface="Arial" pitchFamily="34" charset="-120"/>
+              </a:rPr>
+              <a:t>Route 53</a:t>
+            </a:r>
+            <a:endParaRPr lang="en-US" sz="1250" dirty="0"/>
+          </a:p>
+          <a:p>
+            <a:pPr algn="ctr" indent="0" marL="0">
+              <a:buNone/>
+            </a:pPr>
+            <a:r>
+              <a:rPr lang="en-US" sz="1250" b="1" dirty="0">
+                <a:solidFill>
+                  <a:srgbClr val="E8EEFC"/>
+                </a:solidFill>
+                <a:latin typeface="Arial" pitchFamily="34" charset="0"/>
+                <a:ea typeface="Arial" pitchFamily="34" charset="-122"/>
+                <a:cs typeface="Arial" pitchFamily="34" charset="-120"/>
+              </a:rPr>
+              <a:t>ashleylibasci.com</a:t>
+            </a:r>
+            <a:endParaRPr lang="en-US" sz="1250" dirty="0"/>
+          </a:p>
+        </p:txBody>
+      </p:sp>
+      <p:sp>
+        <p:nvSpPr>
+          <p:cNvPr id="16" name="Text 13"/>
+          <p:cNvSpPr/>
+          <p:nvPr/>
+        </p:nvSpPr>
+        <p:spPr>
+          <a:xfrm>
+            <a:off x="548640" y="2834640"/>
+            <a:ext cx="11091672" cy="365760"/>
+          </a:xfrm>
+          <a:prstGeom prst="rect">
+            <a:avLst/>
+          </a:prstGeom>
+          <a:noFill/>
+          <a:ln/>
+        </p:spPr>
+        <p:txBody>
+          <a:bodyPr wrap="square" lIns="0" tIns="0" rIns="0" bIns="0" rtlCol="0" anchor="ctr"/>
+          <a:lstStyle/>
+          <a:p>
+            <a:pPr indent="0" marL="0">
+              <a:buNone/>
+            </a:pPr>
+            <a:r>
+              <a:rPr lang="en-US" sz="1400" b="1" dirty="0">
+                <a:solidFill>
+                  <a:srgbClr val="E8EEFC"/>
+                </a:solidFill>
+                <a:latin typeface="Arial" pitchFamily="34" charset="0"/>
+                <a:ea typeface="Arial" pitchFamily="34" charset="-122"/>
+                <a:cs typeface="Arial" pitchFamily="34" charset="-120"/>
+              </a:rPr>
+              <a:t>The whole pipeline is a git push.</a:t>
+            </a:r>
+            <a:endParaRPr lang="en-US" sz="1400" dirty="0"/>
+          </a:p>
+        </p:txBody>
+      </p:sp>
+      <p:sp>
+        <p:nvSpPr>
+          <p:cNvPr id="17" name="Shape 14"/>
+          <p:cNvSpPr/>
+          <p:nvPr/>
+        </p:nvSpPr>
+        <p:spPr>
+          <a:xfrm>
+            <a:off x="548640" y="3383280"/>
+            <a:ext cx="2743200" cy="2011680"/>
+          </a:xfrm>
+          <a:prstGeom prst="roundRect">
+            <a:avLst>
+              <a:gd name="adj" fmla="val 4091"/>
+            </a:avLst>
+          </a:prstGeom>
+          <a:solidFill>
+            <a:srgbClr val="0C1530"/>
+          </a:solidFill>
+          <a:ln w="9525">
+            <a:solidFill>
+              <a:srgbClr val="24325C"/>
+            </a:solidFill>
+            <a:prstDash val="solid"/>
+          </a:ln>
+        </p:spPr>
+      </p:sp>
+      <p:sp>
+        <p:nvSpPr>
+          <p:cNvPr id="18" name="Text 15"/>
+          <p:cNvSpPr/>
+          <p:nvPr/>
+        </p:nvSpPr>
+        <p:spPr>
+          <a:xfrm>
+            <a:off x="713232" y="3566160"/>
+            <a:ext cx="2414016" cy="365760"/>
+          </a:xfrm>
+          <a:prstGeom prst="rect">
+            <a:avLst/>
+          </a:prstGeom>
+          <a:noFill/>
+          <a:ln/>
+        </p:spPr>
+        <p:txBody>
+          <a:bodyPr wrap="square" lIns="0" tIns="0" rIns="0" bIns="0" rtlCol="0" anchor="ctr"/>
+          <a:lstStyle/>
+          <a:p>
+            <a:pPr indent="0" marL="0">
+              <a:buNone/>
+            </a:pPr>
+            <a:r>
+              <a:rPr lang="en-US" sz="1250" b="1" dirty="0">
                 <a:solidFill>
                   <a:srgbClr val="4F74F0"/>
                 </a:solidFill>
@@ -2749,38 +2994,38 @@
                 <a:ea typeface="Arial" pitchFamily="34" charset="-122"/>
                 <a:cs typeface="Arial" pitchFamily="34" charset="-120"/>
               </a:rPr>
-              <a:t>The fix</a:t>
-            </a:r>
-            <a:endParaRPr lang="en-US" sz="1350" dirty="0"/>
-          </a:p>
-        </p:txBody>
-      </p:sp>
-      <p:sp>
-        <p:nvSpPr>
-          <p:cNvPr id="16" name="Text 13"/>
-          <p:cNvSpPr/>
-          <p:nvPr/>
-        </p:nvSpPr>
-        <p:spPr>
-          <a:xfrm>
-            <a:off x="3291840" y="4992624"/>
-            <a:ext cx="8138160" cy="777240"/>
-          </a:xfrm>
-          <a:prstGeom prst="rect">
-            <a:avLst/>
-          </a:prstGeom>
-          <a:noFill/>
-          <a:ln/>
-        </p:spPr>
-        <p:txBody>
-          <a:bodyPr wrap="square" lIns="0" tIns="0" rIns="0" bIns="0" rtlCol="0" anchor="ctr"/>
-          <a:lstStyle/>
-          <a:p>
-            <a:pPr indent="0" marL="0">
-              <a:buNone/>
-            </a:pPr>
-            <a:r>
-              <a:rPr lang="en-US" sz="1250" dirty="0">
+              <a:t>Managed services</a:t>
+            </a:r>
+            <a:endParaRPr lang="en-US" sz="1250" dirty="0"/>
+          </a:p>
+        </p:txBody>
+      </p:sp>
+      <p:sp>
+        <p:nvSpPr>
+          <p:cNvPr id="19" name="Text 16"/>
+          <p:cNvSpPr/>
+          <p:nvPr/>
+        </p:nvSpPr>
+        <p:spPr>
+          <a:xfrm>
+            <a:off x="713232" y="3950208"/>
+            <a:ext cx="2414016" cy="1325880"/>
+          </a:xfrm>
+          <a:prstGeom prst="rect">
+            <a:avLst/>
+          </a:prstGeom>
+          <a:noFill/>
+          <a:ln/>
+        </p:spPr>
+        <p:txBody>
+          <a:bodyPr wrap="square" lIns="0" tIns="0" rIns="0" bIns="0" rtlCol="0" anchor="ctr"/>
+          <a:lstStyle/>
+          <a:p>
+            <a:pPr indent="0" marL="0">
+              <a:buNone/>
+            </a:pPr>
+            <a:r>
+              <a:rPr lang="en-US" sz="1100" dirty="0">
                 <a:solidFill>
                   <a:srgbClr val="9DB0D9"/>
                 </a:solidFill>
@@ -2788,7 +3033,73 @@
                 <a:ea typeface="Arial" pitchFamily="34" charset="-122"/>
                 <a:cs typeface="Arial" pitchFamily="34" charset="-120"/>
               </a:rPr>
-              <a:t>key on the second-to-last hop, global cap as a backstop, and a regression test that pins the exact header shapes so it can’t come back.</a:t>
+              <a:t>no servers to own; Amplify builds and serves the Next.js app</a:t>
+            </a:r>
+            <a:endParaRPr lang="en-US" sz="1100" dirty="0"/>
+          </a:p>
+        </p:txBody>
+      </p:sp>
+      <p:sp>
+        <p:nvSpPr>
+          <p:cNvPr id="20" name="Shape 17"/>
+          <p:cNvSpPr/>
+          <p:nvPr/>
+        </p:nvSpPr>
+        <p:spPr>
+          <a:xfrm>
+            <a:off x="3456432" y="3383280"/>
+            <a:ext cx="2743200" cy="2011680"/>
+          </a:xfrm>
+          <a:prstGeom prst="roundRect">
+            <a:avLst>
+              <a:gd name="adj" fmla="val 4091"/>
+            </a:avLst>
+          </a:prstGeom>
+          <a:solidFill>
+            <a:srgbClr val="0C1530"/>
+          </a:solidFill>
+          <a:ln w="9525">
+            <a:solidFill>
+              <a:srgbClr val="24325C"/>
+            </a:solidFill>
+            <a:prstDash val="solid"/>
+          </a:ln>
+        </p:spPr>
+      </p:sp>
+      <p:sp>
+        <p:nvSpPr>
+          <p:cNvPr id="21" name="Text 18"/>
+          <p:cNvSpPr/>
+          <p:nvPr/>
+        </p:nvSpPr>
+        <p:spPr>
+          <a:xfrm>
+            <a:off x="3621024" y="3566160"/>
+            <a:ext cx="2414016" cy="365760"/>
+          </a:xfrm>
+          <a:prstGeom prst="rect">
+            <a:avLst/>
+          </a:prstGeom>
+          <a:noFill/>
+          <a:ln/>
+        </p:spPr>
+        <p:txBody>
+          <a:bodyPr wrap="square" lIns="0" tIns="0" rIns="0" bIns="0" rtlCol="0" anchor="ctr"/>
+          <a:lstStyle/>
+          <a:p>
+            <a:pPr indent="0" marL="0">
+              <a:buNone/>
+            </a:pPr>
+            <a:r>
+              <a:rPr lang="en-US" sz="1250" b="1" dirty="0">
+                <a:solidFill>
+                  <a:srgbClr val="4F74F0"/>
+                </a:solidFill>
+                <a:latin typeface="Arial" pitchFamily="34" charset="0"/>
+                <a:ea typeface="Arial" pitchFamily="34" charset="-122"/>
+                <a:cs typeface="Arial" pitchFamily="34" charset="-120"/>
+              </a:rPr>
+              <a:t>Edge caching</a:t>
             </a:r>
             <a:endParaRPr lang="en-US" sz="1250" dirty="0"/>
           </a:p>
@@ -2796,13 +3107,262 @@
       </p:sp>
       <p:sp>
         <p:nvSpPr>
-          <p:cNvPr id="17" name="Text 14"/>
-          <p:cNvSpPr/>
-          <p:nvPr/>
-        </p:nvSpPr>
-        <p:spPr>
-          <a:xfrm>
-            <a:off x="548640" y="6035040"/>
+          <p:cNvPr id="22" name="Text 19"/>
+          <p:cNvSpPr/>
+          <p:nvPr/>
+        </p:nvSpPr>
+        <p:spPr>
+          <a:xfrm>
+            <a:off x="3621024" y="3950208"/>
+            <a:ext cx="2414016" cy="1325880"/>
+          </a:xfrm>
+          <a:prstGeom prst="rect">
+            <a:avLst/>
+          </a:prstGeom>
+          <a:noFill/>
+          <a:ln/>
+        </p:spPr>
+        <p:txBody>
+          <a:bodyPr wrap="square" lIns="0" tIns="0" rIns="0" bIns="0" rtlCol="0" anchor="ctr"/>
+          <a:lstStyle/>
+          <a:p>
+            <a:pPr indent="0" marL="0">
+              <a:buNone/>
+            </a:pPr>
+            <a:r>
+              <a:rPr lang="en-US" sz="1100" dirty="0">
+                <a:solidFill>
+                  <a:srgbClr val="9DB0D9"/>
+                </a:solidFill>
+                <a:latin typeface="Arial" pitchFamily="34" charset="0"/>
+                <a:ea typeface="Arial" pitchFamily="34" charset="-122"/>
+                <a:cs typeface="Arial" pitchFamily="34" charset="-120"/>
+              </a:rPr>
+              <a:t>CloudFront serves the static pages from the edge; SSR only where needed</a:t>
+            </a:r>
+            <a:endParaRPr lang="en-US" sz="1100" dirty="0"/>
+          </a:p>
+        </p:txBody>
+      </p:sp>
+      <p:sp>
+        <p:nvSpPr>
+          <p:cNvPr id="23" name="Shape 20"/>
+          <p:cNvSpPr/>
+          <p:nvPr/>
+        </p:nvSpPr>
+        <p:spPr>
+          <a:xfrm>
+            <a:off x="6364224" y="3383280"/>
+            <a:ext cx="2743200" cy="2011680"/>
+          </a:xfrm>
+          <a:prstGeom prst="roundRect">
+            <a:avLst>
+              <a:gd name="adj" fmla="val 4091"/>
+            </a:avLst>
+          </a:prstGeom>
+          <a:solidFill>
+            <a:srgbClr val="0C1530"/>
+          </a:solidFill>
+          <a:ln w="9525">
+            <a:solidFill>
+              <a:srgbClr val="24325C"/>
+            </a:solidFill>
+            <a:prstDash val="solid"/>
+          </a:ln>
+        </p:spPr>
+      </p:sp>
+      <p:sp>
+        <p:nvSpPr>
+          <p:cNvPr id="24" name="Text 21"/>
+          <p:cNvSpPr/>
+          <p:nvPr/>
+        </p:nvSpPr>
+        <p:spPr>
+          <a:xfrm>
+            <a:off x="6528816" y="3566160"/>
+            <a:ext cx="2414016" cy="365760"/>
+          </a:xfrm>
+          <a:prstGeom prst="rect">
+            <a:avLst/>
+          </a:prstGeom>
+          <a:noFill/>
+          <a:ln/>
+        </p:spPr>
+        <p:txBody>
+          <a:bodyPr wrap="square" lIns="0" tIns="0" rIns="0" bIns="0" rtlCol="0" anchor="ctr"/>
+          <a:lstStyle/>
+          <a:p>
+            <a:pPr indent="0" marL="0">
+              <a:buNone/>
+            </a:pPr>
+            <a:r>
+              <a:rPr lang="en-US" sz="1250" b="1" dirty="0">
+                <a:solidFill>
+                  <a:srgbClr val="4F74F0"/>
+                </a:solidFill>
+                <a:latin typeface="Arial" pitchFamily="34" charset="0"/>
+                <a:ea typeface="Arial" pitchFamily="34" charset="-122"/>
+                <a:cs typeface="Arial" pitchFamily="34" charset="-120"/>
+              </a:rPr>
+              <a:t>Shared responsibility</a:t>
+            </a:r>
+            <a:endParaRPr lang="en-US" sz="1250" dirty="0"/>
+          </a:p>
+        </p:txBody>
+      </p:sp>
+      <p:sp>
+        <p:nvSpPr>
+          <p:cNvPr id="25" name="Text 22"/>
+          <p:cNvSpPr/>
+          <p:nvPr/>
+        </p:nvSpPr>
+        <p:spPr>
+          <a:xfrm>
+            <a:off x="6528816" y="3950208"/>
+            <a:ext cx="2414016" cy="1325880"/>
+          </a:xfrm>
+          <a:prstGeom prst="rect">
+            <a:avLst/>
+          </a:prstGeom>
+          <a:noFill/>
+          <a:ln/>
+        </p:spPr>
+        <p:txBody>
+          <a:bodyPr wrap="square" lIns="0" tIns="0" rIns="0" bIns="0" rtlCol="0" anchor="ctr"/>
+          <a:lstStyle/>
+          <a:p>
+            <a:pPr indent="0" marL="0">
+              <a:buNone/>
+            </a:pPr>
+            <a:r>
+              <a:rPr lang="en-US" sz="1100" dirty="0">
+                <a:solidFill>
+                  <a:srgbClr val="9DB0D9"/>
+                </a:solidFill>
+                <a:latin typeface="Arial" pitchFamily="34" charset="0"/>
+                <a:ea typeface="Arial" pitchFamily="34" charset="-122"/>
+                <a:cs typeface="Arial" pitchFamily="34" charset="-120"/>
+              </a:rPr>
+              <a:t>AWS runs the platform, my code’s security is on me — see next slide</a:t>
+            </a:r>
+            <a:endParaRPr lang="en-US" sz="1100" dirty="0"/>
+          </a:p>
+        </p:txBody>
+      </p:sp>
+      <p:sp>
+        <p:nvSpPr>
+          <p:cNvPr id="26" name="Shape 23"/>
+          <p:cNvSpPr/>
+          <p:nvPr/>
+        </p:nvSpPr>
+        <p:spPr>
+          <a:xfrm>
+            <a:off x="9272016" y="3383280"/>
+            <a:ext cx="2743200" cy="2011680"/>
+          </a:xfrm>
+          <a:prstGeom prst="roundRect">
+            <a:avLst>
+              <a:gd name="adj" fmla="val 4091"/>
+            </a:avLst>
+          </a:prstGeom>
+          <a:solidFill>
+            <a:srgbClr val="0C1530"/>
+          </a:solidFill>
+          <a:ln w="9525">
+            <a:solidFill>
+              <a:srgbClr val="24325C"/>
+            </a:solidFill>
+            <a:prstDash val="solid"/>
+          </a:ln>
+        </p:spPr>
+      </p:sp>
+      <p:sp>
+        <p:nvSpPr>
+          <p:cNvPr id="27" name="Text 24"/>
+          <p:cNvSpPr/>
+          <p:nvPr/>
+        </p:nvSpPr>
+        <p:spPr>
+          <a:xfrm>
+            <a:off x="9436608" y="3566160"/>
+            <a:ext cx="2414016" cy="365760"/>
+          </a:xfrm>
+          <a:prstGeom prst="rect">
+            <a:avLst/>
+          </a:prstGeom>
+          <a:noFill/>
+          <a:ln/>
+        </p:spPr>
+        <p:txBody>
+          <a:bodyPr wrap="square" lIns="0" tIns="0" rIns="0" bIns="0" rtlCol="0" anchor="ctr"/>
+          <a:lstStyle/>
+          <a:p>
+            <a:pPr indent="0" marL="0">
+              <a:buNone/>
+            </a:pPr>
+            <a:r>
+              <a:rPr lang="en-US" sz="1250" b="1" dirty="0">
+                <a:solidFill>
+                  <a:srgbClr val="4F74F0"/>
+                </a:solidFill>
+                <a:latin typeface="Arial" pitchFamily="34" charset="0"/>
+                <a:ea typeface="Arial" pitchFamily="34" charset="-122"/>
+                <a:cs typeface="Arial" pitchFamily="34" charset="-120"/>
+              </a:rPr>
+              <a:t>DNS &amp; certs</a:t>
+            </a:r>
+            <a:endParaRPr lang="en-US" sz="1250" dirty="0"/>
+          </a:p>
+        </p:txBody>
+      </p:sp>
+      <p:sp>
+        <p:nvSpPr>
+          <p:cNvPr id="28" name="Text 25"/>
+          <p:cNvSpPr/>
+          <p:nvPr/>
+        </p:nvSpPr>
+        <p:spPr>
+          <a:xfrm>
+            <a:off x="9436608" y="3950208"/>
+            <a:ext cx="2414016" cy="1325880"/>
+          </a:xfrm>
+          <a:prstGeom prst="rect">
+            <a:avLst/>
+          </a:prstGeom>
+          <a:noFill/>
+          <a:ln/>
+        </p:spPr>
+        <p:txBody>
+          <a:bodyPr wrap="square" lIns="0" tIns="0" rIns="0" bIns="0" rtlCol="0" anchor="ctr"/>
+          <a:lstStyle/>
+          <a:p>
+            <a:pPr indent="0" marL="0">
+              <a:buNone/>
+            </a:pPr>
+            <a:r>
+              <a:rPr lang="en-US" sz="1100" dirty="0">
+                <a:solidFill>
+                  <a:srgbClr val="9DB0D9"/>
+                </a:solidFill>
+                <a:latin typeface="Arial" pitchFamily="34" charset="0"/>
+                <a:ea typeface="Arial" pitchFamily="34" charset="-122"/>
+                <a:cs typeface="Arial" pitchFamily="34" charset="-120"/>
+              </a:rPr>
+              <a:t>Route 53 + managed TLS on the custom domain</a:t>
+            </a:r>
+            <a:endParaRPr lang="en-US" sz="1100" dirty="0"/>
+          </a:p>
+        </p:txBody>
+      </p:sp>
+      <p:sp>
+        <p:nvSpPr>
+          <p:cNvPr id="29" name="Text 26"/>
+          <p:cNvSpPr/>
+          <p:nvPr/>
+        </p:nvSpPr>
+        <p:spPr>
+          <a:xfrm>
+            <a:off x="548640" y="5623560"/>
             <a:ext cx="11091672" cy="365760"/>
           </a:xfrm>
           <a:prstGeom prst="rect">
@@ -2815,27 +3375,27 @@
           <a:bodyPr wrap="square" lIns="0" tIns="0" rIns="0" bIns="0" rtlCol="0" anchor="ctr"/>
           <a:lstStyle/>
           <a:p>
-            <a:pPr algn="ctr" indent="0" marL="0">
-              <a:buNone/>
-            </a:pPr>
-            <a:r>
-              <a:rPr lang="en-US" sz="1400" b="1" i="1" dirty="0">
-                <a:solidFill>
-                  <a:srgbClr val="4F74F0"/>
-                </a:solidFill>
-                <a:latin typeface="Arial" pitchFamily="34" charset="0"/>
-                <a:ea typeface="Arial" pitchFamily="34" charset="-122"/>
-                <a:cs typeface="Arial" pitchFamily="34" charset="-120"/>
-              </a:rPr>
-              <a:t>Practice exams don’t teach proxy chains. Production does.</a:t>
-            </a:r>
-            <a:endParaRPr lang="en-US" sz="1400" dirty="0"/>
-          </a:p>
-        </p:txBody>
-      </p:sp>
-      <p:sp>
-        <p:nvSpPr>
-          <p:cNvPr id="18" name="Text 15"/>
+            <a:pPr indent="0" marL="0">
+              <a:buNone/>
+            </a:pPr>
+            <a:r>
+              <a:rPr lang="en-US" sz="1200" i="1" dirty="0">
+                <a:solidFill>
+                  <a:srgbClr val="9DB0D9"/>
+                </a:solidFill>
+                <a:latin typeface="Arial" pitchFamily="34" charset="0"/>
+                <a:ea typeface="Arial" pitchFamily="34" charset="-122"/>
+                <a:cs typeface="Arial" pitchFamily="34" charset="-120"/>
+              </a:rPr>
+              <a:t>Studying for the AWS Cloud Practitioner cert — this project is where the exam concepts became real.</a:t>
+            </a:r>
+            <a:endParaRPr lang="en-US" sz="1200" dirty="0"/>
+          </a:p>
+        </p:txBody>
+      </p:sp>
+      <p:sp>
+        <p:nvSpPr>
+          <p:cNvPr id="30" name="Text 27"/>
           <p:cNvSpPr/>
           <p:nvPr/>
         </p:nvSpPr>
@@ -2874,7 +3434,7 @@
       </p:sp>
       <p:sp>
         <p:nvSpPr>
-          <p:cNvPr id="19" name="Text 16"/>
+          <p:cNvPr id="31" name="Text 28"/>
           <p:cNvSpPr/>
           <p:nvPr/>
         </p:nvSpPr>
@@ -2966,7 +3526,7 @@
         </p:blipFill>
         <p:spPr>
           <a:xfrm>
-            <a:off x="548640" y="475488"/>
+            <a:off x="548640" y="402336"/>
             <a:ext cx="155448" cy="164592"/>
           </a:xfrm>
           <a:prstGeom prst="rect">
@@ -2982,7 +3542,7 @@
         </p:nvSpPr>
         <p:spPr>
           <a:xfrm>
-            <a:off x="786384" y="457200"/>
+            <a:off x="786384" y="384048"/>
             <a:ext cx="7315200" cy="274320"/>
           </a:xfrm>
           <a:prstGeom prst="rect">
@@ -3007,7 +3567,7 @@
                 <a:ea typeface="Arial" pitchFamily="34" charset="-122"/>
                 <a:cs typeface="Arial" pitchFamily="34" charset="-120"/>
               </a:rPr>
-              <a:t>10 · CLOSE</a:t>
+              <a:t>10 · WAR STORY</a:t>
             </a:r>
             <a:endParaRPr lang="en-US" sz="1100" dirty="0"/>
           </a:p>
@@ -3021,7 +3581,7 @@
         </p:nvSpPr>
         <p:spPr>
           <a:xfrm>
-            <a:off x="548640" y="777240"/>
+            <a:off x="548640" y="658368"/>
             <a:ext cx="11094415" cy="685800"/>
           </a:xfrm>
           <a:prstGeom prst="rect">
@@ -3046,7 +3606,7 @@
                 <a:ea typeface="Arial" pitchFamily="34" charset="-122"/>
                 <a:cs typeface="Arial" pitchFamily="34" charset="-120"/>
               </a:rPr>
-              <a:t>Three things worth stealing</a:t>
+              <a:t>The rate limiter that never fired</a:t>
             </a:r>
             <a:endParaRPr lang="en-US" sz="3100" dirty="0"/>
           </a:p>
@@ -3060,399 +3620,12 @@
         </p:nvSpPr>
         <p:spPr>
           <a:xfrm>
-            <a:off x="548640" y="1737360"/>
-            <a:ext cx="6766560" cy="960120"/>
+            <a:off x="548640" y="1691640"/>
+            <a:ext cx="11091672" cy="932688"/>
           </a:xfrm>
           <a:prstGeom prst="roundRect">
             <a:avLst>
-              <a:gd name="adj" fmla="val 8571"/>
-            </a:avLst>
-          </a:prstGeom>
-          <a:solidFill>
-            <a:srgbClr val="101A38"/>
-          </a:solidFill>
-          <a:ln w="9525">
-            <a:solidFill>
-              <a:srgbClr val="24325C"/>
-            </a:solidFill>
-            <a:prstDash val="solid"/>
-          </a:ln>
-        </p:spPr>
-      </p:sp>
-      <p:pic>
-        <p:nvPicPr>
-          <p:cNvPr id="6" name="Image 1" descr="preencoded.png">    </p:cNvPr>
-          <p:cNvPicPr>
-            <a:picLocks noChangeAspect="1"/>
-          </p:cNvPicPr>
-          <p:nvPr/>
-        </p:nvPicPr>
-        <p:blipFill>
-          <a:blip r:embed="rId3"/>
-          <a:stretch>
-            <a:fillRect/>
-          </a:stretch>
-        </p:blipFill>
-        <p:spPr>
-          <a:xfrm>
-            <a:off x="841248" y="2084832"/>
-            <a:ext cx="237744" cy="246888"/>
-          </a:xfrm>
-          <a:prstGeom prst="rect">
-            <a:avLst/>
-          </a:prstGeom>
-        </p:spPr>
-      </p:pic>
-      <p:sp>
-        <p:nvSpPr>
-          <p:cNvPr id="7" name="Text 3"/>
-          <p:cNvSpPr/>
-          <p:nvPr/>
-        </p:nvSpPr>
-        <p:spPr>
-          <a:xfrm>
-            <a:off x="1280160" y="1847088"/>
-            <a:ext cx="5852160" cy="365760"/>
-          </a:xfrm>
-          <a:prstGeom prst="rect">
-            <a:avLst/>
-          </a:prstGeom>
-          <a:noFill/>
-          <a:ln/>
-        </p:spPr>
-        <p:txBody>
-          <a:bodyPr wrap="square" lIns="0" tIns="0" rIns="0" bIns="0" rtlCol="0" anchor="ctr"/>
-          <a:lstStyle/>
-          <a:p>
-            <a:pPr indent="0" marL="0">
-              <a:buNone/>
-            </a:pPr>
-            <a:r>
-              <a:rPr lang="en-US" sz="1600" b="1" dirty="0">
-                <a:solidFill>
-                  <a:srgbClr val="E8EEFC"/>
-                </a:solidFill>
-                <a:latin typeface="Arial" pitchFamily="34" charset="0"/>
-                <a:ea typeface="Arial" pitchFamily="34" charset="-122"/>
-                <a:cs typeface="Arial" pitchFamily="34" charset="-120"/>
-              </a:rPr>
-              <a:t>Write the spec before the prompt</a:t>
-            </a:r>
-            <a:endParaRPr lang="en-US" sz="1600" dirty="0"/>
-          </a:p>
-        </p:txBody>
-      </p:sp>
-      <p:sp>
-        <p:nvSpPr>
-          <p:cNvPr id="8" name="Text 4"/>
-          <p:cNvSpPr/>
-          <p:nvPr/>
-        </p:nvSpPr>
-        <p:spPr>
-          <a:xfrm>
-            <a:off x="1280160" y="2231136"/>
-            <a:ext cx="5852160" cy="365760"/>
-          </a:xfrm>
-          <a:prstGeom prst="rect">
-            <a:avLst/>
-          </a:prstGeom>
-          <a:noFill/>
-          <a:ln/>
-        </p:spPr>
-        <p:txBody>
-          <a:bodyPr wrap="square" lIns="0" tIns="0" rIns="0" bIns="0" rtlCol="0" anchor="ctr"/>
-          <a:lstStyle/>
-          <a:p>
-            <a:pPr indent="0" marL="0">
-              <a:buNone/>
-            </a:pPr>
-            <a:r>
-              <a:rPr lang="en-US" sz="1200" dirty="0">
-                <a:solidFill>
-                  <a:srgbClr val="9DB0D9"/>
-                </a:solidFill>
-                <a:latin typeface="Arial" pitchFamily="34" charset="0"/>
-                <a:ea typeface="Arial" pitchFamily="34" charset="-122"/>
-                <a:cs typeface="Arial" pitchFamily="34" charset="-120"/>
-              </a:rPr>
-              <a:t>the discipline, not the model, is what made this work</a:t>
-            </a:r>
-            <a:endParaRPr lang="en-US" sz="1200" dirty="0"/>
-          </a:p>
-        </p:txBody>
-      </p:sp>
-      <p:sp>
-        <p:nvSpPr>
-          <p:cNvPr id="9" name="Shape 5"/>
-          <p:cNvSpPr/>
-          <p:nvPr/>
-        </p:nvSpPr>
-        <p:spPr>
-          <a:xfrm>
-            <a:off x="548640" y="2880360"/>
-            <a:ext cx="6766560" cy="960120"/>
-          </a:xfrm>
-          <a:prstGeom prst="roundRect">
-            <a:avLst>
-              <a:gd name="adj" fmla="val 8571"/>
-            </a:avLst>
-          </a:prstGeom>
-          <a:solidFill>
-            <a:srgbClr val="101A38"/>
-          </a:solidFill>
-          <a:ln w="9525">
-            <a:solidFill>
-              <a:srgbClr val="24325C"/>
-            </a:solidFill>
-            <a:prstDash val="solid"/>
-          </a:ln>
-        </p:spPr>
-      </p:sp>
-      <p:pic>
-        <p:nvPicPr>
-          <p:cNvPr id="10" name="Image 2" descr="preencoded.png">    </p:cNvPr>
-          <p:cNvPicPr>
-            <a:picLocks noChangeAspect="1"/>
-          </p:cNvPicPr>
-          <p:nvPr/>
-        </p:nvPicPr>
-        <p:blipFill>
-          <a:blip r:embed="rId4"/>
-          <a:stretch>
-            <a:fillRect/>
-          </a:stretch>
-        </p:blipFill>
-        <p:spPr>
-          <a:xfrm>
-            <a:off x="841248" y="3227832"/>
-            <a:ext cx="237744" cy="246888"/>
-          </a:xfrm>
-          <a:prstGeom prst="rect">
-            <a:avLst/>
-          </a:prstGeom>
-        </p:spPr>
-      </p:pic>
-      <p:sp>
-        <p:nvSpPr>
-          <p:cNvPr id="11" name="Text 6"/>
-          <p:cNvSpPr/>
-          <p:nvPr/>
-        </p:nvSpPr>
-        <p:spPr>
-          <a:xfrm>
-            <a:off x="1280160" y="2990088"/>
-            <a:ext cx="5852160" cy="365760"/>
-          </a:xfrm>
-          <a:prstGeom prst="rect">
-            <a:avLst/>
-          </a:prstGeom>
-          <a:noFill/>
-          <a:ln/>
-        </p:spPr>
-        <p:txBody>
-          <a:bodyPr wrap="square" lIns="0" tIns="0" rIns="0" bIns="0" rtlCol="0" anchor="ctr"/>
-          <a:lstStyle/>
-          <a:p>
-            <a:pPr indent="0" marL="0">
-              <a:buNone/>
-            </a:pPr>
-            <a:r>
-              <a:rPr lang="en-US" sz="1600" b="1" dirty="0">
-                <a:solidFill>
-                  <a:srgbClr val="E8EEFC"/>
-                </a:solidFill>
-                <a:latin typeface="Arial" pitchFamily="34" charset="0"/>
-                <a:ea typeface="Arial" pitchFamily="34" charset="-122"/>
-                <a:cs typeface="Arial" pitchFamily="34" charset="-120"/>
-              </a:rPr>
-              <a:t>Publish what your model gets wrong</a:t>
-            </a:r>
-            <a:endParaRPr lang="en-US" sz="1600" dirty="0"/>
-          </a:p>
-        </p:txBody>
-      </p:sp>
-      <p:sp>
-        <p:nvSpPr>
-          <p:cNvPr id="12" name="Text 7"/>
-          <p:cNvSpPr/>
-          <p:nvPr/>
-        </p:nvSpPr>
-        <p:spPr>
-          <a:xfrm>
-            <a:off x="1280160" y="3374136"/>
-            <a:ext cx="5852160" cy="365760"/>
-          </a:xfrm>
-          <a:prstGeom prst="rect">
-            <a:avLst/>
-          </a:prstGeom>
-          <a:noFill/>
-          <a:ln/>
-        </p:spPr>
-        <p:txBody>
-          <a:bodyPr wrap="square" lIns="0" tIns="0" rIns="0" bIns="0" rtlCol="0" anchor="ctr"/>
-          <a:lstStyle/>
-          <a:p>
-            <a:pPr indent="0" marL="0">
-              <a:buNone/>
-            </a:pPr>
-            <a:r>
-              <a:rPr lang="en-US" sz="1200" dirty="0">
-                <a:solidFill>
-                  <a:srgbClr val="9DB0D9"/>
-                </a:solidFill>
-                <a:latin typeface="Arial" pitchFamily="34" charset="0"/>
-                <a:ea typeface="Arial" pitchFamily="34" charset="-122"/>
-                <a:cs typeface="Arial" pitchFamily="34" charset="-120"/>
-              </a:rPr>
-              <a:t>the awkward numbers bought me more trust than the good ones</a:t>
-            </a:r>
-            <a:endParaRPr lang="en-US" sz="1200" dirty="0"/>
-          </a:p>
-        </p:txBody>
-      </p:sp>
-      <p:sp>
-        <p:nvSpPr>
-          <p:cNvPr id="13" name="Shape 8"/>
-          <p:cNvSpPr/>
-          <p:nvPr/>
-        </p:nvSpPr>
-        <p:spPr>
-          <a:xfrm>
-            <a:off x="548640" y="4023360"/>
-            <a:ext cx="6766560" cy="960120"/>
-          </a:xfrm>
-          <a:prstGeom prst="roundRect">
-            <a:avLst>
-              <a:gd name="adj" fmla="val 8571"/>
-            </a:avLst>
-          </a:prstGeom>
-          <a:solidFill>
-            <a:srgbClr val="101A38"/>
-          </a:solidFill>
-          <a:ln w="9525">
-            <a:solidFill>
-              <a:srgbClr val="24325C"/>
-            </a:solidFill>
-            <a:prstDash val="solid"/>
-          </a:ln>
-        </p:spPr>
-      </p:sp>
-      <p:pic>
-        <p:nvPicPr>
-          <p:cNvPr id="14" name="Image 3" descr="preencoded.png">    </p:cNvPr>
-          <p:cNvPicPr>
-            <a:picLocks noChangeAspect="1"/>
-          </p:cNvPicPr>
-          <p:nvPr/>
-        </p:nvPicPr>
-        <p:blipFill>
-          <a:blip r:embed="rId5"/>
-          <a:stretch>
-            <a:fillRect/>
-          </a:stretch>
-        </p:blipFill>
-        <p:spPr>
-          <a:xfrm>
-            <a:off x="841248" y="4370832"/>
-            <a:ext cx="237744" cy="246888"/>
-          </a:xfrm>
-          <a:prstGeom prst="rect">
-            <a:avLst/>
-          </a:prstGeom>
-        </p:spPr>
-      </p:pic>
-      <p:sp>
-        <p:nvSpPr>
-          <p:cNvPr id="15" name="Text 9"/>
-          <p:cNvSpPr/>
-          <p:nvPr/>
-        </p:nvSpPr>
-        <p:spPr>
-          <a:xfrm>
-            <a:off x="1280160" y="4133088"/>
-            <a:ext cx="5852160" cy="365760"/>
-          </a:xfrm>
-          <a:prstGeom prst="rect">
-            <a:avLst/>
-          </a:prstGeom>
-          <a:noFill/>
-          <a:ln/>
-        </p:spPr>
-        <p:txBody>
-          <a:bodyPr wrap="square" lIns="0" tIns="0" rIns="0" bIns="0" rtlCol="0" anchor="ctr"/>
-          <a:lstStyle/>
-          <a:p>
-            <a:pPr indent="0" marL="0">
-              <a:buNone/>
-            </a:pPr>
-            <a:r>
-              <a:rPr lang="en-US" sz="1600" b="1" dirty="0">
-                <a:solidFill>
-                  <a:srgbClr val="E8EEFC"/>
-                </a:solidFill>
-                <a:latin typeface="Arial" pitchFamily="34" charset="0"/>
-                <a:ea typeface="Arial" pitchFamily="34" charset="-122"/>
-                <a:cs typeface="Arial" pitchFamily="34" charset="-120"/>
-              </a:rPr>
-              <a:t>Pick tools that make rigor fun</a:t>
-            </a:r>
-            <a:endParaRPr lang="en-US" sz="1600" dirty="0"/>
-          </a:p>
-        </p:txBody>
-      </p:sp>
-      <p:sp>
-        <p:nvSpPr>
-          <p:cNvPr id="16" name="Text 10"/>
-          <p:cNvSpPr/>
-          <p:nvPr/>
-        </p:nvSpPr>
-        <p:spPr>
-          <a:xfrm>
-            <a:off x="1280160" y="4517136"/>
-            <a:ext cx="5852160" cy="365760"/>
-          </a:xfrm>
-          <a:prstGeom prst="rect">
-            <a:avLst/>
-          </a:prstGeom>
-          <a:noFill/>
-          <a:ln/>
-        </p:spPr>
-        <p:txBody>
-          <a:bodyPr wrap="square" lIns="0" tIns="0" rIns="0" bIns="0" rtlCol="0" anchor="ctr"/>
-          <a:lstStyle/>
-          <a:p>
-            <a:pPr indent="0" marL="0">
-              <a:buNone/>
-            </a:pPr>
-            <a:r>
-              <a:rPr lang="en-US" sz="1200" dirty="0">
-                <a:solidFill>
-                  <a:srgbClr val="9DB0D9"/>
-                </a:solidFill>
-                <a:latin typeface="Arial" pitchFamily="34" charset="0"/>
-                <a:ea typeface="Arial" pitchFamily="34" charset="-122"/>
-                <a:cs typeface="Arial" pitchFamily="34" charset="-120"/>
-              </a:rPr>
-              <a:t>fun is load-bearing. A review process you enjoy is one you actually run</a:t>
-            </a:r>
-            <a:endParaRPr lang="en-US" sz="1200" dirty="0"/>
-          </a:p>
-        </p:txBody>
-      </p:sp>
-      <p:sp>
-        <p:nvSpPr>
-          <p:cNvPr id="17" name="Shape 11"/>
-          <p:cNvSpPr/>
-          <p:nvPr/>
-        </p:nvSpPr>
-        <p:spPr>
-          <a:xfrm>
-            <a:off x="7635240" y="1737360"/>
-            <a:ext cx="4005072" cy="3246120"/>
-          </a:xfrm>
-          <a:prstGeom prst="roundRect">
-            <a:avLst>
-              <a:gd name="adj" fmla="val 2535"/>
+              <a:gd name="adj" fmla="val 8824"/>
             </a:avLst>
           </a:prstGeom>
           <a:solidFill>
@@ -3468,30 +3641,30 @@
       </p:sp>
       <p:sp>
         <p:nvSpPr>
-          <p:cNvPr id="18" name="Text 12"/>
-          <p:cNvSpPr/>
-          <p:nvPr/>
-        </p:nvSpPr>
-        <p:spPr>
-          <a:xfrm>
-            <a:off x="7909560" y="1965960"/>
-            <a:ext cx="3474720" cy="320040"/>
-          </a:xfrm>
-          <a:prstGeom prst="rect">
-            <a:avLst/>
-          </a:prstGeom>
-          <a:noFill/>
-          <a:ln/>
-        </p:spPr>
-        <p:txBody>
-          <a:bodyPr wrap="square" lIns="0" tIns="0" rIns="0" bIns="0" rtlCol="0" anchor="ctr"/>
-          <a:lstStyle/>
-          <a:p>
-            <a:pPr indent="0" marL="0">
-              <a:buNone/>
-            </a:pPr>
-            <a:r>
-              <a:rPr lang="en-US" sz="1200" b="1" spc="300" kern="0" dirty="0">
+          <p:cNvPr id="6" name="Text 3"/>
+          <p:cNvSpPr/>
+          <p:nvPr/>
+        </p:nvSpPr>
+        <p:spPr>
+          <a:xfrm>
+            <a:off x="822960" y="1783080"/>
+            <a:ext cx="2377440" cy="731520"/>
+          </a:xfrm>
+          <a:prstGeom prst="rect">
+            <a:avLst/>
+          </a:prstGeom>
+          <a:noFill/>
+          <a:ln/>
+        </p:spPr>
+        <p:txBody>
+          <a:bodyPr wrap="square" lIns="0" tIns="0" rIns="0" bIns="0" rtlCol="0" anchor="ctr"/>
+          <a:lstStyle/>
+          <a:p>
+            <a:pPr indent="0" marL="0">
+              <a:buNone/>
+            </a:pPr>
+            <a:r>
+              <a:rPr lang="en-US" sz="1350" b="1" dirty="0">
                 <a:solidFill>
                   <a:srgbClr val="4F74F0"/>
                 </a:solidFill>
@@ -3499,165 +3672,480 @@
                 <a:ea typeface="Arial" pitchFamily="34" charset="-122"/>
                 <a:cs typeface="Arial" pitchFamily="34" charset="-120"/>
               </a:rPr>
-              <a:t>THE 2034 BET</a:t>
-            </a:r>
-            <a:endParaRPr lang="en-US" sz="1200" dirty="0"/>
-          </a:p>
-        </p:txBody>
-      </p:sp>
-      <p:sp>
-        <p:nvSpPr>
-          <p:cNvPr id="19" name="Text 13"/>
-          <p:cNvSpPr/>
-          <p:nvPr/>
-        </p:nvSpPr>
-        <p:spPr>
-          <a:xfrm>
-            <a:off x="7909560" y="2331720"/>
-            <a:ext cx="3474720" cy="868680"/>
-          </a:xfrm>
-          <a:prstGeom prst="rect">
-            <a:avLst/>
-          </a:prstGeom>
-          <a:noFill/>
-          <a:ln/>
-        </p:spPr>
-        <p:txBody>
-          <a:bodyPr wrap="square" lIns="0" tIns="0" rIns="0" bIns="0" rtlCol="0" anchor="ctr"/>
-          <a:lstStyle/>
-          <a:p>
-            <a:pPr indent="0" marL="0">
-              <a:buNone/>
-            </a:pPr>
-            <a:r>
-              <a:rPr lang="en-US" sz="5400" b="1" dirty="0">
-                <a:solidFill>
-                  <a:srgbClr val="E8EEFC"/>
+              <a:t>What I did</a:t>
+            </a:r>
+            <a:endParaRPr lang="en-US" sz="1350" dirty="0"/>
+          </a:p>
+        </p:txBody>
+      </p:sp>
+      <p:sp>
+        <p:nvSpPr>
+          <p:cNvPr id="7" name="Text 4"/>
+          <p:cNvSpPr/>
+          <p:nvPr/>
+        </p:nvSpPr>
+        <p:spPr>
+          <a:xfrm>
+            <a:off x="3291840" y="1783080"/>
+            <a:ext cx="8138160" cy="777240"/>
+          </a:xfrm>
+          <a:prstGeom prst="rect">
+            <a:avLst/>
+          </a:prstGeom>
+          <a:noFill/>
+          <a:ln/>
+        </p:spPr>
+        <p:txBody>
+          <a:bodyPr wrap="square" lIns="0" tIns="0" rIns="0" bIns="0" rtlCol="0" anchor="ctr"/>
+          <a:lstStyle/>
+          <a:p>
+            <a:pPr indent="0" marL="0">
+              <a:buNone/>
+            </a:pPr>
+            <a:r>
+              <a:rPr lang="en-US" sz="1250" dirty="0">
+                <a:solidFill>
+                  <a:srgbClr val="9DB0D9"/>
+                </a:solidFill>
+                <a:latin typeface="Arial" pitchFamily="34" charset="0"/>
+                <a:ea typeface="Arial" pitchFamily="34" charset="-122"/>
+                <a:cs typeface="Arial" pitchFamily="34" charset="-120"/>
+              </a:rPr>
+              <a:t>keyed rate limits on the last X-Forwarded-For hop. That’s the textbook advice — everything left of it is client-forgeable.</a:t>
+            </a:r>
+            <a:endParaRPr lang="en-US" sz="1250" dirty="0"/>
+          </a:p>
+        </p:txBody>
+      </p:sp>
+      <p:sp>
+        <p:nvSpPr>
+          <p:cNvPr id="8" name="Shape 5"/>
+          <p:cNvSpPr/>
+          <p:nvPr/>
+        </p:nvSpPr>
+        <p:spPr>
+          <a:xfrm>
+            <a:off x="548640" y="2761488"/>
+            <a:ext cx="11091672" cy="932688"/>
+          </a:xfrm>
+          <a:prstGeom prst="roundRect">
+            <a:avLst>
+              <a:gd name="adj" fmla="val 8824"/>
+            </a:avLst>
+          </a:prstGeom>
+          <a:solidFill>
+            <a:srgbClr val="0C1530"/>
+          </a:solidFill>
+          <a:ln w="9525">
+            <a:solidFill>
+              <a:srgbClr val="24325C"/>
+            </a:solidFill>
+            <a:prstDash val="solid"/>
+          </a:ln>
+        </p:spPr>
+      </p:sp>
+      <p:sp>
+        <p:nvSpPr>
+          <p:cNvPr id="9" name="Text 6"/>
+          <p:cNvSpPr/>
+          <p:nvPr/>
+        </p:nvSpPr>
+        <p:spPr>
+          <a:xfrm>
+            <a:off x="822960" y="2852928"/>
+            <a:ext cx="2377440" cy="731520"/>
+          </a:xfrm>
+          <a:prstGeom prst="rect">
+            <a:avLst/>
+          </a:prstGeom>
+          <a:noFill/>
+          <a:ln/>
+        </p:spPr>
+        <p:txBody>
+          <a:bodyPr wrap="square" lIns="0" tIns="0" rIns="0" bIns="0" rtlCol="0" anchor="ctr"/>
+          <a:lstStyle/>
+          <a:p>
+            <a:pPr indent="0" marL="0">
+              <a:buNone/>
+            </a:pPr>
+            <a:r>
+              <a:rPr lang="en-US" sz="1350" b="1" dirty="0">
+                <a:solidFill>
+                  <a:srgbClr val="4F74F0"/>
+                </a:solidFill>
+                <a:latin typeface="Arial" pitchFamily="34" charset="0"/>
+                <a:ea typeface="Arial" pitchFamily="34" charset="-122"/>
+                <a:cs typeface="Arial" pitchFamily="34" charset="-120"/>
+              </a:rPr>
+              <a:t>What production did</a:t>
+            </a:r>
+            <a:endParaRPr lang="en-US" sz="1350" dirty="0"/>
+          </a:p>
+        </p:txBody>
+      </p:sp>
+      <p:sp>
+        <p:nvSpPr>
+          <p:cNvPr id="10" name="Text 7"/>
+          <p:cNvSpPr/>
+          <p:nvPr/>
+        </p:nvSpPr>
+        <p:spPr>
+          <a:xfrm>
+            <a:off x="3291840" y="2852928"/>
+            <a:ext cx="8138160" cy="777240"/>
+          </a:xfrm>
+          <a:prstGeom prst="rect">
+            <a:avLst/>
+          </a:prstGeom>
+          <a:noFill/>
+          <a:ln/>
+        </p:spPr>
+        <p:txBody>
+          <a:bodyPr wrap="square" lIns="0" tIns="0" rIns="0" bIns="0" rtlCol="0" anchor="ctr"/>
+          <a:lstStyle/>
+          <a:p>
+            <a:pPr indent="0" marL="0">
+              <a:buNone/>
+            </a:pPr>
+            <a:r>
+              <a:rPr lang="en-US" sz="1250" dirty="0">
+                <a:solidFill>
+                  <a:srgbClr val="9DB0D9"/>
+                </a:solidFill>
+                <a:latin typeface="Arial" pitchFamily="34" charset="0"/>
+                <a:ea typeface="Arial" pitchFamily="34" charset="-122"/>
+                <a:cs typeface="Arial" pitchFamily="34" charset="-120"/>
+              </a:rPr>
+              <a:t>30 rapid requests. Zero 429s. Every request was getting a fresh bucket.</a:t>
+            </a:r>
+            <a:endParaRPr lang="en-US" sz="1250" dirty="0"/>
+          </a:p>
+        </p:txBody>
+      </p:sp>
+      <p:sp>
+        <p:nvSpPr>
+          <p:cNvPr id="11" name="Shape 8"/>
+          <p:cNvSpPr/>
+          <p:nvPr/>
+        </p:nvSpPr>
+        <p:spPr>
+          <a:xfrm>
+            <a:off x="548640" y="3831336"/>
+            <a:ext cx="11091672" cy="932688"/>
+          </a:xfrm>
+          <a:prstGeom prst="roundRect">
+            <a:avLst>
+              <a:gd name="adj" fmla="val 8824"/>
+            </a:avLst>
+          </a:prstGeom>
+          <a:solidFill>
+            <a:srgbClr val="0C1530"/>
+          </a:solidFill>
+          <a:ln w="9525">
+            <a:solidFill>
+              <a:srgbClr val="24325C"/>
+            </a:solidFill>
+            <a:prstDash val="solid"/>
+          </a:ln>
+        </p:spPr>
+      </p:sp>
+      <p:sp>
+        <p:nvSpPr>
+          <p:cNvPr id="12" name="Text 9"/>
+          <p:cNvSpPr/>
+          <p:nvPr/>
+        </p:nvSpPr>
+        <p:spPr>
+          <a:xfrm>
+            <a:off x="822960" y="3922776"/>
+            <a:ext cx="2377440" cy="731520"/>
+          </a:xfrm>
+          <a:prstGeom prst="rect">
+            <a:avLst/>
+          </a:prstGeom>
+          <a:noFill/>
+          <a:ln/>
+        </p:spPr>
+        <p:txBody>
+          <a:bodyPr wrap="square" lIns="0" tIns="0" rIns="0" bIns="0" rtlCol="0" anchor="ctr"/>
+          <a:lstStyle/>
+          <a:p>
+            <a:pPr indent="0" marL="0">
+              <a:buNone/>
+            </a:pPr>
+            <a:r>
+              <a:rPr lang="en-US" sz="1350" b="1" dirty="0">
+                <a:solidFill>
+                  <a:srgbClr val="4F74F0"/>
+                </a:solidFill>
+                <a:latin typeface="Arial" pitchFamily="34" charset="0"/>
+                <a:ea typeface="Arial" pitchFamily="34" charset="-122"/>
+                <a:cs typeface="Arial" pitchFamily="34" charset="-120"/>
+              </a:rPr>
+              <a:t>Why</a:t>
+            </a:r>
+            <a:endParaRPr lang="en-US" sz="1350" dirty="0"/>
+          </a:p>
+        </p:txBody>
+      </p:sp>
+      <p:sp>
+        <p:nvSpPr>
+          <p:cNvPr id="13" name="Text 10"/>
+          <p:cNvSpPr/>
+          <p:nvPr/>
+        </p:nvSpPr>
+        <p:spPr>
+          <a:xfrm>
+            <a:off x="3291840" y="3922776"/>
+            <a:ext cx="8138160" cy="777240"/>
+          </a:xfrm>
+          <a:prstGeom prst="rect">
+            <a:avLst/>
+          </a:prstGeom>
+          <a:noFill/>
+          <a:ln/>
+        </p:spPr>
+        <p:txBody>
+          <a:bodyPr wrap="square" lIns="0" tIns="0" rIns="0" bIns="0" rtlCol="0" anchor="ctr"/>
+          <a:lstStyle/>
+          <a:p>
+            <a:pPr indent="0" marL="0">
+              <a:buNone/>
+            </a:pPr>
+            <a:r>
+              <a:rPr lang="en-US" sz="1250" dirty="0">
+                <a:solidFill>
+                  <a:srgbClr val="9DB0D9"/>
+                </a:solidFill>
+                <a:latin typeface="Arial" pitchFamily="34" charset="0"/>
+                <a:ea typeface="Arial" pitchFamily="34" charset="-122"/>
+                <a:cs typeface="Arial" pitchFamily="34" charset="-120"/>
+              </a:rPr>
+              <a:t>Amplify’s router appends CloudFront’s own edge IP after the viewer IP CloudFront appended. The “last hop” was never the client — it was Amazon.</a:t>
+            </a:r>
+            <a:endParaRPr lang="en-US" sz="1250" dirty="0"/>
+          </a:p>
+        </p:txBody>
+      </p:sp>
+      <p:sp>
+        <p:nvSpPr>
+          <p:cNvPr id="14" name="Shape 11"/>
+          <p:cNvSpPr/>
+          <p:nvPr/>
+        </p:nvSpPr>
+        <p:spPr>
+          <a:xfrm>
+            <a:off x="548640" y="4901184"/>
+            <a:ext cx="11091672" cy="932688"/>
+          </a:xfrm>
+          <a:prstGeom prst="roundRect">
+            <a:avLst>
+              <a:gd name="adj" fmla="val 8824"/>
+            </a:avLst>
+          </a:prstGeom>
+          <a:solidFill>
+            <a:srgbClr val="0C1530"/>
+          </a:solidFill>
+          <a:ln w="9525">
+            <a:solidFill>
+              <a:srgbClr val="24325C"/>
+            </a:solidFill>
+            <a:prstDash val="solid"/>
+          </a:ln>
+        </p:spPr>
+      </p:sp>
+      <p:sp>
+        <p:nvSpPr>
+          <p:cNvPr id="15" name="Text 12"/>
+          <p:cNvSpPr/>
+          <p:nvPr/>
+        </p:nvSpPr>
+        <p:spPr>
+          <a:xfrm>
+            <a:off x="822960" y="4992624"/>
+            <a:ext cx="2377440" cy="731520"/>
+          </a:xfrm>
+          <a:prstGeom prst="rect">
+            <a:avLst/>
+          </a:prstGeom>
+          <a:noFill/>
+          <a:ln/>
+        </p:spPr>
+        <p:txBody>
+          <a:bodyPr wrap="square" lIns="0" tIns="0" rIns="0" bIns="0" rtlCol="0" anchor="ctr"/>
+          <a:lstStyle/>
+          <a:p>
+            <a:pPr indent="0" marL="0">
+              <a:buNone/>
+            </a:pPr>
+            <a:r>
+              <a:rPr lang="en-US" sz="1350" b="1" dirty="0">
+                <a:solidFill>
+                  <a:srgbClr val="4F74F0"/>
+                </a:solidFill>
+                <a:latin typeface="Arial" pitchFamily="34" charset="0"/>
+                <a:ea typeface="Arial" pitchFamily="34" charset="-122"/>
+                <a:cs typeface="Arial" pitchFamily="34" charset="-120"/>
+              </a:rPr>
+              <a:t>The fix</a:t>
+            </a:r>
+            <a:endParaRPr lang="en-US" sz="1350" dirty="0"/>
+          </a:p>
+        </p:txBody>
+      </p:sp>
+      <p:sp>
+        <p:nvSpPr>
+          <p:cNvPr id="16" name="Text 13"/>
+          <p:cNvSpPr/>
+          <p:nvPr/>
+        </p:nvSpPr>
+        <p:spPr>
+          <a:xfrm>
+            <a:off x="3291840" y="4992624"/>
+            <a:ext cx="8138160" cy="777240"/>
+          </a:xfrm>
+          <a:prstGeom prst="rect">
+            <a:avLst/>
+          </a:prstGeom>
+          <a:noFill/>
+          <a:ln/>
+        </p:spPr>
+        <p:txBody>
+          <a:bodyPr wrap="square" lIns="0" tIns="0" rIns="0" bIns="0" rtlCol="0" anchor="ctr"/>
+          <a:lstStyle/>
+          <a:p>
+            <a:pPr indent="0" marL="0">
+              <a:buNone/>
+            </a:pPr>
+            <a:r>
+              <a:rPr lang="en-US" sz="1250" dirty="0">
+                <a:solidFill>
+                  <a:srgbClr val="9DB0D9"/>
+                </a:solidFill>
+                <a:latin typeface="Arial" pitchFamily="34" charset="0"/>
+                <a:ea typeface="Arial" pitchFamily="34" charset="-122"/>
+                <a:cs typeface="Arial" pitchFamily="34" charset="-120"/>
+              </a:rPr>
+              <a:t>key on the second-to-last hop, global cap as a backstop, and a regression test that pins the exact header shapes so it can’t come back.</a:t>
+            </a:r>
+            <a:endParaRPr lang="en-US" sz="1250" dirty="0"/>
+          </a:p>
+        </p:txBody>
+      </p:sp>
+      <p:sp>
+        <p:nvSpPr>
+          <p:cNvPr id="17" name="Text 14"/>
+          <p:cNvSpPr/>
+          <p:nvPr/>
+        </p:nvSpPr>
+        <p:spPr>
+          <a:xfrm>
+            <a:off x="548640" y="6035040"/>
+            <a:ext cx="11091672" cy="365760"/>
+          </a:xfrm>
+          <a:prstGeom prst="rect">
+            <a:avLst/>
+          </a:prstGeom>
+          <a:noFill/>
+          <a:ln/>
+        </p:spPr>
+        <p:txBody>
+          <a:bodyPr wrap="square" lIns="0" tIns="0" rIns="0" bIns="0" rtlCol="0" anchor="ctr"/>
+          <a:lstStyle/>
+          <a:p>
+            <a:pPr algn="ctr" indent="0" marL="0">
+              <a:buNone/>
+            </a:pPr>
+            <a:r>
+              <a:rPr lang="en-US" sz="1400" b="1" i="1" dirty="0">
+                <a:solidFill>
+                  <a:srgbClr val="4F74F0"/>
+                </a:solidFill>
+                <a:latin typeface="Arial" pitchFamily="34" charset="0"/>
+                <a:ea typeface="Arial" pitchFamily="34" charset="-122"/>
+                <a:cs typeface="Arial" pitchFamily="34" charset="-120"/>
+              </a:rPr>
+              <a:t>Practice exams don’t teach proxy chains. Production does.</a:t>
+            </a:r>
+            <a:endParaRPr lang="en-US" sz="1400" dirty="0"/>
+          </a:p>
+        </p:txBody>
+      </p:sp>
+      <p:sp>
+        <p:nvSpPr>
+          <p:cNvPr id="18" name="Text 15"/>
+          <p:cNvSpPr/>
+          <p:nvPr/>
+        </p:nvSpPr>
+        <p:spPr>
+          <a:xfrm>
+            <a:off x="548640" y="6473952"/>
+            <a:ext cx="3657600" cy="274320"/>
+          </a:xfrm>
+          <a:prstGeom prst="rect">
+            <a:avLst/>
+          </a:prstGeom>
+          <a:noFill/>
+          <a:ln/>
+        </p:spPr>
+        <p:txBody>
+          <a:bodyPr wrap="square" lIns="0" tIns="0" rIns="0" bIns="0" rtlCol="0" anchor="ctr"/>
+          <a:lstStyle/>
+          <a:p>
+            <a:pPr indent="0" marL="0">
+              <a:buNone/>
+            </a:pPr>
+            <a:r>
+              <a:rPr lang="en-US" sz="900" dirty="0">
+                <a:solidFill>
+                  <a:srgbClr val="5E6F9E"/>
+                </a:solidFill>
+                <a:latin typeface="Arial" pitchFamily="34" charset="0"/>
+                <a:ea typeface="Arial" pitchFamily="34" charset="-122"/>
+                <a:cs typeface="Arial" pitchFamily="34" charset="-120"/>
+              </a:rPr>
+              <a:t>CareerStar · ashleylibasci.com</a:t>
+            </a:r>
+            <a:endParaRPr lang="en-US" sz="900" dirty="0"/>
+          </a:p>
+        </p:txBody>
+      </p:sp>
+      <p:sp>
+        <p:nvSpPr>
+          <p:cNvPr id="19" name="Text 16"/>
+          <p:cNvSpPr/>
+          <p:nvPr/>
+        </p:nvSpPr>
+        <p:spPr>
+          <a:xfrm>
+            <a:off x="11277295" y="6473952"/>
+            <a:ext cx="365760" cy="274320"/>
+          </a:xfrm>
+          <a:prstGeom prst="rect">
+            <a:avLst/>
+          </a:prstGeom>
+          <a:noFill/>
+          <a:ln/>
+        </p:spPr>
+        <p:txBody>
+          <a:bodyPr wrap="square" lIns="0" tIns="0" rIns="0" bIns="0" rtlCol="0" anchor="ctr"/>
+          <a:lstStyle/>
+          <a:p>
+            <a:pPr algn="r" indent="0" marL="0">
+              <a:buNone/>
+            </a:pPr>
+            <a:r>
+              <a:rPr lang="en-US" sz="900" dirty="0">
+                <a:solidFill>
+                  <a:srgbClr val="5E6F9E"/>
                 </a:solidFill>
                 <a:latin typeface="Courier New" pitchFamily="34" charset="0"/>
                 <a:ea typeface="Courier New" pitchFamily="34" charset="-122"/>
                 <a:cs typeface="Courier New" pitchFamily="34" charset="-120"/>
               </a:rPr>
-              <a:t>2034</a:t>
-            </a:r>
-            <a:endParaRPr lang="en-US" sz="5400" dirty="0"/>
-          </a:p>
-        </p:txBody>
-      </p:sp>
-      <p:sp>
-        <p:nvSpPr>
-          <p:cNvPr id="20" name="Text 14"/>
-          <p:cNvSpPr/>
-          <p:nvPr/>
-        </p:nvSpPr>
-        <p:spPr>
-          <a:xfrm>
-            <a:off x="7909560" y="3291840"/>
-            <a:ext cx="3474720" cy="914400"/>
-          </a:xfrm>
-          <a:prstGeom prst="rect">
-            <a:avLst/>
-          </a:prstGeom>
-          <a:noFill/>
-          <a:ln/>
-        </p:spPr>
-        <p:txBody>
-          <a:bodyPr wrap="square" lIns="0" tIns="0" rIns="0" bIns="0" rtlCol="0" anchor="ctr"/>
-          <a:lstStyle/>
-          <a:p>
-            <a:pPr indent="0" marL="0">
-              <a:buNone/>
-            </a:pPr>
-            <a:r>
-              <a:rPr lang="en-US" sz="1200" dirty="0">
-                <a:solidFill>
-                  <a:srgbClr val="9DB0D9"/>
-                </a:solidFill>
-                <a:latin typeface="Arial" pitchFamily="34" charset="0"/>
-                <a:ea typeface="Arial" pitchFamily="34" charset="-122"/>
-                <a:cs typeface="Arial" pitchFamily="34" charset="-120"/>
-              </a:rPr>
-              <a:t>I re-run the back-test on the 2024–34 decade and publish how my ratings aged. Hits, misses, all of it.</a:t>
-            </a:r>
-            <a:endParaRPr lang="en-US" sz="1200" dirty="0"/>
-          </a:p>
-        </p:txBody>
-      </p:sp>
-      <p:sp>
-        <p:nvSpPr>
-          <p:cNvPr id="21" name="Text 15"/>
-          <p:cNvSpPr/>
-          <p:nvPr/>
-        </p:nvSpPr>
-        <p:spPr>
-          <a:xfrm>
-            <a:off x="7909560" y="4297680"/>
-            <a:ext cx="3474720" cy="548640"/>
-          </a:xfrm>
-          <a:prstGeom prst="rect">
-            <a:avLst/>
-          </a:prstGeom>
-          <a:noFill/>
-          <a:ln/>
-        </p:spPr>
-        <p:txBody>
-          <a:bodyPr wrap="square" lIns="0" tIns="0" rIns="0" bIns="0" rtlCol="0" anchor="ctr"/>
-          <a:lstStyle/>
-          <a:p>
-            <a:pPr indent="0" marL="0">
-              <a:buNone/>
-            </a:pPr>
-            <a:r>
-              <a:rPr lang="en-US" sz="1200" b="1" i="1" dirty="0">
-                <a:solidFill>
-                  <a:srgbClr val="34D399"/>
-                </a:solidFill>
-                <a:latin typeface="Arial" pitchFamily="34" charset="0"/>
-                <a:ea typeface="Arial" pitchFamily="34" charset="-122"/>
-                <a:cs typeface="Arial" pitchFamily="34" charset="-120"/>
-              </a:rPr>
-              <a:t>Ratings agencies should eat their own cooking.</a:t>
-            </a:r>
-            <a:endParaRPr lang="en-US" sz="1200" dirty="0"/>
-          </a:p>
-        </p:txBody>
-      </p:sp>
-      <p:sp>
-        <p:nvSpPr>
-          <p:cNvPr id="22" name="Text 16"/>
-          <p:cNvSpPr/>
-          <p:nvPr/>
-        </p:nvSpPr>
-        <p:spPr>
-          <a:xfrm>
-            <a:off x="548640" y="5943600"/>
-            <a:ext cx="11091672" cy="365760"/>
-          </a:xfrm>
-          <a:prstGeom prst="rect">
-            <a:avLst/>
-          </a:prstGeom>
-          <a:noFill/>
-          <a:ln/>
-        </p:spPr>
-        <p:txBody>
-          <a:bodyPr wrap="square" lIns="0" tIns="0" rIns="0" bIns="0" rtlCol="0" anchor="ctr"/>
-          <a:lstStyle/>
-          <a:p>
-            <a:pPr algn="ctr" indent="0" marL="0">
-              <a:buNone/>
-            </a:pPr>
-            <a:r>
-              <a:rPr lang="en-US" sz="1400" dirty="0">
-                <a:solidFill>
-                  <a:srgbClr val="E8EEFC"/>
-                </a:solidFill>
-                <a:latin typeface="Arial" pitchFamily="34" charset="0"/>
-                <a:ea typeface="Arial" pitchFamily="34" charset="-122"/>
-                <a:cs typeface="Arial" pitchFamily="34" charset="-120"/>
-              </a:rPr>
-              <a:t>Thanks — questions?   ·   ashleylibasci.com   ·   github.com/ashleylibasci/careerstar</a:t>
-            </a:r>
-            <a:endParaRPr lang="en-US" sz="1400" dirty="0"/>
+              <a:t>11</a:t>
+            </a:r>
+            <a:endParaRPr lang="en-US" sz="900" dirty="0"/>
           </a:p>
         </p:txBody>
       </p:sp>
@@ -3716,7 +4204,7 @@
         </p:blipFill>
         <p:spPr>
           <a:xfrm>
-            <a:off x="548640" y="402336"/>
+            <a:off x="548640" y="475488"/>
             <a:ext cx="155448" cy="164592"/>
           </a:xfrm>
           <a:prstGeom prst="rect">
@@ -3732,7 +4220,7 @@
         </p:nvSpPr>
         <p:spPr>
           <a:xfrm>
-            <a:off x="786384" y="384048"/>
+            <a:off x="786384" y="457200"/>
             <a:ext cx="7315200" cy="274320"/>
           </a:xfrm>
           <a:prstGeom prst="rect">
@@ -3757,7 +4245,7 @@
                 <a:ea typeface="Arial" pitchFamily="34" charset="-122"/>
                 <a:cs typeface="Arial" pitchFamily="34" charset="-120"/>
               </a:rPr>
-              <a:t>BACKUP · Q&amp;A</a:t>
+              <a:t>11 · CLOSE</a:t>
             </a:r>
             <a:endParaRPr lang="en-US" sz="1100" dirty="0"/>
           </a:p>
@@ -3771,7 +4259,7 @@
         </p:nvSpPr>
         <p:spPr>
           <a:xfrm>
-            <a:off x="548640" y="658368"/>
+            <a:off x="548640" y="777240"/>
             <a:ext cx="11094415" cy="685800"/>
           </a:xfrm>
           <a:prstGeom prst="rect">
@@ -3788,7 +4276,7 @@
               <a:buNone/>
             </a:pPr>
             <a:r>
-              <a:rPr lang="en-US" sz="2600" b="1" dirty="0">
+              <a:rPr lang="en-US" sz="3100" b="1" dirty="0">
                 <a:solidFill>
                   <a:srgbClr val="E8EEFC"/>
                 </a:solidFill>
@@ -3796,9 +4284,9 @@
                 <a:ea typeface="Arial" pitchFamily="34" charset="-122"/>
                 <a:cs typeface="Arial" pitchFamily="34" charset="-120"/>
               </a:rPr>
-              <a:t>Weights, stars, and robustness</a:t>
-            </a:r>
-            <a:endParaRPr lang="en-US" sz="2600" dirty="0"/>
+              <a:t>Three things worth stealing</a:t>
+            </a:r>
+            <a:endParaRPr lang="en-US" sz="3100" dirty="0"/>
           </a:p>
         </p:txBody>
       </p:sp>
@@ -3811,11 +4299,398 @@
         <p:spPr>
           <a:xfrm>
             <a:off x="548640" y="1737360"/>
-            <a:ext cx="11091672" cy="1207008"/>
+            <a:ext cx="6766560" cy="960120"/>
           </a:xfrm>
           <a:prstGeom prst="roundRect">
             <a:avLst>
-              <a:gd name="adj" fmla="val 6818"/>
+              <a:gd name="adj" fmla="val 8571"/>
+            </a:avLst>
+          </a:prstGeom>
+          <a:solidFill>
+            <a:srgbClr val="101A38"/>
+          </a:solidFill>
+          <a:ln w="9525">
+            <a:solidFill>
+              <a:srgbClr val="24325C"/>
+            </a:solidFill>
+            <a:prstDash val="solid"/>
+          </a:ln>
+        </p:spPr>
+      </p:sp>
+      <p:pic>
+        <p:nvPicPr>
+          <p:cNvPr id="6" name="Image 1" descr="preencoded.png">    </p:cNvPr>
+          <p:cNvPicPr>
+            <a:picLocks noChangeAspect="1"/>
+          </p:cNvPicPr>
+          <p:nvPr/>
+        </p:nvPicPr>
+        <p:blipFill>
+          <a:blip r:embed="rId3"/>
+          <a:stretch>
+            <a:fillRect/>
+          </a:stretch>
+        </p:blipFill>
+        <p:spPr>
+          <a:xfrm>
+            <a:off x="841248" y="2084832"/>
+            <a:ext cx="237744" cy="246888"/>
+          </a:xfrm>
+          <a:prstGeom prst="rect">
+            <a:avLst/>
+          </a:prstGeom>
+        </p:spPr>
+      </p:pic>
+      <p:sp>
+        <p:nvSpPr>
+          <p:cNvPr id="7" name="Text 3"/>
+          <p:cNvSpPr/>
+          <p:nvPr/>
+        </p:nvSpPr>
+        <p:spPr>
+          <a:xfrm>
+            <a:off x="1280160" y="1847088"/>
+            <a:ext cx="5852160" cy="365760"/>
+          </a:xfrm>
+          <a:prstGeom prst="rect">
+            <a:avLst/>
+          </a:prstGeom>
+          <a:noFill/>
+          <a:ln/>
+        </p:spPr>
+        <p:txBody>
+          <a:bodyPr wrap="square" lIns="0" tIns="0" rIns="0" bIns="0" rtlCol="0" anchor="ctr"/>
+          <a:lstStyle/>
+          <a:p>
+            <a:pPr indent="0" marL="0">
+              <a:buNone/>
+            </a:pPr>
+            <a:r>
+              <a:rPr lang="en-US" sz="1600" b="1" dirty="0">
+                <a:solidFill>
+                  <a:srgbClr val="E8EEFC"/>
+                </a:solidFill>
+                <a:latin typeface="Arial" pitchFamily="34" charset="0"/>
+                <a:ea typeface="Arial" pitchFamily="34" charset="-122"/>
+                <a:cs typeface="Arial" pitchFamily="34" charset="-120"/>
+              </a:rPr>
+              <a:t>Write the spec before the prompt</a:t>
+            </a:r>
+            <a:endParaRPr lang="en-US" sz="1600" dirty="0"/>
+          </a:p>
+        </p:txBody>
+      </p:sp>
+      <p:sp>
+        <p:nvSpPr>
+          <p:cNvPr id="8" name="Text 4"/>
+          <p:cNvSpPr/>
+          <p:nvPr/>
+        </p:nvSpPr>
+        <p:spPr>
+          <a:xfrm>
+            <a:off x="1280160" y="2231136"/>
+            <a:ext cx="5852160" cy="365760"/>
+          </a:xfrm>
+          <a:prstGeom prst="rect">
+            <a:avLst/>
+          </a:prstGeom>
+          <a:noFill/>
+          <a:ln/>
+        </p:spPr>
+        <p:txBody>
+          <a:bodyPr wrap="square" lIns="0" tIns="0" rIns="0" bIns="0" rtlCol="0" anchor="ctr"/>
+          <a:lstStyle/>
+          <a:p>
+            <a:pPr indent="0" marL="0">
+              <a:buNone/>
+            </a:pPr>
+            <a:r>
+              <a:rPr lang="en-US" sz="1200" dirty="0">
+                <a:solidFill>
+                  <a:srgbClr val="9DB0D9"/>
+                </a:solidFill>
+                <a:latin typeface="Arial" pitchFamily="34" charset="0"/>
+                <a:ea typeface="Arial" pitchFamily="34" charset="-122"/>
+                <a:cs typeface="Arial" pitchFamily="34" charset="-120"/>
+              </a:rPr>
+              <a:t>the discipline, not the model, is what made this work</a:t>
+            </a:r>
+            <a:endParaRPr lang="en-US" sz="1200" dirty="0"/>
+          </a:p>
+        </p:txBody>
+      </p:sp>
+      <p:sp>
+        <p:nvSpPr>
+          <p:cNvPr id="9" name="Shape 5"/>
+          <p:cNvSpPr/>
+          <p:nvPr/>
+        </p:nvSpPr>
+        <p:spPr>
+          <a:xfrm>
+            <a:off x="548640" y="2880360"/>
+            <a:ext cx="6766560" cy="960120"/>
+          </a:xfrm>
+          <a:prstGeom prst="roundRect">
+            <a:avLst>
+              <a:gd name="adj" fmla="val 8571"/>
+            </a:avLst>
+          </a:prstGeom>
+          <a:solidFill>
+            <a:srgbClr val="101A38"/>
+          </a:solidFill>
+          <a:ln w="9525">
+            <a:solidFill>
+              <a:srgbClr val="24325C"/>
+            </a:solidFill>
+            <a:prstDash val="solid"/>
+          </a:ln>
+        </p:spPr>
+      </p:sp>
+      <p:pic>
+        <p:nvPicPr>
+          <p:cNvPr id="10" name="Image 2" descr="preencoded.png">    </p:cNvPr>
+          <p:cNvPicPr>
+            <a:picLocks noChangeAspect="1"/>
+          </p:cNvPicPr>
+          <p:nvPr/>
+        </p:nvPicPr>
+        <p:blipFill>
+          <a:blip r:embed="rId4"/>
+          <a:stretch>
+            <a:fillRect/>
+          </a:stretch>
+        </p:blipFill>
+        <p:spPr>
+          <a:xfrm>
+            <a:off x="841248" y="3227832"/>
+            <a:ext cx="237744" cy="246888"/>
+          </a:xfrm>
+          <a:prstGeom prst="rect">
+            <a:avLst/>
+          </a:prstGeom>
+        </p:spPr>
+      </p:pic>
+      <p:sp>
+        <p:nvSpPr>
+          <p:cNvPr id="11" name="Text 6"/>
+          <p:cNvSpPr/>
+          <p:nvPr/>
+        </p:nvSpPr>
+        <p:spPr>
+          <a:xfrm>
+            <a:off x="1280160" y="2990088"/>
+            <a:ext cx="5852160" cy="365760"/>
+          </a:xfrm>
+          <a:prstGeom prst="rect">
+            <a:avLst/>
+          </a:prstGeom>
+          <a:noFill/>
+          <a:ln/>
+        </p:spPr>
+        <p:txBody>
+          <a:bodyPr wrap="square" lIns="0" tIns="0" rIns="0" bIns="0" rtlCol="0" anchor="ctr"/>
+          <a:lstStyle/>
+          <a:p>
+            <a:pPr indent="0" marL="0">
+              <a:buNone/>
+            </a:pPr>
+            <a:r>
+              <a:rPr lang="en-US" sz="1600" b="1" dirty="0">
+                <a:solidFill>
+                  <a:srgbClr val="E8EEFC"/>
+                </a:solidFill>
+                <a:latin typeface="Arial" pitchFamily="34" charset="0"/>
+                <a:ea typeface="Arial" pitchFamily="34" charset="-122"/>
+                <a:cs typeface="Arial" pitchFamily="34" charset="-120"/>
+              </a:rPr>
+              <a:t>Publish what your model gets wrong</a:t>
+            </a:r>
+            <a:endParaRPr lang="en-US" sz="1600" dirty="0"/>
+          </a:p>
+        </p:txBody>
+      </p:sp>
+      <p:sp>
+        <p:nvSpPr>
+          <p:cNvPr id="12" name="Text 7"/>
+          <p:cNvSpPr/>
+          <p:nvPr/>
+        </p:nvSpPr>
+        <p:spPr>
+          <a:xfrm>
+            <a:off x="1280160" y="3374136"/>
+            <a:ext cx="5852160" cy="365760"/>
+          </a:xfrm>
+          <a:prstGeom prst="rect">
+            <a:avLst/>
+          </a:prstGeom>
+          <a:noFill/>
+          <a:ln/>
+        </p:spPr>
+        <p:txBody>
+          <a:bodyPr wrap="square" lIns="0" tIns="0" rIns="0" bIns="0" rtlCol="0" anchor="ctr"/>
+          <a:lstStyle/>
+          <a:p>
+            <a:pPr indent="0" marL="0">
+              <a:buNone/>
+            </a:pPr>
+            <a:r>
+              <a:rPr lang="en-US" sz="1200" dirty="0">
+                <a:solidFill>
+                  <a:srgbClr val="9DB0D9"/>
+                </a:solidFill>
+                <a:latin typeface="Arial" pitchFamily="34" charset="0"/>
+                <a:ea typeface="Arial" pitchFamily="34" charset="-122"/>
+                <a:cs typeface="Arial" pitchFamily="34" charset="-120"/>
+              </a:rPr>
+              <a:t>the awkward numbers bought me more trust than the good ones</a:t>
+            </a:r>
+            <a:endParaRPr lang="en-US" sz="1200" dirty="0"/>
+          </a:p>
+        </p:txBody>
+      </p:sp>
+      <p:sp>
+        <p:nvSpPr>
+          <p:cNvPr id="13" name="Shape 8"/>
+          <p:cNvSpPr/>
+          <p:nvPr/>
+        </p:nvSpPr>
+        <p:spPr>
+          <a:xfrm>
+            <a:off x="548640" y="4023360"/>
+            <a:ext cx="6766560" cy="960120"/>
+          </a:xfrm>
+          <a:prstGeom prst="roundRect">
+            <a:avLst>
+              <a:gd name="adj" fmla="val 8571"/>
+            </a:avLst>
+          </a:prstGeom>
+          <a:solidFill>
+            <a:srgbClr val="101A38"/>
+          </a:solidFill>
+          <a:ln w="9525">
+            <a:solidFill>
+              <a:srgbClr val="24325C"/>
+            </a:solidFill>
+            <a:prstDash val="solid"/>
+          </a:ln>
+        </p:spPr>
+      </p:sp>
+      <p:pic>
+        <p:nvPicPr>
+          <p:cNvPr id="14" name="Image 3" descr="preencoded.png">    </p:cNvPr>
+          <p:cNvPicPr>
+            <a:picLocks noChangeAspect="1"/>
+          </p:cNvPicPr>
+          <p:nvPr/>
+        </p:nvPicPr>
+        <p:blipFill>
+          <a:blip r:embed="rId5"/>
+          <a:stretch>
+            <a:fillRect/>
+          </a:stretch>
+        </p:blipFill>
+        <p:spPr>
+          <a:xfrm>
+            <a:off x="841248" y="4370832"/>
+            <a:ext cx="237744" cy="246888"/>
+          </a:xfrm>
+          <a:prstGeom prst="rect">
+            <a:avLst/>
+          </a:prstGeom>
+        </p:spPr>
+      </p:pic>
+      <p:sp>
+        <p:nvSpPr>
+          <p:cNvPr id="15" name="Text 9"/>
+          <p:cNvSpPr/>
+          <p:nvPr/>
+        </p:nvSpPr>
+        <p:spPr>
+          <a:xfrm>
+            <a:off x="1280160" y="4133088"/>
+            <a:ext cx="5852160" cy="365760"/>
+          </a:xfrm>
+          <a:prstGeom prst="rect">
+            <a:avLst/>
+          </a:prstGeom>
+          <a:noFill/>
+          <a:ln/>
+        </p:spPr>
+        <p:txBody>
+          <a:bodyPr wrap="square" lIns="0" tIns="0" rIns="0" bIns="0" rtlCol="0" anchor="ctr"/>
+          <a:lstStyle/>
+          <a:p>
+            <a:pPr indent="0" marL="0">
+              <a:buNone/>
+            </a:pPr>
+            <a:r>
+              <a:rPr lang="en-US" sz="1600" b="1" dirty="0">
+                <a:solidFill>
+                  <a:srgbClr val="E8EEFC"/>
+                </a:solidFill>
+                <a:latin typeface="Arial" pitchFamily="34" charset="0"/>
+                <a:ea typeface="Arial" pitchFamily="34" charset="-122"/>
+                <a:cs typeface="Arial" pitchFamily="34" charset="-120"/>
+              </a:rPr>
+              <a:t>Pick tools that make rigor fun</a:t>
+            </a:r>
+            <a:endParaRPr lang="en-US" sz="1600" dirty="0"/>
+          </a:p>
+        </p:txBody>
+      </p:sp>
+      <p:sp>
+        <p:nvSpPr>
+          <p:cNvPr id="16" name="Text 10"/>
+          <p:cNvSpPr/>
+          <p:nvPr/>
+        </p:nvSpPr>
+        <p:spPr>
+          <a:xfrm>
+            <a:off x="1280160" y="4517136"/>
+            <a:ext cx="5852160" cy="365760"/>
+          </a:xfrm>
+          <a:prstGeom prst="rect">
+            <a:avLst/>
+          </a:prstGeom>
+          <a:noFill/>
+          <a:ln/>
+        </p:spPr>
+        <p:txBody>
+          <a:bodyPr wrap="square" lIns="0" tIns="0" rIns="0" bIns="0" rtlCol="0" anchor="ctr"/>
+          <a:lstStyle/>
+          <a:p>
+            <a:pPr indent="0" marL="0">
+              <a:buNone/>
+            </a:pPr>
+            <a:r>
+              <a:rPr lang="en-US" sz="1200" dirty="0">
+                <a:solidFill>
+                  <a:srgbClr val="9DB0D9"/>
+                </a:solidFill>
+                <a:latin typeface="Arial" pitchFamily="34" charset="0"/>
+                <a:ea typeface="Arial" pitchFamily="34" charset="-122"/>
+                <a:cs typeface="Arial" pitchFamily="34" charset="-120"/>
+              </a:rPr>
+              <a:t>fun is load-bearing. A review process you enjoy is one you actually run</a:t>
+            </a:r>
+            <a:endParaRPr lang="en-US" sz="1200" dirty="0"/>
+          </a:p>
+        </p:txBody>
+      </p:sp>
+      <p:sp>
+        <p:nvSpPr>
+          <p:cNvPr id="17" name="Shape 11"/>
+          <p:cNvSpPr/>
+          <p:nvPr/>
+        </p:nvSpPr>
+        <p:spPr>
+          <a:xfrm>
+            <a:off x="7635240" y="1737360"/>
+            <a:ext cx="4005072" cy="3246120"/>
+          </a:xfrm>
+          <a:prstGeom prst="roundRect">
+            <a:avLst>
+              <a:gd name="adj" fmla="val 2535"/>
             </a:avLst>
           </a:prstGeom>
           <a:solidFill>
@@ -3831,30 +4706,30 @@
       </p:sp>
       <p:sp>
         <p:nvSpPr>
-          <p:cNvPr id="6" name="Text 3"/>
-          <p:cNvSpPr/>
-          <p:nvPr/>
-        </p:nvSpPr>
-        <p:spPr>
-          <a:xfrm>
-            <a:off x="822960" y="1847088"/>
-            <a:ext cx="10515600" cy="347472"/>
-          </a:xfrm>
-          <a:prstGeom prst="rect">
-            <a:avLst/>
-          </a:prstGeom>
-          <a:noFill/>
-          <a:ln/>
-        </p:spPr>
-        <p:txBody>
-          <a:bodyPr wrap="square" lIns="0" tIns="0" rIns="0" bIns="0" rtlCol="0" anchor="ctr"/>
-          <a:lstStyle/>
-          <a:p>
-            <a:pPr indent="0" marL="0">
-              <a:buNone/>
-            </a:pPr>
-            <a:r>
-              <a:rPr lang="en-US" sz="1350" b="1" dirty="0">
+          <p:cNvPr id="18" name="Text 12"/>
+          <p:cNvSpPr/>
+          <p:nvPr/>
+        </p:nvSpPr>
+        <p:spPr>
+          <a:xfrm>
+            <a:off x="7909560" y="1965960"/>
+            <a:ext cx="3474720" cy="320040"/>
+          </a:xfrm>
+          <a:prstGeom prst="rect">
+            <a:avLst/>
+          </a:prstGeom>
+          <a:noFill/>
+          <a:ln/>
+        </p:spPr>
+        <p:txBody>
+          <a:bodyPr wrap="square" lIns="0" tIns="0" rIns="0" bIns="0" rtlCol="0" anchor="ctr"/>
+          <a:lstStyle/>
+          <a:p>
+            <a:pPr indent="0" marL="0">
+              <a:buNone/>
+            </a:pPr>
+            <a:r>
+              <a:rPr lang="en-US" sz="1200" b="1" spc="300" kern="0" dirty="0">
                 <a:solidFill>
                   <a:srgbClr val="4F74F0"/>
                 </a:solidFill>
@@ -3862,336 +4737,165 @@
                 <a:ea typeface="Arial" pitchFamily="34" charset="-122"/>
                 <a:cs typeface="Arial" pitchFamily="34" charset="-120"/>
               </a:rPr>
-              <a:t>“Why 0.7 and not 0.6?”</a:t>
-            </a:r>
-            <a:endParaRPr lang="en-US" sz="1350" dirty="0"/>
-          </a:p>
-        </p:txBody>
-      </p:sp>
-      <p:sp>
-        <p:nvSpPr>
-          <p:cNvPr id="7" name="Text 4"/>
-          <p:cNvSpPr/>
-          <p:nvPr/>
-        </p:nvSpPr>
-        <p:spPr>
-          <a:xfrm>
-            <a:off x="822960" y="2212848"/>
-            <a:ext cx="10515600" cy="685800"/>
-          </a:xfrm>
-          <a:prstGeom prst="rect">
-            <a:avLst/>
-          </a:prstGeom>
-          <a:noFill/>
-          <a:ln/>
-        </p:spPr>
-        <p:txBody>
-          <a:bodyPr wrap="square" lIns="0" tIns="0" rIns="0" bIns="0" rtlCol="0" anchor="ctr"/>
-          <a:lstStyle/>
-          <a:p>
-            <a:pPr indent="0" marL="0">
-              <a:buNone/>
-            </a:pPr>
-            <a:r>
-              <a:rPr lang="en-US" sz="1150" dirty="0">
-                <a:solidFill>
-                  <a:srgbClr val="9DB0D9"/>
-                </a:solidFill>
-                <a:latin typeface="Arial" pitchFamily="34" charset="0"/>
-                <a:ea typeface="Arial" pitchFamily="34" charset="-122"/>
-                <a:cs typeface="Arial" pitchFamily="34" charset="-120"/>
-              </a:rPr>
-              <a:t>Because I had to pick something and there’s nothing to fit on — no dataset of correct career choices exists. So I say “prior” out loud and stress-test instead: 729 perturbations, five rival models, and rankings that don’t survive get labeled close call.</a:t>
-            </a:r>
-            <a:endParaRPr lang="en-US" sz="1150" dirty="0"/>
-          </a:p>
-        </p:txBody>
-      </p:sp>
-      <p:sp>
-        <p:nvSpPr>
-          <p:cNvPr id="8" name="Shape 5"/>
-          <p:cNvSpPr/>
-          <p:nvPr/>
-        </p:nvSpPr>
-        <p:spPr>
-          <a:xfrm>
-            <a:off x="548640" y="3127248"/>
-            <a:ext cx="11091672" cy="1207008"/>
-          </a:xfrm>
-          <a:prstGeom prst="roundRect">
-            <a:avLst>
-              <a:gd name="adj" fmla="val 6818"/>
-            </a:avLst>
-          </a:prstGeom>
-          <a:solidFill>
-            <a:srgbClr val="0C1530"/>
-          </a:solidFill>
-          <a:ln w="9525">
-            <a:solidFill>
-              <a:srgbClr val="24325C"/>
-            </a:solidFill>
-            <a:prstDash val="solid"/>
-          </a:ln>
-        </p:spPr>
-      </p:sp>
-      <p:sp>
-        <p:nvSpPr>
-          <p:cNvPr id="9" name="Text 6"/>
-          <p:cNvSpPr/>
-          <p:nvPr/>
-        </p:nvSpPr>
-        <p:spPr>
-          <a:xfrm>
-            <a:off x="822960" y="3236976"/>
-            <a:ext cx="10515600" cy="347472"/>
-          </a:xfrm>
-          <a:prstGeom prst="rect">
-            <a:avLst/>
-          </a:prstGeom>
-          <a:noFill/>
-          <a:ln/>
-        </p:spPr>
-        <p:txBody>
-          <a:bodyPr wrap="square" lIns="0" tIns="0" rIns="0" bIns="0" rtlCol="0" anchor="ctr"/>
-          <a:lstStyle/>
-          <a:p>
-            <a:pPr indent="0" marL="0">
-              <a:buNone/>
-            </a:pPr>
-            <a:r>
-              <a:rPr lang="en-US" sz="1350" b="1" dirty="0">
-                <a:solidFill>
-                  <a:srgbClr val="4F74F0"/>
-                </a:solidFill>
-                <a:latin typeface="Arial" pitchFamily="34" charset="0"/>
-                <a:ea typeface="Arial" pitchFamily="34" charset="-122"/>
-                <a:cs typeface="Arial" pitchFamily="34" charset="-120"/>
-              </a:rPr>
-              <a:t>“How do the stars work?”</a:t>
-            </a:r>
-            <a:endParaRPr lang="en-US" sz="1350" dirty="0"/>
-          </a:p>
-        </p:txBody>
-      </p:sp>
-      <p:sp>
-        <p:nvSpPr>
-          <p:cNvPr id="10" name="Text 7"/>
-          <p:cNvSpPr/>
-          <p:nvPr/>
-        </p:nvSpPr>
-        <p:spPr>
-          <a:xfrm>
-            <a:off x="822960" y="3602736"/>
-            <a:ext cx="10515600" cy="685800"/>
-          </a:xfrm>
-          <a:prstGeom prst="rect">
-            <a:avLst/>
-          </a:prstGeom>
-          <a:noFill/>
-          <a:ln/>
-        </p:spPr>
-        <p:txBody>
-          <a:bodyPr wrap="square" lIns="0" tIns="0" rIns="0" bIns="0" rtlCol="0" anchor="ctr"/>
-          <a:lstStyle/>
-          <a:p>
-            <a:pPr indent="0" marL="0">
-              <a:buNone/>
-            </a:pPr>
-            <a:r>
-              <a:rPr lang="en-US" sz="1150" dirty="0">
-                <a:solidFill>
-                  <a:srgbClr val="9DB0D9"/>
-                </a:solidFill>
-                <a:latin typeface="Arial" pitchFamily="34" charset="0"/>
-                <a:ea typeface="Arial" pitchFamily="34" charset="-122"/>
-                <a:cs typeface="Arial" pitchFamily="34" charset="-120"/>
-              </a:rPr>
-              <a:t>Forced relative curve, straight from Morningstar: top 10% get 5 stars, next 22.5% get 4, and so on — recomputed live under whatever weights the user sets.</a:t>
-            </a:r>
-            <a:endParaRPr lang="en-US" sz="1150" dirty="0"/>
-          </a:p>
-        </p:txBody>
-      </p:sp>
-      <p:sp>
-        <p:nvSpPr>
-          <p:cNvPr id="11" name="Shape 8"/>
-          <p:cNvSpPr/>
-          <p:nvPr/>
-        </p:nvSpPr>
-        <p:spPr>
-          <a:xfrm>
-            <a:off x="548640" y="4517136"/>
-            <a:ext cx="11091672" cy="1207008"/>
-          </a:xfrm>
-          <a:prstGeom prst="roundRect">
-            <a:avLst>
-              <a:gd name="adj" fmla="val 6818"/>
-            </a:avLst>
-          </a:prstGeom>
-          <a:solidFill>
-            <a:srgbClr val="0C1530"/>
-          </a:solidFill>
-          <a:ln w="9525">
-            <a:solidFill>
-              <a:srgbClr val="24325C"/>
-            </a:solidFill>
-            <a:prstDash val="solid"/>
-          </a:ln>
-        </p:spPr>
-      </p:sp>
-      <p:sp>
-        <p:nvSpPr>
-          <p:cNvPr id="12" name="Text 9"/>
-          <p:cNvSpPr/>
-          <p:nvPr/>
-        </p:nvSpPr>
-        <p:spPr>
-          <a:xfrm>
-            <a:off x="822960" y="4626864"/>
-            <a:ext cx="10515600" cy="347472"/>
-          </a:xfrm>
-          <a:prstGeom prst="rect">
-            <a:avLst/>
-          </a:prstGeom>
-          <a:noFill/>
-          <a:ln/>
-        </p:spPr>
-        <p:txBody>
-          <a:bodyPr wrap="square" lIns="0" tIns="0" rIns="0" bIns="0" rtlCol="0" anchor="ctr"/>
-          <a:lstStyle/>
-          <a:p>
-            <a:pPr indent="0" marL="0">
-              <a:buNone/>
-            </a:pPr>
-            <a:r>
-              <a:rPr lang="en-US" sz="1350" b="1" dirty="0">
-                <a:solidFill>
-                  <a:srgbClr val="4F74F0"/>
-                </a:solidFill>
-                <a:latin typeface="Arial" pitchFamily="34" charset="0"/>
-                <a:ea typeface="Arial" pitchFamily="34" charset="-122"/>
-                <a:cs typeface="Arial" pitchFamily="34" charset="-120"/>
-              </a:rPr>
-              <a:t>“Isn’t AI exposure just decline by another name?”</a:t>
-            </a:r>
-            <a:endParaRPr lang="en-US" sz="1350" dirty="0"/>
-          </a:p>
-        </p:txBody>
-      </p:sp>
-      <p:sp>
-        <p:nvSpPr>
-          <p:cNvPr id="13" name="Text 10"/>
-          <p:cNvSpPr/>
-          <p:nvPr/>
-        </p:nvSpPr>
-        <p:spPr>
-          <a:xfrm>
-            <a:off x="822960" y="4992624"/>
-            <a:ext cx="10515600" cy="685800"/>
-          </a:xfrm>
-          <a:prstGeom prst="rect">
-            <a:avLst/>
-          </a:prstGeom>
-          <a:noFill/>
-          <a:ln/>
-        </p:spPr>
-        <p:txBody>
-          <a:bodyPr wrap="square" lIns="0" tIns="0" rIns="0" bIns="0" rtlCol="0" anchor="ctr"/>
-          <a:lstStyle/>
-          <a:p>
-            <a:pPr indent="0" marL="0">
-              <a:buNone/>
-            </a:pPr>
-            <a:r>
-              <a:rPr lang="en-US" sz="1150" dirty="0">
-                <a:solidFill>
-                  <a:srgbClr val="9DB0D9"/>
-                </a:solidFill>
-                <a:latin typeface="Arial" pitchFamily="34" charset="0"/>
-                <a:ea typeface="Arial" pitchFamily="34" charset="-122"/>
-                <a:cs typeface="Arial" pitchFamily="34" charset="-120"/>
-              </a:rPr>
-              <a:t>No. Across all 730, exposure and projected growth are nearly uncorrelated, and growth is flat across exposure quartiles. Exposure knows something growth doesn’t.</a:t>
-            </a:r>
-            <a:endParaRPr lang="en-US" sz="1150" dirty="0"/>
-          </a:p>
-        </p:txBody>
-      </p:sp>
-      <p:sp>
-        <p:nvSpPr>
-          <p:cNvPr id="14" name="Text 11"/>
-          <p:cNvSpPr/>
-          <p:nvPr/>
-        </p:nvSpPr>
-        <p:spPr>
-          <a:xfrm>
-            <a:off x="548640" y="6473952"/>
-            <a:ext cx="3657600" cy="274320"/>
-          </a:xfrm>
-          <a:prstGeom prst="rect">
-            <a:avLst/>
-          </a:prstGeom>
-          <a:noFill/>
-          <a:ln/>
-        </p:spPr>
-        <p:txBody>
-          <a:bodyPr wrap="square" lIns="0" tIns="0" rIns="0" bIns="0" rtlCol="0" anchor="ctr"/>
-          <a:lstStyle/>
-          <a:p>
-            <a:pPr indent="0" marL="0">
-              <a:buNone/>
-            </a:pPr>
-            <a:r>
-              <a:rPr lang="en-US" sz="900" dirty="0">
-                <a:solidFill>
-                  <a:srgbClr val="5E6F9E"/>
-                </a:solidFill>
-                <a:latin typeface="Arial" pitchFamily="34" charset="0"/>
-                <a:ea typeface="Arial" pitchFamily="34" charset="-122"/>
-                <a:cs typeface="Arial" pitchFamily="34" charset="-120"/>
-              </a:rPr>
-              <a:t>CareerStar · ashleylibasci.com</a:t>
-            </a:r>
-            <a:endParaRPr lang="en-US" sz="900" dirty="0"/>
-          </a:p>
-        </p:txBody>
-      </p:sp>
-      <p:sp>
-        <p:nvSpPr>
-          <p:cNvPr id="15" name="Text 12"/>
-          <p:cNvSpPr/>
-          <p:nvPr/>
-        </p:nvSpPr>
-        <p:spPr>
-          <a:xfrm>
-            <a:off x="11277295" y="6473952"/>
-            <a:ext cx="365760" cy="274320"/>
-          </a:xfrm>
-          <a:prstGeom prst="rect">
-            <a:avLst/>
-          </a:prstGeom>
-          <a:noFill/>
-          <a:ln/>
-        </p:spPr>
-        <p:txBody>
-          <a:bodyPr wrap="square" lIns="0" tIns="0" rIns="0" bIns="0" rtlCol="0" anchor="ctr"/>
-          <a:lstStyle/>
-          <a:p>
-            <a:pPr algn="r" indent="0" marL="0">
-              <a:buNone/>
-            </a:pPr>
-            <a:r>
-              <a:rPr lang="en-US" sz="900" dirty="0">
-                <a:solidFill>
-                  <a:srgbClr val="5E6F9E"/>
+              <a:t>THE 2034 BET</a:t>
+            </a:r>
+            <a:endParaRPr lang="en-US" sz="1200" dirty="0"/>
+          </a:p>
+        </p:txBody>
+      </p:sp>
+      <p:sp>
+        <p:nvSpPr>
+          <p:cNvPr id="19" name="Text 13"/>
+          <p:cNvSpPr/>
+          <p:nvPr/>
+        </p:nvSpPr>
+        <p:spPr>
+          <a:xfrm>
+            <a:off x="7909560" y="2331720"/>
+            <a:ext cx="3474720" cy="868680"/>
+          </a:xfrm>
+          <a:prstGeom prst="rect">
+            <a:avLst/>
+          </a:prstGeom>
+          <a:noFill/>
+          <a:ln/>
+        </p:spPr>
+        <p:txBody>
+          <a:bodyPr wrap="square" lIns="0" tIns="0" rIns="0" bIns="0" rtlCol="0" anchor="ctr"/>
+          <a:lstStyle/>
+          <a:p>
+            <a:pPr indent="0" marL="0">
+              <a:buNone/>
+            </a:pPr>
+            <a:r>
+              <a:rPr lang="en-US" sz="5400" b="1" dirty="0">
+                <a:solidFill>
+                  <a:srgbClr val="E8EEFC"/>
                 </a:solidFill>
                 <a:latin typeface="Courier New" pitchFamily="34" charset="0"/>
                 <a:ea typeface="Courier New" pitchFamily="34" charset="-122"/>
                 <a:cs typeface="Courier New" pitchFamily="34" charset="-120"/>
               </a:rPr>
-              <a:t>12</a:t>
-            </a:r>
-            <a:endParaRPr lang="en-US" sz="900" dirty="0"/>
+              <a:t>2034</a:t>
+            </a:r>
+            <a:endParaRPr lang="en-US" sz="5400" dirty="0"/>
+          </a:p>
+        </p:txBody>
+      </p:sp>
+      <p:sp>
+        <p:nvSpPr>
+          <p:cNvPr id="20" name="Text 14"/>
+          <p:cNvSpPr/>
+          <p:nvPr/>
+        </p:nvSpPr>
+        <p:spPr>
+          <a:xfrm>
+            <a:off x="7909560" y="3291840"/>
+            <a:ext cx="3474720" cy="914400"/>
+          </a:xfrm>
+          <a:prstGeom prst="rect">
+            <a:avLst/>
+          </a:prstGeom>
+          <a:noFill/>
+          <a:ln/>
+        </p:spPr>
+        <p:txBody>
+          <a:bodyPr wrap="square" lIns="0" tIns="0" rIns="0" bIns="0" rtlCol="0" anchor="ctr"/>
+          <a:lstStyle/>
+          <a:p>
+            <a:pPr indent="0" marL="0">
+              <a:buNone/>
+            </a:pPr>
+            <a:r>
+              <a:rPr lang="en-US" sz="1200" dirty="0">
+                <a:solidFill>
+                  <a:srgbClr val="9DB0D9"/>
+                </a:solidFill>
+                <a:latin typeface="Arial" pitchFamily="34" charset="0"/>
+                <a:ea typeface="Arial" pitchFamily="34" charset="-122"/>
+                <a:cs typeface="Arial" pitchFamily="34" charset="-120"/>
+              </a:rPr>
+              <a:t>I re-run the back-test on the 2024–34 decade and publish how my ratings aged. Hits, misses, all of it.</a:t>
+            </a:r>
+            <a:endParaRPr lang="en-US" sz="1200" dirty="0"/>
+          </a:p>
+        </p:txBody>
+      </p:sp>
+      <p:sp>
+        <p:nvSpPr>
+          <p:cNvPr id="21" name="Text 15"/>
+          <p:cNvSpPr/>
+          <p:nvPr/>
+        </p:nvSpPr>
+        <p:spPr>
+          <a:xfrm>
+            <a:off x="7909560" y="4297680"/>
+            <a:ext cx="3474720" cy="548640"/>
+          </a:xfrm>
+          <a:prstGeom prst="rect">
+            <a:avLst/>
+          </a:prstGeom>
+          <a:noFill/>
+          <a:ln/>
+        </p:spPr>
+        <p:txBody>
+          <a:bodyPr wrap="square" lIns="0" tIns="0" rIns="0" bIns="0" rtlCol="0" anchor="ctr"/>
+          <a:lstStyle/>
+          <a:p>
+            <a:pPr indent="0" marL="0">
+              <a:buNone/>
+            </a:pPr>
+            <a:r>
+              <a:rPr lang="en-US" sz="1200" b="1" i="1" dirty="0">
+                <a:solidFill>
+                  <a:srgbClr val="34D399"/>
+                </a:solidFill>
+                <a:latin typeface="Arial" pitchFamily="34" charset="0"/>
+                <a:ea typeface="Arial" pitchFamily="34" charset="-122"/>
+                <a:cs typeface="Arial" pitchFamily="34" charset="-120"/>
+              </a:rPr>
+              <a:t>Ratings agencies should eat their own cooking.</a:t>
+            </a:r>
+            <a:endParaRPr lang="en-US" sz="1200" dirty="0"/>
+          </a:p>
+        </p:txBody>
+      </p:sp>
+      <p:sp>
+        <p:nvSpPr>
+          <p:cNvPr id="22" name="Text 16"/>
+          <p:cNvSpPr/>
+          <p:nvPr/>
+        </p:nvSpPr>
+        <p:spPr>
+          <a:xfrm>
+            <a:off x="548640" y="5943600"/>
+            <a:ext cx="11091672" cy="365760"/>
+          </a:xfrm>
+          <a:prstGeom prst="rect">
+            <a:avLst/>
+          </a:prstGeom>
+          <a:noFill/>
+          <a:ln/>
+        </p:spPr>
+        <p:txBody>
+          <a:bodyPr wrap="square" lIns="0" tIns="0" rIns="0" bIns="0" rtlCol="0" anchor="ctr"/>
+          <a:lstStyle/>
+          <a:p>
+            <a:pPr algn="ctr" indent="0" marL="0">
+              <a:buNone/>
+            </a:pPr>
+            <a:r>
+              <a:rPr lang="en-US" sz="1400" dirty="0">
+                <a:solidFill>
+                  <a:srgbClr val="E8EEFC"/>
+                </a:solidFill>
+                <a:latin typeface="Arial" pitchFamily="34" charset="0"/>
+                <a:ea typeface="Arial" pitchFamily="34" charset="-122"/>
+                <a:cs typeface="Arial" pitchFamily="34" charset="-120"/>
+              </a:rPr>
+              <a:t>Thanks — questions?   ·   ashleylibasci.com   ·   github.com/ashleylibasci/careerstar</a:t>
+            </a:r>
+            <a:endParaRPr lang="en-US" sz="1400" dirty="0"/>
           </a:p>
         </p:txBody>
       </p:sp>
@@ -4330,7 +5034,7 @@
                 <a:ea typeface="Arial" pitchFamily="34" charset="-122"/>
                 <a:cs typeface="Arial" pitchFamily="34" charset="-120"/>
               </a:rPr>
-              <a:t>Back-test details</a:t>
+              <a:t>Weights, stars, and robustness</a:t>
             </a:r>
             <a:endParaRPr lang="en-US" sz="2600" dirty="0"/>
           </a:p>
@@ -4396,7 +5100,7 @@
                 <a:ea typeface="Arial" pitchFamily="34" charset="-122"/>
                 <a:cs typeface="Arial" pitchFamily="34" charset="-120"/>
               </a:rPr>
-              <a:t>“Where did 2014 wages come from?”</a:t>
+              <a:t>“Why 0.7 and not 0.6?”</a:t>
             </a:r>
             <a:endParaRPr lang="en-US" sz="1350" dirty="0"/>
           </a:p>
@@ -4435,7 +5139,7 @@
                 <a:ea typeface="Arial" pitchFamily="34" charset="-122"/>
                 <a:cs typeface="Arial" pitchFamily="34" charset="-120"/>
               </a:rPr>
-              <a:t>The archived table has no 2015 wages, so pay percentiles use today’s ranking as a proxy — occupational pay order barely moves. A growth-only variant (0.389) shows the proxy changes almost nothing. It’s all disclosed.</a:t>
+              <a:t>Because I had to pick something and there’s nothing to fit on — no dataset of correct career choices exists. So I say “prior” out loud and stress-test instead: 729 perturbations, five rival models, and rankings that don’t survive get labeled close call.</a:t>
             </a:r>
             <a:endParaRPr lang="en-US" sz="1150" dirty="0"/>
           </a:p>
@@ -4501,7 +5205,7 @@
                 <a:ea typeface="Arial" pitchFamily="34" charset="-122"/>
                 <a:cs typeface="Arial" pitchFamily="34" charset="-120"/>
               </a:rPr>
-              <a:t>“Biggest misses?”</a:t>
+              <a:t>“How do the stars work?”</a:t>
             </a:r>
             <a:endParaRPr lang="en-US" sz="1350" dirty="0"/>
           </a:p>
@@ -4540,7 +5244,7 @@
                 <a:ea typeface="Arial" pitchFamily="34" charset="-122"/>
                 <a:cs typeface="Arial" pitchFamily="34" charset="-120"/>
               </a:rPr>
-              <a:t>It liked oil-and-gas jobs in 2014; oil crashed. It underrated couriers; e-commerce boomed +166%. Both named on the site, with the raw JSON downloadable.</a:t>
+              <a:t>Forced relative curve, straight from Morningstar: top 10% get 5 stars, next 22.5% get 4, and so on — recomputed live under whatever weights the user sets.</a:t>
             </a:r>
             <a:endParaRPr lang="en-US" sz="1150" dirty="0"/>
           </a:p>
@@ -4606,7 +5310,7 @@
                 <a:ea typeface="Arial" pitchFamily="34" charset="-122"/>
                 <a:cs typeface="Arial" pitchFamily="34" charset="-120"/>
               </a:rPr>
-              <a:t>“Survivorship?”</a:t>
+              <a:t>“Isn’t AI exposure just decline by another name?”</a:t>
             </a:r>
             <a:endParaRPr lang="en-US" sz="1350" dirty="0"/>
           </a:p>
@@ -4645,7 +5349,7 @@
                 <a:ea typeface="Arial" pitchFamily="34" charset="-122"/>
                 <a:cs typeface="Arial" pitchFamily="34" charset="-120"/>
               </a:rPr>
-              <a:t>SOC-2010 joined to SOC-2018 on matching codes. Reorganized occupations drop out, and the drop counts are published: 647 joined.</a:t>
+              <a:t>No. Across all 730, exposure and projected growth are nearly uncorrelated, and growth is flat across exposure quartiles. Exposure knows something growth doesn’t.</a:t>
             </a:r>
             <a:endParaRPr lang="en-US" sz="1150" dirty="0"/>
           </a:p>
@@ -4864,7 +5568,7 @@
                 <a:ea typeface="Arial" pitchFamily="34" charset="-122"/>
                 <a:cs typeface="Arial" pitchFamily="34" charset="-120"/>
               </a:rPr>
-              <a:t>Stack, and the Anthropic connection</a:t>
+              <a:t>Back-test details</a:t>
             </a:r>
             <a:endParaRPr lang="en-US" sz="2600" dirty="0"/>
           </a:p>
@@ -4930,7 +5634,7 @@
                 <a:ea typeface="Arial" pitchFamily="34" charset="-122"/>
                 <a:cs typeface="Arial" pitchFamily="34" charset="-120"/>
               </a:rPr>
-              <a:t>“Stack?”</a:t>
+              <a:t>“Where did 2014 wages come from?”</a:t>
             </a:r>
             <a:endParaRPr lang="en-US" sz="1350" dirty="0"/>
           </a:p>
@@ -4969,7 +5673,7 @@
                 <a:ea typeface="Arial" pitchFamily="34" charset="-122"/>
                 <a:cs typeface="Arial" pitchFamily="34" charset="-120"/>
               </a:rPr>
-              <a:t>Next.js 16, React 19, TypeScript, Tailwind 4, AWS Amplify. About 35 unit tests on the scoring library, pipeline scripts that rebuild every dataset from raw sources, open CSV and code on GitHub.</a:t>
+              <a:t>The archived table has no 2015 wages, so pay percentiles use today’s ranking as a proxy — occupational pay order barely moves. A growth-only variant (0.389) shows the proxy changes almost nothing. It’s all disclosed.</a:t>
             </a:r>
             <a:endParaRPr lang="en-US" sz="1150" dirty="0"/>
           </a:p>
@@ -5035,7 +5739,7 @@
                 <a:ea typeface="Arial" pitchFamily="34" charset="-122"/>
                 <a:cs typeface="Arial" pitchFamily="34" charset="-120"/>
               </a:rPr>
-              <a:t>“What did the AI get wrong?”</a:t>
+              <a:t>“Biggest misses?”</a:t>
             </a:r>
             <a:endParaRPr lang="en-US" sz="1350" dirty="0"/>
           </a:p>
@@ -5074,7 +5778,7 @@
                 <a:ea typeface="Arial" pitchFamily="34" charset="-122"/>
                 <a:cs typeface="Arial" pitchFamily="34" charset="-120"/>
               </a:rPr>
-              <a:t>Plenty — that’s what the review cast is for. Best one: my own methodology page overclaimed how fit worked. Caught in review, rebuilt properly, then published as the case study’s centerpiece.</a:t>
+              <a:t>It liked oil-and-gas jobs in 2014; oil crashed. It underrated couriers; e-commerce boomed +166%. Both named on the site, with the raw JSON downloadable.</a:t>
             </a:r>
             <a:endParaRPr lang="en-US" sz="1150" dirty="0"/>
           </a:p>
@@ -5140,7 +5844,7 @@
                 <a:ea typeface="Arial" pitchFamily="34" charset="-122"/>
                 <a:cs typeface="Arial" pitchFamily="34" charset="-120"/>
               </a:rPr>
-              <a:t>“Anthropic’s labor research?”</a:t>
+              <a:t>“Survivorship?”</a:t>
             </a:r>
             <a:endParaRPr lang="en-US" sz="1350" dirty="0"/>
           </a:p>
@@ -5179,7 +5883,7 @@
                 <a:ea typeface="Arial" pitchFamily="34" charset="-122"/>
                 <a:cs typeface="Arial" pitchFamily="34" charset="-120"/>
               </a:rPr>
-              <a:t>Same upstream dataset (Eloundou et al. 2023). Their 2026 work layered real Claude usage on it and found 97% of observed use inside tasks rated feasible — independent validation of my exposure input. Their 14% job-finding drop for 22-to-25-year-olds in exposed jobs is exactly my users’ stakes.</a:t>
+              <a:t>SOC-2010 joined to SOC-2018 on matching codes. Reorganized occupations drop out, and the drop counts are published: 647 joined.</a:t>
             </a:r>
             <a:endParaRPr lang="en-US" sz="1150" dirty="0"/>
           </a:p>
@@ -5258,6 +5962,540 @@
                 <a:cs typeface="Courier New" pitchFamily="34" charset="-120"/>
               </a:rPr>
               <a:t>14</a:t>
+            </a:r>
+            <a:endParaRPr lang="en-US" sz="900" dirty="0"/>
+          </a:p>
+        </p:txBody>
+      </p:sp>
+    </p:spTree>
+  </p:cSld>
+  <p:clrMapOvr>
+    <a:masterClrMapping/>
+  </p:clrMapOvr>
+</p:sld>
+</file>
+
+<file path=ppt/slides/slide15.xml><?xml version="1.0" encoding="utf-8"?>
+<p:sld xmlns:a="http://schemas.openxmlformats.org/drawingml/2006/main" xmlns:r="http://schemas.openxmlformats.org/officeDocument/2006/relationships" xmlns:p="http://schemas.openxmlformats.org/presentationml/2006/main">
+  <p:cSld name="Slide 15">
+    <p:bg>
+      <p:bgPr>
+        <a:blipFill dpi="0" rotWithShape="1">
+          <a:blip r:embed="rId1">
+            <a:lum/>
+          </a:blip>
+          <a:srcRect/>
+          <a:stretch>
+            <a:fillRect/>
+          </a:stretch>
+        </a:blipFill>
+        <a:effectLst/>
+      </p:bgPr>
+    </p:bg>
+    <p:spTree>
+      <p:nvGrpSpPr>
+        <p:cNvPr id="1" name=""/>
+        <p:cNvGrpSpPr/>
+        <p:nvPr/>
+      </p:nvGrpSpPr>
+      <p:grpSpPr>
+        <a:xfrm>
+          <a:off x="0" y="0"/>
+          <a:ext cx="0" cy="0"/>
+          <a:chOff x="0" y="0"/>
+          <a:chExt cx="0" cy="0"/>
+        </a:xfrm>
+      </p:grpSpPr>
+      <p:pic>
+        <p:nvPicPr>
+          <p:cNvPr id="2" name="Image 0" descr="preencoded.png">    </p:cNvPr>
+          <p:cNvPicPr>
+            <a:picLocks noChangeAspect="1"/>
+          </p:cNvPicPr>
+          <p:nvPr/>
+        </p:nvPicPr>
+        <p:blipFill>
+          <a:blip r:embed="rId2"/>
+          <a:stretch>
+            <a:fillRect/>
+          </a:stretch>
+        </p:blipFill>
+        <p:spPr>
+          <a:xfrm>
+            <a:off x="548640" y="402336"/>
+            <a:ext cx="155448" cy="164592"/>
+          </a:xfrm>
+          <a:prstGeom prst="rect">
+            <a:avLst/>
+          </a:prstGeom>
+        </p:spPr>
+      </p:pic>
+      <p:sp>
+        <p:nvSpPr>
+          <p:cNvPr id="3" name="Text 0"/>
+          <p:cNvSpPr/>
+          <p:nvPr/>
+        </p:nvSpPr>
+        <p:spPr>
+          <a:xfrm>
+            <a:off x="786384" y="384048"/>
+            <a:ext cx="7315200" cy="274320"/>
+          </a:xfrm>
+          <a:prstGeom prst="rect">
+            <a:avLst/>
+          </a:prstGeom>
+          <a:noFill/>
+          <a:ln/>
+        </p:spPr>
+        <p:txBody>
+          <a:bodyPr wrap="square" lIns="0" tIns="0" rIns="0" bIns="0" rtlCol="0" anchor="ctr"/>
+          <a:lstStyle/>
+          <a:p>
+            <a:pPr indent="0" marL="0">
+              <a:buNone/>
+            </a:pPr>
+            <a:r>
+              <a:rPr lang="en-US" sz="1100" b="1" spc="300" kern="0" dirty="0">
+                <a:solidFill>
+                  <a:srgbClr val="4F74F0"/>
+                </a:solidFill>
+                <a:latin typeface="Arial" pitchFamily="34" charset="0"/>
+                <a:ea typeface="Arial" pitchFamily="34" charset="-122"/>
+                <a:cs typeface="Arial" pitchFamily="34" charset="-120"/>
+              </a:rPr>
+              <a:t>BACKUP · Q&amp;A</a:t>
+            </a:r>
+            <a:endParaRPr lang="en-US" sz="1100" dirty="0"/>
+          </a:p>
+        </p:txBody>
+      </p:sp>
+      <p:sp>
+        <p:nvSpPr>
+          <p:cNvPr id="4" name="Text 1"/>
+          <p:cNvSpPr/>
+          <p:nvPr/>
+        </p:nvSpPr>
+        <p:spPr>
+          <a:xfrm>
+            <a:off x="548640" y="658368"/>
+            <a:ext cx="11094415" cy="685800"/>
+          </a:xfrm>
+          <a:prstGeom prst="rect">
+            <a:avLst/>
+          </a:prstGeom>
+          <a:noFill/>
+          <a:ln/>
+        </p:spPr>
+        <p:txBody>
+          <a:bodyPr wrap="square" lIns="0" tIns="0" rIns="0" bIns="0" rtlCol="0" anchor="ctr"/>
+          <a:lstStyle/>
+          <a:p>
+            <a:pPr indent="0" marL="0">
+              <a:buNone/>
+            </a:pPr>
+            <a:r>
+              <a:rPr lang="en-US" sz="2600" b="1" dirty="0">
+                <a:solidFill>
+                  <a:srgbClr val="E8EEFC"/>
+                </a:solidFill>
+                <a:latin typeface="Arial" pitchFamily="34" charset="0"/>
+                <a:ea typeface="Arial" pitchFamily="34" charset="-122"/>
+                <a:cs typeface="Arial" pitchFamily="34" charset="-120"/>
+              </a:rPr>
+              <a:t>Stack, and the Anthropic connection</a:t>
+            </a:r>
+            <a:endParaRPr lang="en-US" sz="2600" dirty="0"/>
+          </a:p>
+        </p:txBody>
+      </p:sp>
+      <p:sp>
+        <p:nvSpPr>
+          <p:cNvPr id="5" name="Shape 2"/>
+          <p:cNvSpPr/>
+          <p:nvPr/>
+        </p:nvSpPr>
+        <p:spPr>
+          <a:xfrm>
+            <a:off x="548640" y="1737360"/>
+            <a:ext cx="11091672" cy="1207008"/>
+          </a:xfrm>
+          <a:prstGeom prst="roundRect">
+            <a:avLst>
+              <a:gd name="adj" fmla="val 6818"/>
+            </a:avLst>
+          </a:prstGeom>
+          <a:solidFill>
+            <a:srgbClr val="0C1530"/>
+          </a:solidFill>
+          <a:ln w="9525">
+            <a:solidFill>
+              <a:srgbClr val="24325C"/>
+            </a:solidFill>
+            <a:prstDash val="solid"/>
+          </a:ln>
+        </p:spPr>
+      </p:sp>
+      <p:sp>
+        <p:nvSpPr>
+          <p:cNvPr id="6" name="Text 3"/>
+          <p:cNvSpPr/>
+          <p:nvPr/>
+        </p:nvSpPr>
+        <p:spPr>
+          <a:xfrm>
+            <a:off x="822960" y="1847088"/>
+            <a:ext cx="10515600" cy="347472"/>
+          </a:xfrm>
+          <a:prstGeom prst="rect">
+            <a:avLst/>
+          </a:prstGeom>
+          <a:noFill/>
+          <a:ln/>
+        </p:spPr>
+        <p:txBody>
+          <a:bodyPr wrap="square" lIns="0" tIns="0" rIns="0" bIns="0" rtlCol="0" anchor="ctr"/>
+          <a:lstStyle/>
+          <a:p>
+            <a:pPr indent="0" marL="0">
+              <a:buNone/>
+            </a:pPr>
+            <a:r>
+              <a:rPr lang="en-US" sz="1350" b="1" dirty="0">
+                <a:solidFill>
+                  <a:srgbClr val="4F74F0"/>
+                </a:solidFill>
+                <a:latin typeface="Arial" pitchFamily="34" charset="0"/>
+                <a:ea typeface="Arial" pitchFamily="34" charset="-122"/>
+                <a:cs typeface="Arial" pitchFamily="34" charset="-120"/>
+              </a:rPr>
+              <a:t>“Stack?”</a:t>
+            </a:r>
+            <a:endParaRPr lang="en-US" sz="1350" dirty="0"/>
+          </a:p>
+        </p:txBody>
+      </p:sp>
+      <p:sp>
+        <p:nvSpPr>
+          <p:cNvPr id="7" name="Text 4"/>
+          <p:cNvSpPr/>
+          <p:nvPr/>
+        </p:nvSpPr>
+        <p:spPr>
+          <a:xfrm>
+            <a:off x="822960" y="2212848"/>
+            <a:ext cx="10515600" cy="685800"/>
+          </a:xfrm>
+          <a:prstGeom prst="rect">
+            <a:avLst/>
+          </a:prstGeom>
+          <a:noFill/>
+          <a:ln/>
+        </p:spPr>
+        <p:txBody>
+          <a:bodyPr wrap="square" lIns="0" tIns="0" rIns="0" bIns="0" rtlCol="0" anchor="ctr"/>
+          <a:lstStyle/>
+          <a:p>
+            <a:pPr indent="0" marL="0">
+              <a:buNone/>
+            </a:pPr>
+            <a:r>
+              <a:rPr lang="en-US" sz="1150" dirty="0">
+                <a:solidFill>
+                  <a:srgbClr val="9DB0D9"/>
+                </a:solidFill>
+                <a:latin typeface="Arial" pitchFamily="34" charset="0"/>
+                <a:ea typeface="Arial" pitchFamily="34" charset="-122"/>
+                <a:cs typeface="Arial" pitchFamily="34" charset="-120"/>
+              </a:rPr>
+              <a:t>Next.js 16, React 19, TypeScript, Tailwind 4, AWS Amplify. About 35 unit tests on the scoring library, pipeline scripts that rebuild every dataset from raw sources, open CSV and code on GitHub.</a:t>
+            </a:r>
+            <a:endParaRPr lang="en-US" sz="1150" dirty="0"/>
+          </a:p>
+        </p:txBody>
+      </p:sp>
+      <p:sp>
+        <p:nvSpPr>
+          <p:cNvPr id="8" name="Shape 5"/>
+          <p:cNvSpPr/>
+          <p:nvPr/>
+        </p:nvSpPr>
+        <p:spPr>
+          <a:xfrm>
+            <a:off x="548640" y="3127248"/>
+            <a:ext cx="11091672" cy="1207008"/>
+          </a:xfrm>
+          <a:prstGeom prst="roundRect">
+            <a:avLst>
+              <a:gd name="adj" fmla="val 6818"/>
+            </a:avLst>
+          </a:prstGeom>
+          <a:solidFill>
+            <a:srgbClr val="0C1530"/>
+          </a:solidFill>
+          <a:ln w="9525">
+            <a:solidFill>
+              <a:srgbClr val="24325C"/>
+            </a:solidFill>
+            <a:prstDash val="solid"/>
+          </a:ln>
+        </p:spPr>
+      </p:sp>
+      <p:sp>
+        <p:nvSpPr>
+          <p:cNvPr id="9" name="Text 6"/>
+          <p:cNvSpPr/>
+          <p:nvPr/>
+        </p:nvSpPr>
+        <p:spPr>
+          <a:xfrm>
+            <a:off x="822960" y="3236976"/>
+            <a:ext cx="10515600" cy="347472"/>
+          </a:xfrm>
+          <a:prstGeom prst="rect">
+            <a:avLst/>
+          </a:prstGeom>
+          <a:noFill/>
+          <a:ln/>
+        </p:spPr>
+        <p:txBody>
+          <a:bodyPr wrap="square" lIns="0" tIns="0" rIns="0" bIns="0" rtlCol="0" anchor="ctr"/>
+          <a:lstStyle/>
+          <a:p>
+            <a:pPr indent="0" marL="0">
+              <a:buNone/>
+            </a:pPr>
+            <a:r>
+              <a:rPr lang="en-US" sz="1350" b="1" dirty="0">
+                <a:solidFill>
+                  <a:srgbClr val="4F74F0"/>
+                </a:solidFill>
+                <a:latin typeface="Arial" pitchFamily="34" charset="0"/>
+                <a:ea typeface="Arial" pitchFamily="34" charset="-122"/>
+                <a:cs typeface="Arial" pitchFamily="34" charset="-120"/>
+              </a:rPr>
+              <a:t>“What did the AI get wrong?”</a:t>
+            </a:r>
+            <a:endParaRPr lang="en-US" sz="1350" dirty="0"/>
+          </a:p>
+        </p:txBody>
+      </p:sp>
+      <p:sp>
+        <p:nvSpPr>
+          <p:cNvPr id="10" name="Text 7"/>
+          <p:cNvSpPr/>
+          <p:nvPr/>
+        </p:nvSpPr>
+        <p:spPr>
+          <a:xfrm>
+            <a:off x="822960" y="3602736"/>
+            <a:ext cx="10515600" cy="685800"/>
+          </a:xfrm>
+          <a:prstGeom prst="rect">
+            <a:avLst/>
+          </a:prstGeom>
+          <a:noFill/>
+          <a:ln/>
+        </p:spPr>
+        <p:txBody>
+          <a:bodyPr wrap="square" lIns="0" tIns="0" rIns="0" bIns="0" rtlCol="0" anchor="ctr"/>
+          <a:lstStyle/>
+          <a:p>
+            <a:pPr indent="0" marL="0">
+              <a:buNone/>
+            </a:pPr>
+            <a:r>
+              <a:rPr lang="en-US" sz="1150" dirty="0">
+                <a:solidFill>
+                  <a:srgbClr val="9DB0D9"/>
+                </a:solidFill>
+                <a:latin typeface="Arial" pitchFamily="34" charset="0"/>
+                <a:ea typeface="Arial" pitchFamily="34" charset="-122"/>
+                <a:cs typeface="Arial" pitchFamily="34" charset="-120"/>
+              </a:rPr>
+              <a:t>Plenty — that’s what the review cast is for. Best one: my own methodology page overclaimed how fit worked. Caught in review, rebuilt properly, then published as the case study’s centerpiece.</a:t>
+            </a:r>
+            <a:endParaRPr lang="en-US" sz="1150" dirty="0"/>
+          </a:p>
+        </p:txBody>
+      </p:sp>
+      <p:sp>
+        <p:nvSpPr>
+          <p:cNvPr id="11" name="Shape 8"/>
+          <p:cNvSpPr/>
+          <p:nvPr/>
+        </p:nvSpPr>
+        <p:spPr>
+          <a:xfrm>
+            <a:off x="548640" y="4517136"/>
+            <a:ext cx="11091672" cy="1207008"/>
+          </a:xfrm>
+          <a:prstGeom prst="roundRect">
+            <a:avLst>
+              <a:gd name="adj" fmla="val 6818"/>
+            </a:avLst>
+          </a:prstGeom>
+          <a:solidFill>
+            <a:srgbClr val="0C1530"/>
+          </a:solidFill>
+          <a:ln w="9525">
+            <a:solidFill>
+              <a:srgbClr val="24325C"/>
+            </a:solidFill>
+            <a:prstDash val="solid"/>
+          </a:ln>
+        </p:spPr>
+      </p:sp>
+      <p:sp>
+        <p:nvSpPr>
+          <p:cNvPr id="12" name="Text 9"/>
+          <p:cNvSpPr/>
+          <p:nvPr/>
+        </p:nvSpPr>
+        <p:spPr>
+          <a:xfrm>
+            <a:off x="822960" y="4626864"/>
+            <a:ext cx="10515600" cy="347472"/>
+          </a:xfrm>
+          <a:prstGeom prst="rect">
+            <a:avLst/>
+          </a:prstGeom>
+          <a:noFill/>
+          <a:ln/>
+        </p:spPr>
+        <p:txBody>
+          <a:bodyPr wrap="square" lIns="0" tIns="0" rIns="0" bIns="0" rtlCol="0" anchor="ctr"/>
+          <a:lstStyle/>
+          <a:p>
+            <a:pPr indent="0" marL="0">
+              <a:buNone/>
+            </a:pPr>
+            <a:r>
+              <a:rPr lang="en-US" sz="1350" b="1" dirty="0">
+                <a:solidFill>
+                  <a:srgbClr val="4F74F0"/>
+                </a:solidFill>
+                <a:latin typeface="Arial" pitchFamily="34" charset="0"/>
+                <a:ea typeface="Arial" pitchFamily="34" charset="-122"/>
+                <a:cs typeface="Arial" pitchFamily="34" charset="-120"/>
+              </a:rPr>
+              <a:t>“Anthropic’s labor research?”</a:t>
+            </a:r>
+            <a:endParaRPr lang="en-US" sz="1350" dirty="0"/>
+          </a:p>
+        </p:txBody>
+      </p:sp>
+      <p:sp>
+        <p:nvSpPr>
+          <p:cNvPr id="13" name="Text 10"/>
+          <p:cNvSpPr/>
+          <p:nvPr/>
+        </p:nvSpPr>
+        <p:spPr>
+          <a:xfrm>
+            <a:off x="822960" y="4992624"/>
+            <a:ext cx="10515600" cy="685800"/>
+          </a:xfrm>
+          <a:prstGeom prst="rect">
+            <a:avLst/>
+          </a:prstGeom>
+          <a:noFill/>
+          <a:ln/>
+        </p:spPr>
+        <p:txBody>
+          <a:bodyPr wrap="square" lIns="0" tIns="0" rIns="0" bIns="0" rtlCol="0" anchor="ctr"/>
+          <a:lstStyle/>
+          <a:p>
+            <a:pPr indent="0" marL="0">
+              <a:buNone/>
+            </a:pPr>
+            <a:r>
+              <a:rPr lang="en-US" sz="1150" dirty="0">
+                <a:solidFill>
+                  <a:srgbClr val="9DB0D9"/>
+                </a:solidFill>
+                <a:latin typeface="Arial" pitchFamily="34" charset="0"/>
+                <a:ea typeface="Arial" pitchFamily="34" charset="-122"/>
+                <a:cs typeface="Arial" pitchFamily="34" charset="-120"/>
+              </a:rPr>
+              <a:t>Same upstream dataset (Eloundou et al. 2023). Their 2026 work layered real Claude usage on it and found 97% of observed use inside tasks rated feasible — independent validation of my exposure input. Their 14% job-finding drop for 22-to-25-year-olds in exposed jobs is exactly my users’ stakes.</a:t>
+            </a:r>
+            <a:endParaRPr lang="en-US" sz="1150" dirty="0"/>
+          </a:p>
+        </p:txBody>
+      </p:sp>
+      <p:sp>
+        <p:nvSpPr>
+          <p:cNvPr id="14" name="Text 11"/>
+          <p:cNvSpPr/>
+          <p:nvPr/>
+        </p:nvSpPr>
+        <p:spPr>
+          <a:xfrm>
+            <a:off x="548640" y="6473952"/>
+            <a:ext cx="3657600" cy="274320"/>
+          </a:xfrm>
+          <a:prstGeom prst="rect">
+            <a:avLst/>
+          </a:prstGeom>
+          <a:noFill/>
+          <a:ln/>
+        </p:spPr>
+        <p:txBody>
+          <a:bodyPr wrap="square" lIns="0" tIns="0" rIns="0" bIns="0" rtlCol="0" anchor="ctr"/>
+          <a:lstStyle/>
+          <a:p>
+            <a:pPr indent="0" marL="0">
+              <a:buNone/>
+            </a:pPr>
+            <a:r>
+              <a:rPr lang="en-US" sz="900" dirty="0">
+                <a:solidFill>
+                  <a:srgbClr val="5E6F9E"/>
+                </a:solidFill>
+                <a:latin typeface="Arial" pitchFamily="34" charset="0"/>
+                <a:ea typeface="Arial" pitchFamily="34" charset="-122"/>
+                <a:cs typeface="Arial" pitchFamily="34" charset="-120"/>
+              </a:rPr>
+              <a:t>CareerStar · ashleylibasci.com</a:t>
+            </a:r>
+            <a:endParaRPr lang="en-US" sz="900" dirty="0"/>
+          </a:p>
+        </p:txBody>
+      </p:sp>
+      <p:sp>
+        <p:nvSpPr>
+          <p:cNvPr id="15" name="Text 12"/>
+          <p:cNvSpPr/>
+          <p:nvPr/>
+        </p:nvSpPr>
+        <p:spPr>
+          <a:xfrm>
+            <a:off x="11277295" y="6473952"/>
+            <a:ext cx="365760" cy="274320"/>
+          </a:xfrm>
+          <a:prstGeom prst="rect">
+            <a:avLst/>
+          </a:prstGeom>
+          <a:noFill/>
+          <a:ln/>
+        </p:spPr>
+        <p:txBody>
+          <a:bodyPr wrap="square" lIns="0" tIns="0" rIns="0" bIns="0" rtlCol="0" anchor="ctr"/>
+          <a:lstStyle/>
+          <a:p>
+            <a:pPr algn="r" indent="0" marL="0">
+              <a:buNone/>
+            </a:pPr>
+            <a:r>
+              <a:rPr lang="en-US" sz="900" dirty="0">
+                <a:solidFill>
+                  <a:srgbClr val="5E6F9E"/>
+                </a:solidFill>
+                <a:latin typeface="Courier New" pitchFamily="34" charset="0"/>
+                <a:ea typeface="Courier New" pitchFamily="34" charset="-122"/>
+                <a:cs typeface="Courier New" pitchFamily="34" charset="-120"/>
+              </a:rPr>
+              <a:t>15</a:t>
             </a:r>
             <a:endParaRPr lang="en-US" sz="900" dirty="0"/>
           </a:p>
@@ -9692,7 +10930,7 @@
                 <a:ea typeface="Arial" pitchFamily="34" charset="-122"/>
                 <a:cs typeface="Arial" pitchFamily="34" charset="-120"/>
               </a:rPr>
-              <a:t>06 · THE MODEL</a:t>
+              <a:t>06 · THE IDEA</a:t>
             </a:r>
             <a:endParaRPr lang="en-US" sz="1100" dirty="0"/>
           </a:p>
@@ -9731,7 +10969,7 @@
                 <a:ea typeface="Arial" pitchFamily="34" charset="-122"/>
                 <a:cs typeface="Arial" pitchFamily="34" charset="-120"/>
               </a:rPr>
-              <a:t>The scoring model is four lines. The AI never touches them.</a:t>
+              <a:t>The model is just how you’d size up a stock</a:t>
             </a:r>
             <a:endParaRPr lang="en-US" sz="3100" dirty="0"/>
           </a:p>
@@ -9745,12 +10983,444 @@
         </p:nvSpPr>
         <p:spPr>
           <a:xfrm>
-            <a:off x="548640" y="1645920"/>
-            <a:ext cx="5577840" cy="2377440"/>
+            <a:off x="548640" y="1691640"/>
+            <a:ext cx="11091672" cy="1170432"/>
           </a:xfrm>
           <a:prstGeom prst="roundRect">
             <a:avLst>
-              <a:gd name="adj" fmla="val 3462"/>
+              <a:gd name="adj" fmla="val 7031"/>
+            </a:avLst>
+          </a:prstGeom>
+          <a:solidFill>
+            <a:srgbClr val="101A38"/>
+          </a:solidFill>
+          <a:ln w="9525">
+            <a:solidFill>
+              <a:srgbClr val="24325C"/>
+            </a:solidFill>
+            <a:prstDash val="solid"/>
+          </a:ln>
+        </p:spPr>
+      </p:sp>
+      <p:sp>
+        <p:nvSpPr>
+          <p:cNvPr id="6" name="Text 3"/>
+          <p:cNvSpPr/>
+          <p:nvPr/>
+        </p:nvSpPr>
+        <p:spPr>
+          <a:xfrm>
+            <a:off x="822960" y="1819656"/>
+            <a:ext cx="2651760" cy="914400"/>
+          </a:xfrm>
+          <a:prstGeom prst="rect">
+            <a:avLst/>
+          </a:prstGeom>
+          <a:noFill/>
+          <a:ln/>
+        </p:spPr>
+        <p:txBody>
+          <a:bodyPr wrap="square" lIns="0" tIns="0" rIns="0" bIns="0" rtlCol="0" anchor="ctr"/>
+          <a:lstStyle/>
+          <a:p>
+            <a:pPr indent="0" marL="0">
+              <a:buNone/>
+            </a:pPr>
+            <a:r>
+              <a:rPr lang="en-US" sz="1600" b="1" dirty="0">
+                <a:solidFill>
+                  <a:srgbClr val="4F74F0"/>
+                </a:solidFill>
+                <a:latin typeface="Arial" pitchFamily="34" charset="0"/>
+                <a:ea typeface="Arial" pitchFamily="34" charset="-122"/>
+                <a:cs typeface="Arial" pitchFamily="34" charset="-120"/>
+              </a:rPr>
+              <a:t>What do you get?</a:t>
+            </a:r>
+            <a:endParaRPr lang="en-US" sz="1600" dirty="0"/>
+          </a:p>
+        </p:txBody>
+      </p:sp>
+      <p:sp>
+        <p:nvSpPr>
+          <p:cNvPr id="7" name="Text 4"/>
+          <p:cNvSpPr/>
+          <p:nvPr/>
+        </p:nvSpPr>
+        <p:spPr>
+          <a:xfrm>
+            <a:off x="3566160" y="1819656"/>
+            <a:ext cx="5669280" cy="914400"/>
+          </a:xfrm>
+          <a:prstGeom prst="rect">
+            <a:avLst/>
+          </a:prstGeom>
+          <a:noFill/>
+          <a:ln/>
+        </p:spPr>
+        <p:txBody>
+          <a:bodyPr wrap="square" lIns="0" tIns="0" rIns="0" bIns="0" rtlCol="0" anchor="ctr"/>
+          <a:lstStyle/>
+          <a:p>
+            <a:pPr indent="0" marL="0">
+              <a:buNone/>
+            </a:pPr>
+            <a:r>
+              <a:rPr lang="en-US" sz="1250" dirty="0">
+                <a:solidFill>
+                  <a:srgbClr val="E8EEFC"/>
+                </a:solidFill>
+                <a:latin typeface="Arial" pitchFamily="34" charset="0"/>
+                <a:ea typeface="Arial" pitchFamily="34" charset="-122"/>
+                <a:cs typeface="Arial" pitchFamily="34" charset="-120"/>
+              </a:rPr>
+              <a:t>For a stock: expected return. For a career: how fast it’s growing, and what it pays.</a:t>
+            </a:r>
+            <a:endParaRPr lang="en-US" sz="1250" dirty="0"/>
+          </a:p>
+        </p:txBody>
+      </p:sp>
+      <p:sp>
+        <p:nvSpPr>
+          <p:cNvPr id="8" name="Text 5"/>
+          <p:cNvSpPr/>
+          <p:nvPr/>
+        </p:nvSpPr>
+        <p:spPr>
+          <a:xfrm>
+            <a:off x="9418320" y="1819656"/>
+            <a:ext cx="2011680" cy="914400"/>
+          </a:xfrm>
+          <a:prstGeom prst="rect">
+            <a:avLst/>
+          </a:prstGeom>
+          <a:noFill/>
+          <a:ln/>
+        </p:spPr>
+        <p:txBody>
+          <a:bodyPr wrap="square" lIns="0" tIns="0" rIns="0" bIns="0" rtlCol="0" anchor="ctr"/>
+          <a:lstStyle/>
+          <a:p>
+            <a:pPr indent="0" marL="0">
+              <a:buNone/>
+            </a:pPr>
+            <a:r>
+              <a:rPr lang="en-US" sz="1000" i="1" dirty="0">
+                <a:solidFill>
+                  <a:srgbClr val="5E6F9E"/>
+                </a:solidFill>
+                <a:latin typeface="Arial" pitchFamily="34" charset="0"/>
+                <a:ea typeface="Arial" pitchFamily="34" charset="-122"/>
+                <a:cs typeface="Arial" pitchFamily="34" charset="-120"/>
+              </a:rPr>
+              <a:t>from BLS employment projections</a:t>
+            </a:r>
+            <a:endParaRPr lang="en-US" sz="1000" dirty="0"/>
+          </a:p>
+        </p:txBody>
+      </p:sp>
+      <p:sp>
+        <p:nvSpPr>
+          <p:cNvPr id="9" name="Shape 6"/>
+          <p:cNvSpPr/>
+          <p:nvPr/>
+        </p:nvSpPr>
+        <p:spPr>
+          <a:xfrm>
+            <a:off x="548640" y="3044952"/>
+            <a:ext cx="11091672" cy="1170432"/>
+          </a:xfrm>
+          <a:prstGeom prst="roundRect">
+            <a:avLst>
+              <a:gd name="adj" fmla="val 7031"/>
+            </a:avLst>
+          </a:prstGeom>
+          <a:solidFill>
+            <a:srgbClr val="101A38"/>
+          </a:solidFill>
+          <a:ln w="9525">
+            <a:solidFill>
+              <a:srgbClr val="24325C"/>
+            </a:solidFill>
+            <a:prstDash val="solid"/>
+          </a:ln>
+        </p:spPr>
+      </p:sp>
+      <p:sp>
+        <p:nvSpPr>
+          <p:cNvPr id="10" name="Text 7"/>
+          <p:cNvSpPr/>
+          <p:nvPr/>
+        </p:nvSpPr>
+        <p:spPr>
+          <a:xfrm>
+            <a:off x="822960" y="3172968"/>
+            <a:ext cx="2651760" cy="914400"/>
+          </a:xfrm>
+          <a:prstGeom prst="rect">
+            <a:avLst/>
+          </a:prstGeom>
+          <a:noFill/>
+          <a:ln/>
+        </p:spPr>
+        <p:txBody>
+          <a:bodyPr wrap="square" lIns="0" tIns="0" rIns="0" bIns="0" rtlCol="0" anchor="ctr"/>
+          <a:lstStyle/>
+          <a:p>
+            <a:pPr indent="0" marL="0">
+              <a:buNone/>
+            </a:pPr>
+            <a:r>
+              <a:rPr lang="en-US" sz="1600" b="1" dirty="0">
+                <a:solidFill>
+                  <a:srgbClr val="4F74F0"/>
+                </a:solidFill>
+                <a:latin typeface="Arial" pitchFamily="34" charset="0"/>
+                <a:ea typeface="Arial" pitchFamily="34" charset="-122"/>
+                <a:cs typeface="Arial" pitchFamily="34" charset="-120"/>
+              </a:rPr>
+              <a:t>What can kill it?</a:t>
+            </a:r>
+            <a:endParaRPr lang="en-US" sz="1600" dirty="0"/>
+          </a:p>
+        </p:txBody>
+      </p:sp>
+      <p:sp>
+        <p:nvSpPr>
+          <p:cNvPr id="11" name="Text 8"/>
+          <p:cNvSpPr/>
+          <p:nvPr/>
+        </p:nvSpPr>
+        <p:spPr>
+          <a:xfrm>
+            <a:off x="3566160" y="3172968"/>
+            <a:ext cx="5669280" cy="914400"/>
+          </a:xfrm>
+          <a:prstGeom prst="rect">
+            <a:avLst/>
+          </a:prstGeom>
+          <a:noFill/>
+          <a:ln/>
+        </p:spPr>
+        <p:txBody>
+          <a:bodyPr wrap="square" lIns="0" tIns="0" rIns="0" bIns="0" rtlCol="0" anchor="ctr"/>
+          <a:lstStyle/>
+          <a:p>
+            <a:pPr indent="0" marL="0">
+              <a:buNone/>
+            </a:pPr>
+            <a:r>
+              <a:rPr lang="en-US" sz="1250" dirty="0">
+                <a:solidFill>
+                  <a:srgbClr val="E8EEFC"/>
+                </a:solidFill>
+                <a:latin typeface="Arial" pitchFamily="34" charset="0"/>
+                <a:ea typeface="Arial" pitchFamily="34" charset="-122"/>
+                <a:cs typeface="Arial" pitchFamily="34" charset="-120"/>
+              </a:rPr>
+              <a:t>For a stock: risk. For a career in 2026: how much of the day-to-day work AI can already do.</a:t>
+            </a:r>
+            <a:endParaRPr lang="en-US" sz="1250" dirty="0"/>
+          </a:p>
+        </p:txBody>
+      </p:sp>
+      <p:sp>
+        <p:nvSpPr>
+          <p:cNvPr id="12" name="Text 9"/>
+          <p:cNvSpPr/>
+          <p:nvPr/>
+        </p:nvSpPr>
+        <p:spPr>
+          <a:xfrm>
+            <a:off x="9418320" y="3172968"/>
+            <a:ext cx="2011680" cy="914400"/>
+          </a:xfrm>
+          <a:prstGeom prst="rect">
+            <a:avLst/>
+          </a:prstGeom>
+          <a:noFill/>
+          <a:ln/>
+        </p:spPr>
+        <p:txBody>
+          <a:bodyPr wrap="square" lIns="0" tIns="0" rIns="0" bIns="0" rtlCol="0" anchor="ctr"/>
+          <a:lstStyle/>
+          <a:p>
+            <a:pPr indent="0" marL="0">
+              <a:buNone/>
+            </a:pPr>
+            <a:r>
+              <a:rPr lang="en-US" sz="1000" i="1" dirty="0">
+                <a:solidFill>
+                  <a:srgbClr val="5E6F9E"/>
+                </a:solidFill>
+                <a:latin typeface="Arial" pitchFamily="34" charset="0"/>
+                <a:ea typeface="Arial" pitchFamily="34" charset="-122"/>
+                <a:cs typeface="Arial" pitchFamily="34" charset="-120"/>
+              </a:rPr>
+              <a:t>from published AI-exposure research</a:t>
+            </a:r>
+            <a:endParaRPr lang="en-US" sz="1000" dirty="0"/>
+          </a:p>
+        </p:txBody>
+      </p:sp>
+      <p:sp>
+        <p:nvSpPr>
+          <p:cNvPr id="13" name="Shape 10"/>
+          <p:cNvSpPr/>
+          <p:nvPr/>
+        </p:nvSpPr>
+        <p:spPr>
+          <a:xfrm>
+            <a:off x="548640" y="4398264"/>
+            <a:ext cx="11091672" cy="1170432"/>
+          </a:xfrm>
+          <a:prstGeom prst="roundRect">
+            <a:avLst>
+              <a:gd name="adj" fmla="val 7031"/>
+            </a:avLst>
+          </a:prstGeom>
+          <a:solidFill>
+            <a:srgbClr val="101A38"/>
+          </a:solidFill>
+          <a:ln w="9525">
+            <a:solidFill>
+              <a:srgbClr val="24325C"/>
+            </a:solidFill>
+            <a:prstDash val="solid"/>
+          </a:ln>
+        </p:spPr>
+      </p:sp>
+      <p:sp>
+        <p:nvSpPr>
+          <p:cNvPr id="14" name="Text 11"/>
+          <p:cNvSpPr/>
+          <p:nvPr/>
+        </p:nvSpPr>
+        <p:spPr>
+          <a:xfrm>
+            <a:off x="822960" y="4526280"/>
+            <a:ext cx="2651760" cy="914400"/>
+          </a:xfrm>
+          <a:prstGeom prst="rect">
+            <a:avLst/>
+          </a:prstGeom>
+          <a:noFill/>
+          <a:ln/>
+        </p:spPr>
+        <p:txBody>
+          <a:bodyPr wrap="square" lIns="0" tIns="0" rIns="0" bIns="0" rtlCol="0" anchor="ctr"/>
+          <a:lstStyle/>
+          <a:p>
+            <a:pPr indent="0" marL="0">
+              <a:buNone/>
+            </a:pPr>
+            <a:r>
+              <a:rPr lang="en-US" sz="1600" b="1" dirty="0">
+                <a:solidFill>
+                  <a:srgbClr val="4F74F0"/>
+                </a:solidFill>
+                <a:latin typeface="Arial" pitchFamily="34" charset="0"/>
+                <a:ea typeface="Arial" pitchFamily="34" charset="-122"/>
+                <a:cs typeface="Arial" pitchFamily="34" charset="-120"/>
+              </a:rPr>
+              <a:t>Does it fit you?</a:t>
+            </a:r>
+            <a:endParaRPr lang="en-US" sz="1600" dirty="0"/>
+          </a:p>
+        </p:txBody>
+      </p:sp>
+      <p:sp>
+        <p:nvSpPr>
+          <p:cNvPr id="15" name="Text 12"/>
+          <p:cNvSpPr/>
+          <p:nvPr/>
+        </p:nvSpPr>
+        <p:spPr>
+          <a:xfrm>
+            <a:off x="3566160" y="4526280"/>
+            <a:ext cx="5669280" cy="914400"/>
+          </a:xfrm>
+          <a:prstGeom prst="rect">
+            <a:avLst/>
+          </a:prstGeom>
+          <a:noFill/>
+          <a:ln/>
+        </p:spPr>
+        <p:txBody>
+          <a:bodyPr wrap="square" lIns="0" tIns="0" rIns="0" bIns="0" rtlCol="0" anchor="ctr"/>
+          <a:lstStyle/>
+          <a:p>
+            <a:pPr indent="0" marL="0">
+              <a:buNone/>
+            </a:pPr>
+            <a:r>
+              <a:rPr lang="en-US" sz="1250" dirty="0">
+                <a:solidFill>
+                  <a:srgbClr val="E8EEFC"/>
+                </a:solidFill>
+                <a:latin typeface="Arial" pitchFamily="34" charset="0"/>
+                <a:ea typeface="Arial" pitchFamily="34" charset="-122"/>
+                <a:cs typeface="Arial" pitchFamily="34" charset="-120"/>
+              </a:rPr>
+              <a:t>A great career you’d hate isn’t a great career. Match the job’s real skill profile to your interests.</a:t>
+            </a:r>
+            <a:endParaRPr lang="en-US" sz="1250" dirty="0"/>
+          </a:p>
+        </p:txBody>
+      </p:sp>
+      <p:sp>
+        <p:nvSpPr>
+          <p:cNvPr id="16" name="Text 13"/>
+          <p:cNvSpPr/>
+          <p:nvPr/>
+        </p:nvSpPr>
+        <p:spPr>
+          <a:xfrm>
+            <a:off x="9418320" y="4526280"/>
+            <a:ext cx="2011680" cy="914400"/>
+          </a:xfrm>
+          <a:prstGeom prst="rect">
+            <a:avLst/>
+          </a:prstGeom>
+          <a:noFill/>
+          <a:ln/>
+        </p:spPr>
+        <p:txBody>
+          <a:bodyPr wrap="square" lIns="0" tIns="0" rIns="0" bIns="0" rtlCol="0" anchor="ctr"/>
+          <a:lstStyle/>
+          <a:p>
+            <a:pPr indent="0" marL="0">
+              <a:buNone/>
+            </a:pPr>
+            <a:r>
+              <a:rPr lang="en-US" sz="1000" i="1" dirty="0">
+                <a:solidFill>
+                  <a:srgbClr val="5E6F9E"/>
+                </a:solidFill>
+                <a:latin typeface="Arial" pitchFamily="34" charset="0"/>
+                <a:ea typeface="Arial" pitchFamily="34" charset="-122"/>
+                <a:cs typeface="Arial" pitchFamily="34" charset="-120"/>
+              </a:rPr>
+              <a:t>from O*NET, the government’s skills database</a:t>
+            </a:r>
+            <a:endParaRPr lang="en-US" sz="1000" dirty="0"/>
+          </a:p>
+        </p:txBody>
+      </p:sp>
+      <p:sp>
+        <p:nvSpPr>
+          <p:cNvPr id="17" name="Shape 14"/>
+          <p:cNvSpPr/>
+          <p:nvPr/>
+        </p:nvSpPr>
+        <p:spPr>
+          <a:xfrm>
+            <a:off x="548640" y="5760720"/>
+            <a:ext cx="11091672" cy="566928"/>
+          </a:xfrm>
+          <a:prstGeom prst="roundRect">
+            <a:avLst>
+              <a:gd name="adj" fmla="val 14516"/>
             </a:avLst>
           </a:prstGeom>
           <a:solidFill>
@@ -9766,237 +11436,30 @@
       </p:sp>
       <p:sp>
         <p:nvSpPr>
-          <p:cNvPr id="6" name="Text 3"/>
-          <p:cNvSpPr/>
-          <p:nvPr/>
-        </p:nvSpPr>
-        <p:spPr>
-          <a:xfrm>
-            <a:off x="822960" y="1828800"/>
-            <a:ext cx="5029200" cy="2011680"/>
-          </a:xfrm>
-          <a:prstGeom prst="rect">
-            <a:avLst/>
-          </a:prstGeom>
-          <a:noFill/>
-          <a:ln/>
-        </p:spPr>
-        <p:txBody>
-          <a:bodyPr wrap="square" lIns="0" tIns="0" rIns="0" bIns="0" rtlCol="0" anchor="ctr"/>
-          <a:lstStyle/>
-          <a:p>
-            <a:pPr indent="0" marL="0">
-              <a:lnSpc>
-                <a:spcPts val="1800"/>
-              </a:lnSpc>
-              <a:buNone/>
-            </a:pPr>
-            <a:r>
-              <a:rPr lang="en-US" sz="1400" dirty="0">
-                <a:solidFill>
-                  <a:srgbClr val="4F74F0"/>
-                </a:solidFill>
-                <a:latin typeface="Courier New" pitchFamily="34" charset="0"/>
-                <a:ea typeface="Courier New" pitchFamily="34" charset="-122"/>
-                <a:cs typeface="Courier New" pitchFamily="34" charset="-120"/>
-              </a:rPr>
-              <a:t>Return = 0.5·growthRank + 0.5·payRank</a:t>
-            </a:r>
-            <a:endParaRPr lang="en-US" sz="1400" dirty="0"/>
-          </a:p>
-          <a:p>
-            <a:pPr indent="0" marL="0">
-              <a:lnSpc>
-                <a:spcPts val="1800"/>
-              </a:lnSpc>
-              <a:buNone/>
-            </a:pPr>
-            <a:endParaRPr lang="en-US" sz="1400" dirty="0"/>
-          </a:p>
-          <a:p>
-            <a:pPr indent="0" marL="0">
-              <a:lnSpc>
-                <a:spcPts val="1800"/>
-              </a:lnSpc>
-              <a:buNone/>
-            </a:pPr>
-            <a:r>
-              <a:rPr lang="en-US" sz="1400" dirty="0">
-                <a:solidFill>
-                  <a:srgbClr val="4F74F0"/>
-                </a:solidFill>
-                <a:latin typeface="Courier New" pitchFamily="34" charset="0"/>
-                <a:ea typeface="Courier New" pitchFamily="34" charset="-122"/>
-                <a:cs typeface="Courier New" pitchFamily="34" charset="-120"/>
-              </a:rPr>
-              <a:t>Risk   = 0.7·AIexposure + 0.3·volatility</a:t>
-            </a:r>
-            <a:endParaRPr lang="en-US" sz="1400" dirty="0"/>
-          </a:p>
-          <a:p>
-            <a:pPr indent="0" marL="0">
-              <a:lnSpc>
-                <a:spcPts val="1800"/>
-              </a:lnSpc>
-              <a:buNone/>
-            </a:pPr>
-            <a:endParaRPr lang="en-US" sz="1400" dirty="0"/>
-          </a:p>
-          <a:p>
-            <a:pPr indent="0" marL="0">
-              <a:lnSpc>
-                <a:spcPts val="1800"/>
-              </a:lnSpc>
-              <a:buNone/>
-            </a:pPr>
-            <a:r>
-              <a:rPr lang="en-US" sz="1400" dirty="0">
-                <a:solidFill>
-                  <a:srgbClr val="4F74F0"/>
-                </a:solidFill>
-                <a:latin typeface="Courier New" pitchFamily="34" charset="0"/>
-                <a:ea typeface="Courier New" pitchFamily="34" charset="-122"/>
-                <a:cs typeface="Courier New" pitchFamily="34" charset="-120"/>
-              </a:rPr>
-              <a:t>RAV    = Return · (1 − 0.6·Risk)</a:t>
-            </a:r>
-            <a:endParaRPr lang="en-US" sz="1400" dirty="0"/>
-          </a:p>
-          <a:p>
-            <a:pPr indent="0" marL="0">
-              <a:lnSpc>
-                <a:spcPts val="1800"/>
-              </a:lnSpc>
-              <a:buNone/>
-            </a:pPr>
-            <a:endParaRPr lang="en-US" sz="1400" dirty="0"/>
-          </a:p>
-          <a:p>
-            <a:pPr indent="0" marL="0">
-              <a:lnSpc>
-                <a:spcPts val="1800"/>
-              </a:lnSpc>
-              <a:buNone/>
-            </a:pPr>
-            <a:r>
-              <a:rPr lang="en-US" sz="1400" dirty="0">
-                <a:solidFill>
-                  <a:srgbClr val="4F74F0"/>
-                </a:solidFill>
-                <a:latin typeface="Courier New" pitchFamily="34" charset="0"/>
-                <a:ea typeface="Courier New" pitchFamily="34" charset="-122"/>
-                <a:cs typeface="Courier New" pitchFamily="34" charset="-120"/>
-              </a:rPr>
-              <a:t>Score  = 100·[0.7·RAV + 0.3·Fit]</a:t>
-            </a:r>
-            <a:endParaRPr lang="en-US" sz="1400" dirty="0"/>
-          </a:p>
-        </p:txBody>
-      </p:sp>
-      <p:sp>
-        <p:nvSpPr>
-          <p:cNvPr id="7" name="Text 4"/>
-          <p:cNvSpPr/>
-          <p:nvPr/>
-        </p:nvSpPr>
-        <p:spPr>
-          <a:xfrm>
-            <a:off x="548640" y="4160520"/>
-            <a:ext cx="5577840" cy="320040"/>
-          </a:xfrm>
-          <a:prstGeom prst="rect">
-            <a:avLst/>
-          </a:prstGeom>
-          <a:noFill/>
-          <a:ln/>
-        </p:spPr>
-        <p:txBody>
-          <a:bodyPr wrap="square" lIns="0" tIns="0" rIns="0" bIns="0" rtlCol="0" anchor="ctr"/>
-          <a:lstStyle/>
-          <a:p>
-            <a:pPr indent="0" marL="0">
-              <a:buNone/>
-            </a:pPr>
-            <a:r>
-              <a:rPr lang="en-US" sz="1000" i="1" dirty="0">
-                <a:solidFill>
-                  <a:srgbClr val="5E6F9E"/>
-                </a:solidFill>
-                <a:latin typeface="Arial" pitchFamily="34" charset="0"/>
-                <a:ea typeface="Arial" pitchFamily="34" charset="-122"/>
-                <a:cs typeface="Arial" pitchFamily="34" charset="-120"/>
-              </a:rPr>
-              <a:t>BLS 2024–34 · O*NET 29.0 · Eloundou et al. 2023</a:t>
-            </a:r>
-            <a:endParaRPr lang="en-US" sz="1000" dirty="0"/>
-          </a:p>
-        </p:txBody>
-      </p:sp>
-      <p:sp>
-        <p:nvSpPr>
-          <p:cNvPr id="8" name="Text 5"/>
-          <p:cNvSpPr/>
-          <p:nvPr/>
-        </p:nvSpPr>
-        <p:spPr>
-          <a:xfrm>
-            <a:off x="6400800" y="1691640"/>
-            <a:ext cx="5239512" cy="548640"/>
-          </a:xfrm>
-          <a:prstGeom prst="rect">
-            <a:avLst/>
-          </a:prstGeom>
-          <a:noFill/>
-          <a:ln/>
-        </p:spPr>
-        <p:txBody>
-          <a:bodyPr wrap="square" lIns="0" tIns="0" rIns="0" bIns="0" rtlCol="0" anchor="ctr"/>
-          <a:lstStyle/>
-          <a:p>
-            <a:pPr indent="0" marL="0">
-              <a:buNone/>
-            </a:pPr>
-            <a:r>
-              <a:rPr lang="en-US" sz="1300" b="1" dirty="0">
-                <a:solidFill>
-                  <a:srgbClr val="E8EEFC"/>
-                </a:solidFill>
-                <a:latin typeface="Arial" pitchFamily="34" charset="0"/>
-                <a:ea typeface="Arial" pitchFamily="34" charset="-122"/>
-                <a:cs typeface="Arial" pitchFamily="34" charset="-120"/>
-              </a:rPr>
-              <a:t>Percentile ranks, because the score should mean “versus every alternative”</a:t>
-            </a:r>
-            <a:endParaRPr lang="en-US" sz="1300" dirty="0"/>
-          </a:p>
-        </p:txBody>
-      </p:sp>
-      <p:sp>
-        <p:nvSpPr>
-          <p:cNvPr id="9" name="Text 6"/>
-          <p:cNvSpPr/>
-          <p:nvPr/>
-        </p:nvSpPr>
-        <p:spPr>
-          <a:xfrm>
-            <a:off x="6400800" y="2258568"/>
-            <a:ext cx="5239512" cy="594360"/>
-          </a:xfrm>
-          <a:prstGeom prst="rect">
-            <a:avLst/>
-          </a:prstGeom>
-          <a:noFill/>
-          <a:ln/>
-        </p:spPr>
-        <p:txBody>
-          <a:bodyPr wrap="square" lIns="0" tIns="0" rIns="0" bIns="0" rtlCol="0" anchor="ctr"/>
-          <a:lstStyle/>
-          <a:p>
-            <a:pPr indent="0" marL="0">
-              <a:buNone/>
-            </a:pPr>
-            <a:r>
-              <a:rPr lang="en-US" sz="1150" dirty="0">
+          <p:cNvPr id="18" name="Text 15"/>
+          <p:cNvSpPr/>
+          <p:nvPr/>
+        </p:nvSpPr>
+        <p:spPr>
+          <a:xfrm>
+            <a:off x="822960" y="5833872"/>
+            <a:ext cx="10515600" cy="411480"/>
+          </a:xfrm>
+          <a:prstGeom prst="rect">
+            <a:avLst/>
+          </a:prstGeom>
+          <a:noFill/>
+          <a:ln/>
+        </p:spPr>
+        <p:txBody>
+          <a:bodyPr wrap="square" lIns="0" tIns="0" rIns="0" bIns="0" rtlCol="0" anchor="ctr"/>
+          <a:lstStyle/>
+          <a:p>
+            <a:pPr indent="0" marL="0">
+              <a:buNone/>
+            </a:pPr>
+            <a:r>
+              <a:rPr lang="en-US" sz="1250" i="1" dirty="0">
                 <a:solidFill>
                   <a:srgbClr val="9DB0D9"/>
                 </a:solidFill>
@@ -10004,171 +11467,15 @@
                 <a:ea typeface="Arial" pitchFamily="34" charset="-122"/>
                 <a:cs typeface="Arial" pitchFamily="34" charset="-120"/>
               </a:rPr>
-              <a:t>that’s the decision a person is actually making</a:t>
-            </a:r>
-            <a:endParaRPr lang="en-US" sz="1150" dirty="0"/>
-          </a:p>
-        </p:txBody>
-      </p:sp>
-      <p:sp>
-        <p:nvSpPr>
-          <p:cNvPr id="10" name="Text 7"/>
-          <p:cNvSpPr/>
-          <p:nvPr/>
-        </p:nvSpPr>
-        <p:spPr>
-          <a:xfrm>
-            <a:off x="6400800" y="3063240"/>
-            <a:ext cx="5239512" cy="548640"/>
-          </a:xfrm>
-          <a:prstGeom prst="rect">
-            <a:avLst/>
-          </a:prstGeom>
-          <a:noFill/>
-          <a:ln/>
-        </p:spPr>
-        <p:txBody>
-          <a:bodyPr wrap="square" lIns="0" tIns="0" rIns="0" bIns="0" rtlCol="0" anchor="ctr"/>
-          <a:lstStyle/>
-          <a:p>
-            <a:pPr indent="0" marL="0">
-              <a:buNone/>
-            </a:pPr>
-            <a:r>
-              <a:rPr lang="en-US" sz="1300" b="1" dirty="0">
-                <a:solidFill>
-                  <a:srgbClr val="E8EEFC"/>
-                </a:solidFill>
-                <a:latin typeface="Arial" pitchFamily="34" charset="0"/>
-                <a:ea typeface="Arial" pitchFamily="34" charset="-122"/>
-                <a:cs typeface="Arial" pitchFamily="34" charset="-120"/>
-              </a:rPr>
-              <a:t>Risk multiplies, never subtracts</a:t>
-            </a:r>
-            <a:endParaRPr lang="en-US" sz="1300" dirty="0"/>
-          </a:p>
-        </p:txBody>
-      </p:sp>
-      <p:sp>
-        <p:nvSpPr>
-          <p:cNvPr id="11" name="Text 8"/>
-          <p:cNvSpPr/>
-          <p:nvPr/>
-        </p:nvSpPr>
-        <p:spPr>
-          <a:xfrm>
-            <a:off x="6400800" y="3630168"/>
-            <a:ext cx="5239512" cy="594360"/>
-          </a:xfrm>
-          <a:prstGeom prst="rect">
-            <a:avLst/>
-          </a:prstGeom>
-          <a:noFill/>
-          <a:ln/>
-        </p:spPr>
-        <p:txBody>
-          <a:bodyPr wrap="square" lIns="0" tIns="0" rIns="0" bIns="0" rtlCol="0" anchor="ctr"/>
-          <a:lstStyle/>
-          <a:p>
-            <a:pPr indent="0" marL="0">
-              <a:buNone/>
-            </a:pPr>
-            <a:r>
-              <a:rPr lang="en-US" sz="1150" dirty="0">
-                <a:solidFill>
-                  <a:srgbClr val="9DB0D9"/>
-                </a:solidFill>
-                <a:latin typeface="Arial" pitchFamily="34" charset="0"/>
-                <a:ea typeface="Arial" pitchFamily="34" charset="-122"/>
-                <a:cs typeface="Arial" pitchFamily="34" charset="-120"/>
-              </a:rPr>
-              <a:t>subtraction lets a safe dead-end beat a risky rocket. Discounting is how you treat a return.</a:t>
-            </a:r>
-            <a:endParaRPr lang="en-US" sz="1150" dirty="0"/>
-          </a:p>
-        </p:txBody>
-      </p:sp>
-      <p:sp>
-        <p:nvSpPr>
-          <p:cNvPr id="12" name="Text 9"/>
-          <p:cNvSpPr/>
-          <p:nvPr/>
-        </p:nvSpPr>
-        <p:spPr>
-          <a:xfrm>
-            <a:off x="6400800" y="4434840"/>
-            <a:ext cx="5239512" cy="548640"/>
-          </a:xfrm>
-          <a:prstGeom prst="rect">
-            <a:avLst/>
-          </a:prstGeom>
-          <a:noFill/>
-          <a:ln/>
-        </p:spPr>
-        <p:txBody>
-          <a:bodyPr wrap="square" lIns="0" tIns="0" rIns="0" bIns="0" rtlCol="0" anchor="ctr"/>
-          <a:lstStyle/>
-          <a:p>
-            <a:pPr indent="0" marL="0">
-              <a:buNone/>
-            </a:pPr>
-            <a:r>
-              <a:rPr lang="en-US" sz="1300" b="1" dirty="0">
-                <a:solidFill>
-                  <a:srgbClr val="E8EEFC"/>
-                </a:solidFill>
-                <a:latin typeface="Arial" pitchFamily="34" charset="0"/>
-                <a:ea typeface="Arial" pitchFamily="34" charset="-122"/>
-                <a:cs typeface="Arial" pitchFamily="34" charset="-120"/>
-              </a:rPr>
-              <a:t>The weights are priors, and I say so</a:t>
-            </a:r>
-            <a:endParaRPr lang="en-US" sz="1300" dirty="0"/>
-          </a:p>
-        </p:txBody>
-      </p:sp>
-      <p:sp>
-        <p:nvSpPr>
-          <p:cNvPr id="13" name="Text 10"/>
-          <p:cNvSpPr/>
-          <p:nvPr/>
-        </p:nvSpPr>
-        <p:spPr>
-          <a:xfrm>
-            <a:off x="6400800" y="5001768"/>
-            <a:ext cx="5239512" cy="594360"/>
-          </a:xfrm>
-          <a:prstGeom prst="rect">
-            <a:avLst/>
-          </a:prstGeom>
-          <a:noFill/>
-          <a:ln/>
-        </p:spPr>
-        <p:txBody>
-          <a:bodyPr wrap="square" lIns="0" tIns="0" rIns="0" bIns="0" rtlCol="0" anchor="ctr"/>
-          <a:lstStyle/>
-          <a:p>
-            <a:pPr indent="0" marL="0">
-              <a:buNone/>
-            </a:pPr>
-            <a:r>
-              <a:rPr lang="en-US" sz="1150" dirty="0">
-                <a:solidFill>
-                  <a:srgbClr val="9DB0D9"/>
-                </a:solidFill>
-                <a:latin typeface="Arial" pitchFamily="34" charset="0"/>
-                <a:ea typeface="Arial" pitchFamily="34" charset="-122"/>
-                <a:cs typeface="Arial" pitchFamily="34" charset="-120"/>
-              </a:rPr>
-              <a:t>no dataset of correct career choices exists. So every ranking is re-scored under 729 weight perturbations and five rival models. Disagreement gets labeled, not hidden.</a:t>
-            </a:r>
-            <a:endParaRPr lang="en-US" sz="1150" dirty="0"/>
-          </a:p>
-        </p:txBody>
-      </p:sp>
-      <p:sp>
-        <p:nvSpPr>
-          <p:cNvPr id="14" name="Text 11"/>
+              <a:t>Answer those three questions with data, discount the reward by the risk — and you have the whole model.</a:t>
+            </a:r>
+            <a:endParaRPr lang="en-US" sz="1250" dirty="0"/>
+          </a:p>
+        </p:txBody>
+      </p:sp>
+      <p:sp>
+        <p:nvSpPr>
+          <p:cNvPr id="19" name="Text 16"/>
           <p:cNvSpPr/>
           <p:nvPr/>
         </p:nvSpPr>
@@ -10207,7 +11514,7 @@
       </p:sp>
       <p:sp>
         <p:nvSpPr>
-          <p:cNvPr id="15" name="Text 12"/>
+          <p:cNvPr id="20" name="Text 17"/>
           <p:cNvSpPr/>
           <p:nvPr/>
         </p:nvSpPr>
@@ -10340,7 +11647,7 @@
                 <a:ea typeface="Arial" pitchFamily="34" charset="-122"/>
                 <a:cs typeface="Arial" pitchFamily="34" charset="-120"/>
               </a:rPr>
-              <a:t>07 · THE RECEIPTS</a:t>
+              <a:t>07 · THE FORMULA</a:t>
             </a:r>
             <a:endParaRPr lang="en-US" sz="1100" dirty="0"/>
           </a:p>
@@ -10379,7 +11686,7 @@
                 <a:ea typeface="Arial" pitchFamily="34" charset="-122"/>
                 <a:cs typeface="Arial" pitchFamily="34" charset="-120"/>
               </a:rPr>
-              <a:t>I tested it on a decade that already happened</a:t>
+              <a:t>Those three sentences, written down</a:t>
             </a:r>
             <a:endParaRPr lang="en-US" sz="3100" dirty="0"/>
           </a:p>
@@ -10393,12 +11700,12 @@
         </p:nvSpPr>
         <p:spPr>
           <a:xfrm>
-            <a:off x="548640" y="1645920"/>
-            <a:ext cx="2743200" cy="1600200"/>
+            <a:off x="548640" y="1737360"/>
+            <a:ext cx="5943600" cy="804672"/>
           </a:xfrm>
           <a:prstGeom prst="roundRect">
             <a:avLst>
-              <a:gd name="adj" fmla="val 5143"/>
+              <a:gd name="adj" fmla="val 10227"/>
             </a:avLst>
           </a:prstGeom>
           <a:solidFill>
@@ -10420,24 +11727,24 @@
         </p:nvSpPr>
         <p:spPr>
           <a:xfrm>
-            <a:off x="640080" y="1828800"/>
-            <a:ext cx="2560320" cy="594360"/>
-          </a:xfrm>
-          <a:prstGeom prst="rect">
-            <a:avLst/>
-          </a:prstGeom>
-          <a:noFill/>
-          <a:ln/>
-        </p:spPr>
-        <p:txBody>
-          <a:bodyPr wrap="square" lIns="0" tIns="0" rIns="0" bIns="0" rtlCol="0" anchor="ctr"/>
-          <a:lstStyle/>
-          <a:p>
-            <a:pPr algn="ctr" indent="0" marL="0">
-              <a:buNone/>
-            </a:pPr>
-            <a:r>
-              <a:rPr lang="en-US" sz="2800" b="1" dirty="0">
+            <a:off x="822960" y="1938528"/>
+            <a:ext cx="5394960" cy="457200"/>
+          </a:xfrm>
+          <a:prstGeom prst="rect">
+            <a:avLst/>
+          </a:prstGeom>
+          <a:noFill/>
+          <a:ln/>
+        </p:spPr>
+        <p:txBody>
+          <a:bodyPr wrap="square" lIns="0" tIns="0" rIns="0" bIns="0" rtlCol="0" anchor="ctr"/>
+          <a:lstStyle/>
+          <a:p>
+            <a:pPr indent="0" marL="0">
+              <a:buNone/>
+            </a:pPr>
+            <a:r>
+              <a:rPr lang="en-US" sz="1400" b="1" dirty="0">
                 <a:solidFill>
                   <a:srgbClr val="4F74F0"/>
                 </a:solidFill>
@@ -10445,9 +11752,9 @@
                 <a:ea typeface="Courier New" pitchFamily="34" charset="-122"/>
                 <a:cs typeface="Courier New" pitchFamily="34" charset="-120"/>
               </a:rPr>
-              <a:t>ρ = 0.39</a:t>
-            </a:r>
-            <a:endParaRPr lang="en-US" sz="2800" dirty="0"/>
+              <a:t>Return = ½·growth + ½·pay</a:t>
+            </a:r>
+            <a:endParaRPr lang="en-US" sz="1400" dirty="0"/>
           </a:p>
         </p:txBody>
       </p:sp>
@@ -10459,24 +11766,24 @@
         </p:nvSpPr>
         <p:spPr>
           <a:xfrm>
-            <a:off x="731520" y="2487168"/>
-            <a:ext cx="2377440" cy="658368"/>
-          </a:xfrm>
-          <a:prstGeom prst="rect">
-            <a:avLst/>
-          </a:prstGeom>
-          <a:noFill/>
-          <a:ln/>
-        </p:spPr>
-        <p:txBody>
-          <a:bodyPr wrap="square" lIns="0" tIns="0" rIns="0" bIns="0" rtlCol="0" anchor="ctr"/>
-          <a:lstStyle/>
-          <a:p>
-            <a:pPr algn="ctr" indent="0" marL="0">
-              <a:buNone/>
-            </a:pPr>
-            <a:r>
-              <a:rPr lang="en-US" sz="1050" dirty="0">
+            <a:off x="6720840" y="1847088"/>
+            <a:ext cx="4937760" cy="640080"/>
+          </a:xfrm>
+          <a:prstGeom prst="rect">
+            <a:avLst/>
+          </a:prstGeom>
+          <a:noFill/>
+          <a:ln/>
+        </p:spPr>
+        <p:txBody>
+          <a:bodyPr wrap="square" lIns="0" tIns="0" rIns="0" bIns="0" rtlCol="0" anchor="ctr"/>
+          <a:lstStyle/>
+          <a:p>
+            <a:pPr indent="0" marL="0">
+              <a:buNone/>
+            </a:pPr>
+            <a:r>
+              <a:rPr lang="en-US" sz="1200" dirty="0">
                 <a:solidFill>
                   <a:srgbClr val="9DB0D9"/>
                 </a:solidFill>
@@ -10484,9 +11791,9 @@
                 <a:ea typeface="Arial" pitchFamily="34" charset="-122"/>
                 <a:cs typeface="Arial" pitchFamily="34" charset="-120"/>
               </a:rPr>
-              <a:t>2014 scores vs what actually happened by 2024 (647 occupations)</a:t>
-            </a:r>
-            <a:endParaRPr lang="en-US" sz="1050" dirty="0"/>
+              <a:t>what you get — each as a rank against all 730 careers</a:t>
+            </a:r>
+            <a:endParaRPr lang="en-US" sz="1200" dirty="0"/>
           </a:p>
         </p:txBody>
       </p:sp>
@@ -10498,12 +11805,12 @@
         </p:nvSpPr>
         <p:spPr>
           <a:xfrm>
-            <a:off x="3456432" y="1645920"/>
-            <a:ext cx="2743200" cy="1600200"/>
+            <a:off x="548640" y="2724912"/>
+            <a:ext cx="5943600" cy="804672"/>
           </a:xfrm>
           <a:prstGeom prst="roundRect">
             <a:avLst>
-              <a:gd name="adj" fmla="val 5143"/>
+              <a:gd name="adj" fmla="val 10227"/>
             </a:avLst>
           </a:prstGeom>
           <a:solidFill>
@@ -10525,24 +11832,24 @@
         </p:nvSpPr>
         <p:spPr>
           <a:xfrm>
-            <a:off x="3547872" y="1828800"/>
-            <a:ext cx="2560320" cy="594360"/>
-          </a:xfrm>
-          <a:prstGeom prst="rect">
-            <a:avLst/>
-          </a:prstGeom>
-          <a:noFill/>
-          <a:ln/>
-        </p:spPr>
-        <p:txBody>
-          <a:bodyPr wrap="square" lIns="0" tIns="0" rIns="0" bIns="0" rtlCol="0" anchor="ctr"/>
-          <a:lstStyle/>
-          <a:p>
-            <a:pPr algn="ctr" indent="0" marL="0">
-              <a:buNone/>
-            </a:pPr>
-            <a:r>
-              <a:rPr lang="en-US" sz="2800" b="1" dirty="0">
+            <a:off x="822960" y="2926080"/>
+            <a:ext cx="5394960" cy="457200"/>
+          </a:xfrm>
+          <a:prstGeom prst="rect">
+            <a:avLst/>
+          </a:prstGeom>
+          <a:noFill/>
+          <a:ln/>
+        </p:spPr>
+        <p:txBody>
+          <a:bodyPr wrap="square" lIns="0" tIns="0" rIns="0" bIns="0" rtlCol="0" anchor="ctr"/>
+          <a:lstStyle/>
+          <a:p>
+            <a:pPr indent="0" marL="0">
+              <a:buNone/>
+            </a:pPr>
+            <a:r>
+              <a:rPr lang="en-US" sz="1400" b="1" dirty="0">
                 <a:solidFill>
                   <a:srgbClr val="4F74F0"/>
                 </a:solidFill>
@@ -10550,9 +11857,9 @@
                 <a:ea typeface="Courier New" pitchFamily="34" charset="-122"/>
                 <a:cs typeface="Courier New" pitchFamily="34" charset="-120"/>
               </a:rPr>
-              <a:t>48%</a:t>
-            </a:r>
-            <a:endParaRPr lang="en-US" sz="2800" dirty="0"/>
+              <a:t>Risk = 0.7·AI exposure + 0.3·volatility</a:t>
+            </a:r>
+            <a:endParaRPr lang="en-US" sz="1400" dirty="0"/>
           </a:p>
         </p:txBody>
       </p:sp>
@@ -10564,24 +11871,24 @@
         </p:nvSpPr>
         <p:spPr>
           <a:xfrm>
-            <a:off x="3639312" y="2487168"/>
-            <a:ext cx="2377440" cy="658368"/>
-          </a:xfrm>
-          <a:prstGeom prst="rect">
-            <a:avLst/>
-          </a:prstGeom>
-          <a:noFill/>
-          <a:ln/>
-        </p:spPr>
-        <p:txBody>
-          <a:bodyPr wrap="square" lIns="0" tIns="0" rIns="0" bIns="0" rtlCol="0" anchor="ctr"/>
-          <a:lstStyle/>
-          <a:p>
-            <a:pPr algn="ctr" indent="0" marL="0">
-              <a:buNone/>
-            </a:pPr>
-            <a:r>
-              <a:rPr lang="en-US" sz="1050" dirty="0">
+            <a:off x="6720840" y="2834640"/>
+            <a:ext cx="4937760" cy="640080"/>
+          </a:xfrm>
+          <a:prstGeom prst="rect">
+            <a:avLst/>
+          </a:prstGeom>
+          <a:noFill/>
+          <a:ln/>
+        </p:spPr>
+        <p:txBody>
+          <a:bodyPr wrap="square" lIns="0" tIns="0" rIns="0" bIns="0" rtlCol="0" anchor="ctr"/>
+          <a:lstStyle/>
+          <a:p>
+            <a:pPr indent="0" marL="0">
+              <a:buNone/>
+            </a:pPr>
+            <a:r>
+              <a:rPr lang="en-US" sz="1200" dirty="0">
                 <a:solidFill>
                   <a:srgbClr val="9DB0D9"/>
                 </a:solidFill>
@@ -10589,9 +11896,9 @@
                 <a:ea typeface="Arial" pitchFamily="34" charset="-122"/>
                 <a:cs typeface="Arial" pitchFamily="34" charset="-120"/>
               </a:rPr>
-              <a:t>of the careers that really declined were flagged — 33% by chance</a:t>
-            </a:r>
-            <a:endParaRPr lang="en-US" sz="1050" dirty="0"/>
+              <a:t>what can kill it — mostly, how much of the job AI can touch</a:t>
+            </a:r>
+            <a:endParaRPr lang="en-US" sz="1200" dirty="0"/>
           </a:p>
         </p:txBody>
       </p:sp>
@@ -10603,12 +11910,12 @@
         </p:nvSpPr>
         <p:spPr>
           <a:xfrm>
-            <a:off x="6364224" y="1645920"/>
-            <a:ext cx="2743200" cy="1600200"/>
+            <a:off x="548640" y="3712464"/>
+            <a:ext cx="5943600" cy="804672"/>
           </a:xfrm>
           <a:prstGeom prst="roundRect">
             <a:avLst>
-              <a:gd name="adj" fmla="val 5143"/>
+              <a:gd name="adj" fmla="val 10227"/>
             </a:avLst>
           </a:prstGeom>
           <a:solidFill>
@@ -10630,24 +11937,24 @@
         </p:nvSpPr>
         <p:spPr>
           <a:xfrm>
-            <a:off x="6455664" y="1828800"/>
-            <a:ext cx="2560320" cy="594360"/>
-          </a:xfrm>
-          <a:prstGeom prst="rect">
-            <a:avLst/>
-          </a:prstGeom>
-          <a:noFill/>
-          <a:ln/>
-        </p:spPr>
-        <p:txBody>
-          <a:bodyPr wrap="square" lIns="0" tIns="0" rIns="0" bIns="0" rtlCol="0" anchor="ctr"/>
-          <a:lstStyle/>
-          <a:p>
-            <a:pPr algn="ctr" indent="0" marL="0">
-              <a:buNone/>
-            </a:pPr>
-            <a:r>
-              <a:rPr lang="en-US" sz="2800" b="1" dirty="0">
+            <a:off x="822960" y="3913632"/>
+            <a:ext cx="5394960" cy="457200"/>
+          </a:xfrm>
+          <a:prstGeom prst="rect">
+            <a:avLst/>
+          </a:prstGeom>
+          <a:noFill/>
+          <a:ln/>
+        </p:spPr>
+        <p:txBody>
+          <a:bodyPr wrap="square" lIns="0" tIns="0" rIns="0" bIns="0" rtlCol="0" anchor="ctr"/>
+          <a:lstStyle/>
+          <a:p>
+            <a:pPr indent="0" marL="0">
+              <a:buNone/>
+            </a:pPr>
+            <a:r>
+              <a:rPr lang="en-US" sz="1400" b="1" dirty="0">
                 <a:solidFill>
                   <a:srgbClr val="4F74F0"/>
                 </a:solidFill>
@@ -10655,9 +11962,9 @@
                 <a:ea typeface="Courier New" pitchFamily="34" charset="-122"/>
                 <a:cs typeface="Courier New" pitchFamily="34" charset="-120"/>
               </a:rPr>
-              <a:t>37 vs 46</a:t>
-            </a:r>
-            <a:endParaRPr lang="en-US" sz="2800" dirty="0"/>
+              <a:t>Value = Return × (1 − 0.6·Risk)</a:t>
+            </a:r>
+            <a:endParaRPr lang="en-US" sz="1400" dirty="0"/>
           </a:p>
         </p:txBody>
       </p:sp>
@@ -10669,24 +11976,24 @@
         </p:nvSpPr>
         <p:spPr>
           <a:xfrm>
-            <a:off x="6547104" y="2487168"/>
-            <a:ext cx="2377440" cy="658368"/>
-          </a:xfrm>
-          <a:prstGeom prst="rect">
-            <a:avLst/>
-          </a:prstGeom>
-          <a:noFill/>
-          <a:ln/>
-        </p:spPr>
-        <p:txBody>
-          <a:bodyPr wrap="square" lIns="0" tIns="0" rIns="0" bIns="0" rtlCol="0" anchor="ctr"/>
-          <a:lstStyle/>
-          <a:p>
-            <a:pPr algn="ctr" indent="0" marL="0">
-              <a:buNone/>
-            </a:pPr>
-            <a:r>
-              <a:rPr lang="en-US" sz="1050" dirty="0">
+            <a:off x="6720840" y="3822192"/>
+            <a:ext cx="4937760" cy="640080"/>
+          </a:xfrm>
+          <a:prstGeom prst="rect">
+            <a:avLst/>
+          </a:prstGeom>
+          <a:noFill/>
+          <a:ln/>
+        </p:spPr>
+        <p:txBody>
+          <a:bodyPr wrap="square" lIns="0" tIns="0" rIns="0" bIns="0" rtlCol="0" anchor="ctr"/>
+          <a:lstStyle/>
+          <a:p>
+            <a:pPr indent="0" marL="0">
+              <a:buNone/>
+            </a:pPr>
+            <a:r>
+              <a:rPr lang="en-US" sz="1200" dirty="0">
                 <a:solidFill>
                   <a:srgbClr val="9DB0D9"/>
                 </a:solidFill>
@@ -10694,9 +12001,9 @@
                 <a:ea typeface="Arial" pitchFamily="34" charset="-122"/>
                 <a:cs typeface="Arial" pitchFamily="34" charset="-120"/>
               </a:rPr>
-              <a:t>median 2014 score: decliners vs growers</a:t>
-            </a:r>
-            <a:endParaRPr lang="en-US" sz="1050" dirty="0"/>
+              <a:t>the reward, discounted by the risk — like a risk-adjusted return</a:t>
+            </a:r>
+            <a:endParaRPr lang="en-US" sz="1200" dirty="0"/>
           </a:p>
         </p:txBody>
       </p:sp>
@@ -10708,12 +12015,12 @@
         </p:nvSpPr>
         <p:spPr>
           <a:xfrm>
-            <a:off x="9272016" y="1645920"/>
-            <a:ext cx="2743200" cy="1600200"/>
+            <a:off x="548640" y="4700016"/>
+            <a:ext cx="5943600" cy="804672"/>
           </a:xfrm>
           <a:prstGeom prst="roundRect">
             <a:avLst>
-              <a:gd name="adj" fmla="val 5143"/>
+              <a:gd name="adj" fmla="val 10227"/>
             </a:avLst>
           </a:prstGeom>
           <a:solidFill>
@@ -10735,24 +12042,24 @@
         </p:nvSpPr>
         <p:spPr>
           <a:xfrm>
-            <a:off x="9363456" y="1828800"/>
-            <a:ext cx="2560320" cy="594360"/>
-          </a:xfrm>
-          <a:prstGeom prst="rect">
-            <a:avLst/>
-          </a:prstGeom>
-          <a:noFill/>
-          <a:ln/>
-        </p:spPr>
-        <p:txBody>
-          <a:bodyPr wrap="square" lIns="0" tIns="0" rIns="0" bIns="0" rtlCol="0" anchor="ctr"/>
-          <a:lstStyle/>
-          <a:p>
-            <a:pPr algn="ctr" indent="0" marL="0">
-              <a:buNone/>
-            </a:pPr>
-            <a:r>
-              <a:rPr lang="en-US" sz="2800" b="1" dirty="0">
+            <a:off x="822960" y="4901184"/>
+            <a:ext cx="5394960" cy="457200"/>
+          </a:xfrm>
+          <a:prstGeom prst="rect">
+            <a:avLst/>
+          </a:prstGeom>
+          <a:noFill/>
+          <a:ln/>
+        </p:spPr>
+        <p:txBody>
+          <a:bodyPr wrap="square" lIns="0" tIns="0" rIns="0" bIns="0" rtlCol="0" anchor="ctr"/>
+          <a:lstStyle/>
+          <a:p>
+            <a:pPr indent="0" marL="0">
+              <a:buNone/>
+            </a:pPr>
+            <a:r>
+              <a:rPr lang="en-US" sz="1400" b="1" dirty="0">
                 <a:solidFill>
                   <a:srgbClr val="4F74F0"/>
                 </a:solidFill>
@@ -10760,9 +12067,9 @@
                 <a:ea typeface="Courier New" pitchFamily="34" charset="-122"/>
                 <a:cs typeface="Courier New" pitchFamily="34" charset="-120"/>
               </a:rPr>
-              <a:t>ρ ≈ 0.10</a:t>
-            </a:r>
-            <a:endParaRPr lang="en-US" sz="2800" dirty="0"/>
+              <a:t>Score = 70% Value + 30% Fit</a:t>
+            </a:r>
+            <a:endParaRPr lang="en-US" sz="1400" dirty="0"/>
           </a:p>
         </p:txBody>
       </p:sp>
@@ -10774,24 +12081,24 @@
         </p:nvSpPr>
         <p:spPr>
           <a:xfrm>
-            <a:off x="9454896" y="2487168"/>
-            <a:ext cx="2377440" cy="658368"/>
-          </a:xfrm>
-          <a:prstGeom prst="rect">
-            <a:avLst/>
-          </a:prstGeom>
-          <a:noFill/>
-          <a:ln/>
-        </p:spPr>
-        <p:txBody>
-          <a:bodyPr wrap="square" lIns="0" tIns="0" rIns="0" bIns="0" rtlCol="0" anchor="ctr"/>
-          <a:lstStyle/>
-          <a:p>
-            <a:pPr algn="ctr" indent="0" marL="0">
-              <a:buNone/>
-            </a:pPr>
-            <a:r>
-              <a:rPr lang="en-US" sz="1050" dirty="0">
+            <a:off x="6720840" y="4809744"/>
+            <a:ext cx="4937760" cy="640080"/>
+          </a:xfrm>
+          <a:prstGeom prst="rect">
+            <a:avLst/>
+          </a:prstGeom>
+          <a:noFill/>
+          <a:ln/>
+        </p:spPr>
+        <p:txBody>
+          <a:bodyPr wrap="square" lIns="0" tIns="0" rIns="0" bIns="0" rtlCol="0" anchor="ctr"/>
+          <a:lstStyle/>
+          <a:p>
+            <a:pPr indent="0" marL="0">
+              <a:buNone/>
+            </a:pPr>
+            <a:r>
+              <a:rPr lang="en-US" sz="1200" dirty="0">
                 <a:solidFill>
                   <a:srgbClr val="9DB0D9"/>
                 </a:solidFill>
@@ -10799,9 +12106,9 @@
                 <a:ea typeface="Arial" pitchFamily="34" charset="-122"/>
                 <a:cs typeface="Arial" pitchFamily="34" charset="-120"/>
               </a:rPr>
-              <a:t>AI exposure vs that decade. Expected — no LLMs existed yet</a:t>
-            </a:r>
-            <a:endParaRPr lang="en-US" sz="1050" dirty="0"/>
+              <a:t>blend in how well it matches you. Out of 100.</a:t>
+            </a:r>
+            <a:endParaRPr lang="en-US" sz="1200" dirty="0"/>
           </a:p>
         </p:txBody>
       </p:sp>
@@ -10813,16 +12120,16 @@
         </p:nvSpPr>
         <p:spPr>
           <a:xfrm>
-            <a:off x="548640" y="3566160"/>
-            <a:ext cx="11091672" cy="2286000"/>
+            <a:off x="548640" y="5715000"/>
+            <a:ext cx="11091672" cy="640080"/>
           </a:xfrm>
           <a:prstGeom prst="roundRect">
             <a:avLst>
-              <a:gd name="adj" fmla="val 3600"/>
+              <a:gd name="adj" fmla="val 12857"/>
             </a:avLst>
           </a:prstGeom>
           <a:solidFill>
-            <a:srgbClr val="101A38"/>
+            <a:srgbClr val="0C1530"/>
           </a:solidFill>
           <a:ln w="9525">
             <a:solidFill>
@@ -10840,146 +12147,54 @@
         </p:nvSpPr>
         <p:spPr>
           <a:xfrm>
-            <a:off x="822960" y="3730752"/>
-            <a:ext cx="10515600" cy="320040"/>
-          </a:xfrm>
-          <a:prstGeom prst="rect">
-            <a:avLst/>
-          </a:prstGeom>
-          <a:noFill/>
-          <a:ln/>
-        </p:spPr>
-        <p:txBody>
-          <a:bodyPr wrap="square" lIns="0" tIns="0" rIns="0" bIns="0" rtlCol="0" anchor="ctr"/>
-          <a:lstStyle/>
-          <a:p>
-            <a:pPr indent="0" marL="0">
-              <a:buNone/>
-            </a:pPr>
-            <a:r>
-              <a:rPr lang="en-US" sz="1400" b="1" dirty="0">
-                <a:solidFill>
-                  <a:srgbClr val="FBBF24"/>
-                </a:solidFill>
-                <a:latin typeface="Arial" pitchFamily="34" charset="0"/>
-                <a:ea typeface="Arial" pitchFamily="34" charset="-122"/>
-                <a:cs typeface="Arial" pitchFamily="34" charset="-120"/>
-              </a:rPr>
-              <a:t>And here’s me volunteering the awkward number:</a:t>
-            </a:r>
-            <a:endParaRPr lang="en-US" sz="1400" dirty="0"/>
+            <a:off x="822960" y="5806440"/>
+            <a:ext cx="10515600" cy="457200"/>
+          </a:xfrm>
+          <a:prstGeom prst="rect">
+            <a:avLst/>
+          </a:prstGeom>
+          <a:noFill/>
+          <a:ln/>
+        </p:spPr>
+        <p:txBody>
+          <a:bodyPr wrap="square" lIns="0" tIns="0" rIns="0" bIns="0" rtlCol="0" anchor="ctr"/>
+          <a:lstStyle/>
+          <a:p>
+            <a:pPr indent="0" marL="0">
+              <a:buNone/>
+            </a:pPr>
+            <a:r>
+              <a:rPr lang="en-US" sz="1150" b="1" dirty="0">
+                <a:solidFill>
+                  <a:srgbClr val="E8EEFC"/>
+                </a:solidFill>
+                <a:latin typeface="Arial" pitchFamily="34" charset="0"/>
+                <a:ea typeface="Arial" pitchFamily="34" charset="-122"/>
+                <a:cs typeface="Arial" pitchFamily="34" charset="-120"/>
+              </a:rPr>
+              <a:t>The 0.7s and 0.6s are judgment calls, and I say so. </a:t>
+            </a:r>
+            <a:pPr indent="0" marL="0">
+              <a:buNone/>
+            </a:pPr>
+            <a:r>
+              <a:rPr lang="en-US" sz="1150" dirty="0">
+                <a:solidFill>
+                  <a:srgbClr val="9DB0D9"/>
+                </a:solidFill>
+                <a:latin typeface="Arial" pitchFamily="34" charset="0"/>
+                <a:ea typeface="Arial" pitchFamily="34" charset="-122"/>
+                <a:cs typeface="Arial" pitchFamily="34" charset="-120"/>
+              </a:rPr>
+              <a:t>So every ranking is re-scored 729 times with the weights shaken ±20%, plus by five rival formulas. If the answer flips, the site says “close call.”</a:t>
+            </a:r>
+            <a:endParaRPr lang="en-US" sz="1150" dirty="0"/>
           </a:p>
         </p:txBody>
       </p:sp>
       <p:sp>
         <p:nvSpPr>
           <p:cNvPr id="19" name="Text 16"/>
-          <p:cNvSpPr/>
-          <p:nvPr/>
-        </p:nvSpPr>
-        <p:spPr>
-          <a:xfrm>
-            <a:off x="822960" y="4114800"/>
-            <a:ext cx="10515600" cy="868680"/>
-          </a:xfrm>
-          <a:prstGeom prst="rect">
-            <a:avLst/>
-          </a:prstGeom>
-          <a:noFill/>
-          <a:ln/>
-        </p:spPr>
-        <p:txBody>
-          <a:bodyPr wrap="square" lIns="0" tIns="0" rIns="0" bIns="0" rtlCol="0" anchor="ctr"/>
-          <a:lstStyle/>
-          <a:p>
-            <a:pPr indent="0" marL="0">
-              <a:buNone/>
-            </a:pPr>
-            <a:r>
-              <a:rPr lang="en-US" sz="1250" b="1" dirty="0">
-                <a:solidFill>
-                  <a:srgbClr val="E8EEFC"/>
-                </a:solidFill>
-                <a:latin typeface="Arial" pitchFamily="34" charset="0"/>
-                <a:ea typeface="Arial" pitchFamily="34" charset="-122"/>
-                <a:cs typeface="Arial" pitchFamily="34" charset="-120"/>
-              </a:rPr>
-              <a:t>Plain BLS projections beat my full model on that decade, 0.411 to 0.39. </a:t>
-            </a:r>
-            <a:pPr indent="0" marL="0">
-              <a:buNone/>
-            </a:pPr>
-            <a:r>
-              <a:rPr lang="en-US" sz="1250" dirty="0">
-                <a:solidFill>
-                  <a:srgbClr val="9DB0D9"/>
-                </a:solidFill>
-                <a:latin typeface="Arial" pitchFamily="34" charset="0"/>
-                <a:ea typeface="Arial" pitchFamily="34" charset="-122"/>
-                <a:cs typeface="Arial" pitchFamily="34" charset="-120"/>
-              </a:rPr>
-              <a:t>That’s the model working, not failing: the AI-risk term is a bet about the coming decade, and the decade I tested had no LLMs in it. A backward test can’t score a forward bet. It can only validate the machinery — and it did.</a:t>
-            </a:r>
-            <a:endParaRPr lang="en-US" sz="1250" dirty="0"/>
-          </a:p>
-        </p:txBody>
-      </p:sp>
-      <p:sp>
-        <p:nvSpPr>
-          <p:cNvPr id="20" name="Text 17"/>
-          <p:cNvSpPr/>
-          <p:nvPr/>
-        </p:nvSpPr>
-        <p:spPr>
-          <a:xfrm>
-            <a:off x="822960" y="5074920"/>
-            <a:ext cx="10515600" cy="731520"/>
-          </a:xfrm>
-          <a:prstGeom prst="rect">
-            <a:avLst/>
-          </a:prstGeom>
-          <a:noFill/>
-          <a:ln/>
-        </p:spPr>
-        <p:txBody>
-          <a:bodyPr wrap="square" lIns="0" tIns="0" rIns="0" bIns="0" rtlCol="0" anchor="ctr"/>
-          <a:lstStyle/>
-          <a:p>
-            <a:pPr indent="0" marL="0">
-              <a:buNone/>
-            </a:pPr>
-            <a:r>
-              <a:rPr lang="en-US" sz="1250" b="1" dirty="0">
-                <a:solidFill>
-                  <a:srgbClr val="E8EEFC"/>
-                </a:solidFill>
-                <a:latin typeface="Arial" pitchFamily="34" charset="0"/>
-                <a:ea typeface="Arial" pitchFamily="34" charset="-122"/>
-                <a:cs typeface="Arial" pitchFamily="34" charset="-120"/>
-              </a:rPr>
-              <a:t>The back-test never tunes the weights. </a:t>
-            </a:r>
-            <a:pPr indent="0" marL="0">
-              <a:buNone/>
-            </a:pPr>
-            <a:r>
-              <a:rPr lang="en-US" sz="1250" dirty="0">
-                <a:solidFill>
-                  <a:srgbClr val="9DB0D9"/>
-                </a:solidFill>
-                <a:latin typeface="Arial" pitchFamily="34" charset="0"/>
-                <a:ea typeface="Arial" pitchFamily="34" charset="-122"/>
-                <a:cs typeface="Arial" pitchFamily="34" charset="-120"/>
-              </a:rPr>
-              <a:t>Fit to the test and it stops being a test. Calibrating on a pre-LLM decade would zero out the AI term — the one thing the model exists to say.</a:t>
-            </a:r>
-            <a:endParaRPr lang="en-US" sz="1250" dirty="0"/>
-          </a:p>
-        </p:txBody>
-      </p:sp>
-      <p:sp>
-        <p:nvSpPr>
-          <p:cNvPr id="21" name="Text 18"/>
           <p:cNvSpPr/>
           <p:nvPr/>
         </p:nvSpPr>
@@ -11018,7 +12233,7 @@
       </p:sp>
       <p:sp>
         <p:nvSpPr>
-          <p:cNvPr id="22" name="Text 19"/>
+          <p:cNvPr id="20" name="Text 17"/>
           <p:cNvSpPr/>
           <p:nvPr/>
         </p:nvSpPr>
@@ -11151,7 +12366,7 @@
                 <a:ea typeface="Arial" pitchFamily="34" charset="-122"/>
                 <a:cs typeface="Arial" pitchFamily="34" charset="-120"/>
               </a:rPr>
-              <a:t>08 · THE INFRASTRUCTURE</a:t>
+              <a:t>08 · THE RECEIPTS</a:t>
             </a:r>
             <a:endParaRPr lang="en-US" sz="1100" dirty="0"/>
           </a:p>
@@ -11190,7 +12405,7 @@
                 <a:ea typeface="Arial" pitchFamily="34" charset="-122"/>
                 <a:cs typeface="Arial" pitchFamily="34" charset="-120"/>
               </a:rPr>
-              <a:t>Deploying it taught me more AWS than the practice exams</a:t>
+              <a:t>I tested it on a decade that already happened</a:t>
             </a:r>
             <a:endParaRPr lang="en-US" sz="3100" dirty="0"/>
           </a:p>
@@ -11204,12 +12419,12 @@
         </p:nvSpPr>
         <p:spPr>
           <a:xfrm>
-            <a:off x="548640" y="1691640"/>
-            <a:ext cx="2514600" cy="914400"/>
+            <a:off x="548640" y="1645920"/>
+            <a:ext cx="2743200" cy="1600200"/>
           </a:xfrm>
           <a:prstGeom prst="roundRect">
             <a:avLst>
-              <a:gd name="adj" fmla="val 9000"/>
+              <a:gd name="adj" fmla="val 5143"/>
             </a:avLst>
           </a:prstGeom>
           <a:solidFill>
@@ -11231,8 +12446,8 @@
         </p:nvSpPr>
         <p:spPr>
           <a:xfrm>
-            <a:off x="548640" y="1691640"/>
-            <a:ext cx="2514600" cy="914400"/>
+            <a:off x="640080" y="1828800"/>
+            <a:ext cx="2560320" cy="594360"/>
           </a:xfrm>
           <a:prstGeom prst="rect">
             <a:avLst/>
@@ -11248,17 +12463,17 @@
               <a:buNone/>
             </a:pPr>
             <a:r>
-              <a:rPr lang="en-US" sz="1250" b="1" dirty="0">
-                <a:solidFill>
-                  <a:srgbClr val="E8EEFC"/>
-                </a:solidFill>
-                <a:latin typeface="Arial" pitchFamily="34" charset="0"/>
-                <a:ea typeface="Arial" pitchFamily="34" charset="-122"/>
-                <a:cs typeface="Arial" pitchFamily="34" charset="-120"/>
-              </a:rPr>
-              <a:t>GitHub</a:t>
-            </a:r>
-            <a:endParaRPr lang="en-US" sz="1250" dirty="0"/>
+              <a:rPr lang="en-US" sz="2800" b="1" dirty="0">
+                <a:solidFill>
+                  <a:srgbClr val="4F74F0"/>
+                </a:solidFill>
+                <a:latin typeface="Courier New" pitchFamily="34" charset="0"/>
+                <a:ea typeface="Courier New" pitchFamily="34" charset="-122"/>
+                <a:cs typeface="Courier New" pitchFamily="34" charset="-120"/>
+              </a:rPr>
+              <a:t>0.39</a:t>
+            </a:r>
+            <a:endParaRPr lang="en-US" sz="2800" dirty="0"/>
           </a:p>
         </p:txBody>
       </p:sp>
@@ -11270,8 +12485,8 @@
         </p:nvSpPr>
         <p:spPr>
           <a:xfrm>
-            <a:off x="3044952" y="1691640"/>
-            <a:ext cx="329184" cy="914400"/>
+            <a:off x="731520" y="2487168"/>
+            <a:ext cx="2377440" cy="658368"/>
           </a:xfrm>
           <a:prstGeom prst="rect">
             <a:avLst/>
@@ -11287,17 +12502,17 @@
               <a:buNone/>
             </a:pPr>
             <a:r>
-              <a:rPr lang="en-US" sz="1600" dirty="0">
-                <a:solidFill>
-                  <a:srgbClr val="4F74F0"/>
-                </a:solidFill>
-                <a:latin typeface="Arial" pitchFamily="34" charset="0"/>
-                <a:ea typeface="Arial" pitchFamily="34" charset="-122"/>
-                <a:cs typeface="Arial" pitchFamily="34" charset="-120"/>
-              </a:rPr>
-              <a:t>→</a:t>
-            </a:r>
-            <a:endParaRPr lang="en-US" sz="1600" dirty="0"/>
+              <a:rPr lang="en-US" sz="1050" dirty="0">
+                <a:solidFill>
+                  <a:srgbClr val="9DB0D9"/>
+                </a:solidFill>
+                <a:latin typeface="Arial" pitchFamily="34" charset="0"/>
+                <a:ea typeface="Arial" pitchFamily="34" charset="-122"/>
+                <a:cs typeface="Arial" pitchFamily="34" charset="-120"/>
+              </a:rPr>
+              <a:t>rank correlation: 2014 scores vs what happened (0 = noise, 1 = perfect)</a:t>
+            </a:r>
+            <a:endParaRPr lang="en-US" sz="1050" dirty="0"/>
           </a:p>
         </p:txBody>
       </p:sp>
@@ -11309,12 +12524,12 @@
         </p:nvSpPr>
         <p:spPr>
           <a:xfrm>
-            <a:off x="3346704" y="1691640"/>
-            <a:ext cx="2514600" cy="914400"/>
+            <a:off x="3456432" y="1645920"/>
+            <a:ext cx="2743200" cy="1600200"/>
           </a:xfrm>
           <a:prstGeom prst="roundRect">
             <a:avLst>
-              <a:gd name="adj" fmla="val 9000"/>
+              <a:gd name="adj" fmla="val 5143"/>
             </a:avLst>
           </a:prstGeom>
           <a:solidFill>
@@ -11336,8 +12551,8 @@
         </p:nvSpPr>
         <p:spPr>
           <a:xfrm>
-            <a:off x="3346704" y="1691640"/>
-            <a:ext cx="2514600" cy="914400"/>
+            <a:off x="3547872" y="1828800"/>
+            <a:ext cx="2560320" cy="594360"/>
           </a:xfrm>
           <a:prstGeom prst="rect">
             <a:avLst/>
@@ -11353,73 +12568,56 @@
               <a:buNone/>
             </a:pPr>
             <a:r>
-              <a:rPr lang="en-US" sz="1250" b="1" dirty="0">
-                <a:solidFill>
-                  <a:srgbClr val="E8EEFC"/>
-                </a:solidFill>
-                <a:latin typeface="Arial" pitchFamily="34" charset="0"/>
-                <a:ea typeface="Arial" pitchFamily="34" charset="-122"/>
-                <a:cs typeface="Arial" pitchFamily="34" charset="-120"/>
-              </a:rPr>
-              <a:t>Amplify Hosting</a:t>
-            </a:r>
-            <a:endParaRPr lang="en-US" sz="1250" dirty="0"/>
-          </a:p>
+              <a:rPr lang="en-US" sz="2800" b="1" dirty="0">
+                <a:solidFill>
+                  <a:srgbClr val="4F74F0"/>
+                </a:solidFill>
+                <a:latin typeface="Courier New" pitchFamily="34" charset="0"/>
+                <a:ea typeface="Courier New" pitchFamily="34" charset="-122"/>
+                <a:cs typeface="Courier New" pitchFamily="34" charset="-120"/>
+              </a:rPr>
+              <a:t>48%</a:t>
+            </a:r>
+            <a:endParaRPr lang="en-US" sz="2800" dirty="0"/>
+          </a:p>
+        </p:txBody>
+      </p:sp>
+      <p:sp>
+        <p:nvSpPr>
+          <p:cNvPr id="10" name="Text 7"/>
+          <p:cNvSpPr/>
+          <p:nvPr/>
+        </p:nvSpPr>
+        <p:spPr>
+          <a:xfrm>
+            <a:off x="3639312" y="2487168"/>
+            <a:ext cx="2377440" cy="658368"/>
+          </a:xfrm>
+          <a:prstGeom prst="rect">
+            <a:avLst/>
+          </a:prstGeom>
+          <a:noFill/>
+          <a:ln/>
+        </p:spPr>
+        <p:txBody>
+          <a:bodyPr wrap="square" lIns="0" tIns="0" rIns="0" bIns="0" rtlCol="0" anchor="ctr"/>
+          <a:lstStyle/>
           <a:p>
             <a:pPr algn="ctr" indent="0" marL="0">
               <a:buNone/>
             </a:pPr>
             <a:r>
-              <a:rPr lang="en-US" sz="1250" b="1" dirty="0">
-                <a:solidFill>
-                  <a:srgbClr val="E8EEFC"/>
-                </a:solidFill>
-                <a:latin typeface="Arial" pitchFamily="34" charset="0"/>
-                <a:ea typeface="Arial" pitchFamily="34" charset="-122"/>
-                <a:cs typeface="Arial" pitchFamily="34" charset="-120"/>
-              </a:rPr>
-              <a:t>build + SSR</a:t>
-            </a:r>
-            <a:endParaRPr lang="en-US" sz="1250" dirty="0"/>
-          </a:p>
-        </p:txBody>
-      </p:sp>
-      <p:sp>
-        <p:nvSpPr>
-          <p:cNvPr id="10" name="Text 7"/>
-          <p:cNvSpPr/>
-          <p:nvPr/>
-        </p:nvSpPr>
-        <p:spPr>
-          <a:xfrm>
-            <a:off x="5843016" y="1691640"/>
-            <a:ext cx="329184" cy="914400"/>
-          </a:xfrm>
-          <a:prstGeom prst="rect">
-            <a:avLst/>
-          </a:prstGeom>
-          <a:noFill/>
-          <a:ln/>
-        </p:spPr>
-        <p:txBody>
-          <a:bodyPr wrap="square" lIns="0" tIns="0" rIns="0" bIns="0" rtlCol="0" anchor="ctr"/>
-          <a:lstStyle/>
-          <a:p>
-            <a:pPr algn="ctr" indent="0" marL="0">
-              <a:buNone/>
-            </a:pPr>
-            <a:r>
-              <a:rPr lang="en-US" sz="1600" dirty="0">
-                <a:solidFill>
-                  <a:srgbClr val="4F74F0"/>
-                </a:solidFill>
-                <a:latin typeface="Arial" pitchFamily="34" charset="0"/>
-                <a:ea typeface="Arial" pitchFamily="34" charset="-122"/>
-                <a:cs typeface="Arial" pitchFamily="34" charset="-120"/>
-              </a:rPr>
-              <a:t>→</a:t>
-            </a:r>
-            <a:endParaRPr lang="en-US" sz="1600" dirty="0"/>
+              <a:rPr lang="en-US" sz="1050" dirty="0">
+                <a:solidFill>
+                  <a:srgbClr val="9DB0D9"/>
+                </a:solidFill>
+                <a:latin typeface="Arial" pitchFamily="34" charset="0"/>
+                <a:ea typeface="Arial" pitchFamily="34" charset="-122"/>
+                <a:cs typeface="Arial" pitchFamily="34" charset="-120"/>
+              </a:rPr>
+              <a:t>of the careers that really declined were flagged — 33% by chance</a:t>
+            </a:r>
+            <a:endParaRPr lang="en-US" sz="1050" dirty="0"/>
           </a:p>
         </p:txBody>
       </p:sp>
@@ -11431,12 +12629,12 @@
         </p:nvSpPr>
         <p:spPr>
           <a:xfrm>
-            <a:off x="6144768" y="1691640"/>
-            <a:ext cx="2514600" cy="914400"/>
+            <a:off x="6364224" y="1645920"/>
+            <a:ext cx="2743200" cy="1600200"/>
           </a:xfrm>
           <a:prstGeom prst="roundRect">
             <a:avLst>
-              <a:gd name="adj" fmla="val 9000"/>
+              <a:gd name="adj" fmla="val 5143"/>
             </a:avLst>
           </a:prstGeom>
           <a:solidFill>
@@ -11458,8 +12656,8 @@
         </p:nvSpPr>
         <p:spPr>
           <a:xfrm>
-            <a:off x="6144768" y="1691640"/>
-            <a:ext cx="2514600" cy="914400"/>
+            <a:off x="6455664" y="1828800"/>
+            <a:ext cx="2560320" cy="594360"/>
           </a:xfrm>
           <a:prstGeom prst="rect">
             <a:avLst/>
@@ -11475,73 +12673,56 @@
               <a:buNone/>
             </a:pPr>
             <a:r>
-              <a:rPr lang="en-US" sz="1250" b="1" dirty="0">
-                <a:solidFill>
-                  <a:srgbClr val="E8EEFC"/>
-                </a:solidFill>
-                <a:latin typeface="Arial" pitchFamily="34" charset="0"/>
-                <a:ea typeface="Arial" pitchFamily="34" charset="-122"/>
-                <a:cs typeface="Arial" pitchFamily="34" charset="-120"/>
-              </a:rPr>
-              <a:t>CloudFront</a:t>
-            </a:r>
-            <a:endParaRPr lang="en-US" sz="1250" dirty="0"/>
-          </a:p>
+              <a:rPr lang="en-US" sz="2800" b="1" dirty="0">
+                <a:solidFill>
+                  <a:srgbClr val="4F74F0"/>
+                </a:solidFill>
+                <a:latin typeface="Courier New" pitchFamily="34" charset="0"/>
+                <a:ea typeface="Courier New" pitchFamily="34" charset="-122"/>
+                <a:cs typeface="Courier New" pitchFamily="34" charset="-120"/>
+              </a:rPr>
+              <a:t>37 vs 46</a:t>
+            </a:r>
+            <a:endParaRPr lang="en-US" sz="2800" dirty="0"/>
+          </a:p>
+        </p:txBody>
+      </p:sp>
+      <p:sp>
+        <p:nvSpPr>
+          <p:cNvPr id="13" name="Text 10"/>
+          <p:cNvSpPr/>
+          <p:nvPr/>
+        </p:nvSpPr>
+        <p:spPr>
+          <a:xfrm>
+            <a:off x="6547104" y="2487168"/>
+            <a:ext cx="2377440" cy="658368"/>
+          </a:xfrm>
+          <a:prstGeom prst="rect">
+            <a:avLst/>
+          </a:prstGeom>
+          <a:noFill/>
+          <a:ln/>
+        </p:spPr>
+        <p:txBody>
+          <a:bodyPr wrap="square" lIns="0" tIns="0" rIns="0" bIns="0" rtlCol="0" anchor="ctr"/>
+          <a:lstStyle/>
           <a:p>
             <a:pPr algn="ctr" indent="0" marL="0">
               <a:buNone/>
             </a:pPr>
             <a:r>
-              <a:rPr lang="en-US" sz="1250" b="1" dirty="0">
-                <a:solidFill>
-                  <a:srgbClr val="E8EEFC"/>
-                </a:solidFill>
-                <a:latin typeface="Arial" pitchFamily="34" charset="0"/>
-                <a:ea typeface="Arial" pitchFamily="34" charset="-122"/>
-                <a:cs typeface="Arial" pitchFamily="34" charset="-120"/>
-              </a:rPr>
-              <a:t>edge network</a:t>
-            </a:r>
-            <a:endParaRPr lang="en-US" sz="1250" dirty="0"/>
-          </a:p>
-        </p:txBody>
-      </p:sp>
-      <p:sp>
-        <p:nvSpPr>
-          <p:cNvPr id="13" name="Text 10"/>
-          <p:cNvSpPr/>
-          <p:nvPr/>
-        </p:nvSpPr>
-        <p:spPr>
-          <a:xfrm>
-            <a:off x="8641080" y="1691640"/>
-            <a:ext cx="329184" cy="914400"/>
-          </a:xfrm>
-          <a:prstGeom prst="rect">
-            <a:avLst/>
-          </a:prstGeom>
-          <a:noFill/>
-          <a:ln/>
-        </p:spPr>
-        <p:txBody>
-          <a:bodyPr wrap="square" lIns="0" tIns="0" rIns="0" bIns="0" rtlCol="0" anchor="ctr"/>
-          <a:lstStyle/>
-          <a:p>
-            <a:pPr algn="ctr" indent="0" marL="0">
-              <a:buNone/>
-            </a:pPr>
-            <a:r>
-              <a:rPr lang="en-US" sz="1600" dirty="0">
-                <a:solidFill>
-                  <a:srgbClr val="4F74F0"/>
-                </a:solidFill>
-                <a:latin typeface="Arial" pitchFamily="34" charset="0"/>
-                <a:ea typeface="Arial" pitchFamily="34" charset="-122"/>
-                <a:cs typeface="Arial" pitchFamily="34" charset="-120"/>
-              </a:rPr>
-              <a:t>→</a:t>
-            </a:r>
-            <a:endParaRPr lang="en-US" sz="1600" dirty="0"/>
+              <a:rPr lang="en-US" sz="1050" dirty="0">
+                <a:solidFill>
+                  <a:srgbClr val="9DB0D9"/>
+                </a:solidFill>
+                <a:latin typeface="Arial" pitchFamily="34" charset="0"/>
+                <a:ea typeface="Arial" pitchFamily="34" charset="-122"/>
+                <a:cs typeface="Arial" pitchFamily="34" charset="-120"/>
+              </a:rPr>
+              <a:t>median 2014 score: decliners vs growers</a:t>
+            </a:r>
+            <a:endParaRPr lang="en-US" sz="1050" dirty="0"/>
           </a:p>
         </p:txBody>
       </p:sp>
@@ -11553,12 +12734,12 @@
         </p:nvSpPr>
         <p:spPr>
           <a:xfrm>
-            <a:off x="8942832" y="1691640"/>
-            <a:ext cx="2514600" cy="914400"/>
+            <a:off x="9272016" y="1645920"/>
+            <a:ext cx="2743200" cy="1600200"/>
           </a:xfrm>
           <a:prstGeom prst="roundRect">
             <a:avLst>
-              <a:gd name="adj" fmla="val 9000"/>
+              <a:gd name="adj" fmla="val 5143"/>
             </a:avLst>
           </a:prstGeom>
           <a:solidFill>
@@ -11580,8 +12761,8 @@
         </p:nvSpPr>
         <p:spPr>
           <a:xfrm>
-            <a:off x="8942832" y="1691640"/>
-            <a:ext cx="2514600" cy="914400"/>
+            <a:off x="9363456" y="1828800"/>
+            <a:ext cx="2560320" cy="594360"/>
           </a:xfrm>
           <a:prstGeom prst="rect">
             <a:avLst/>
@@ -11597,73 +12778,56 @@
               <a:buNone/>
             </a:pPr>
             <a:r>
-              <a:rPr lang="en-US" sz="1250" b="1" dirty="0">
-                <a:solidFill>
-                  <a:srgbClr val="E8EEFC"/>
-                </a:solidFill>
-                <a:latin typeface="Arial" pitchFamily="34" charset="0"/>
-                <a:ea typeface="Arial" pitchFamily="34" charset="-122"/>
-                <a:cs typeface="Arial" pitchFamily="34" charset="-120"/>
-              </a:rPr>
-              <a:t>Route 53</a:t>
-            </a:r>
-            <a:endParaRPr lang="en-US" sz="1250" dirty="0"/>
-          </a:p>
+              <a:rPr lang="en-US" sz="2800" b="1" dirty="0">
+                <a:solidFill>
+                  <a:srgbClr val="4F74F0"/>
+                </a:solidFill>
+                <a:latin typeface="Courier New" pitchFamily="34" charset="0"/>
+                <a:ea typeface="Courier New" pitchFamily="34" charset="-122"/>
+                <a:cs typeface="Courier New" pitchFamily="34" charset="-120"/>
+              </a:rPr>
+              <a:t>~0</a:t>
+            </a:r>
+            <a:endParaRPr lang="en-US" sz="2800" dirty="0"/>
+          </a:p>
+        </p:txBody>
+      </p:sp>
+      <p:sp>
+        <p:nvSpPr>
+          <p:cNvPr id="16" name="Text 13"/>
+          <p:cNvSpPr/>
+          <p:nvPr/>
+        </p:nvSpPr>
+        <p:spPr>
+          <a:xfrm>
+            <a:off x="9454896" y="2487168"/>
+            <a:ext cx="2377440" cy="658368"/>
+          </a:xfrm>
+          <a:prstGeom prst="rect">
+            <a:avLst/>
+          </a:prstGeom>
+          <a:noFill/>
+          <a:ln/>
+        </p:spPr>
+        <p:txBody>
+          <a:bodyPr wrap="square" lIns="0" tIns="0" rIns="0" bIns="0" rtlCol="0" anchor="ctr"/>
+          <a:lstStyle/>
           <a:p>
             <a:pPr algn="ctr" indent="0" marL="0">
               <a:buNone/>
             </a:pPr>
             <a:r>
-              <a:rPr lang="en-US" sz="1250" b="1" dirty="0">
-                <a:solidFill>
-                  <a:srgbClr val="E8EEFC"/>
-                </a:solidFill>
-                <a:latin typeface="Arial" pitchFamily="34" charset="0"/>
-                <a:ea typeface="Arial" pitchFamily="34" charset="-122"/>
-                <a:cs typeface="Arial" pitchFamily="34" charset="-120"/>
-              </a:rPr>
-              <a:t>ashleylibasci.com</a:t>
-            </a:r>
-            <a:endParaRPr lang="en-US" sz="1250" dirty="0"/>
-          </a:p>
-        </p:txBody>
-      </p:sp>
-      <p:sp>
-        <p:nvSpPr>
-          <p:cNvPr id="16" name="Text 13"/>
-          <p:cNvSpPr/>
-          <p:nvPr/>
-        </p:nvSpPr>
-        <p:spPr>
-          <a:xfrm>
-            <a:off x="548640" y="2834640"/>
-            <a:ext cx="11091672" cy="365760"/>
-          </a:xfrm>
-          <a:prstGeom prst="rect">
-            <a:avLst/>
-          </a:prstGeom>
-          <a:noFill/>
-          <a:ln/>
-        </p:spPr>
-        <p:txBody>
-          <a:bodyPr wrap="square" lIns="0" tIns="0" rIns="0" bIns="0" rtlCol="0" anchor="ctr"/>
-          <a:lstStyle/>
-          <a:p>
-            <a:pPr indent="0" marL="0">
-              <a:buNone/>
-            </a:pPr>
-            <a:r>
-              <a:rPr lang="en-US" sz="1400" b="1" dirty="0">
-                <a:solidFill>
-                  <a:srgbClr val="E8EEFC"/>
-                </a:solidFill>
-                <a:latin typeface="Arial" pitchFamily="34" charset="0"/>
-                <a:ea typeface="Arial" pitchFamily="34" charset="-122"/>
-                <a:cs typeface="Arial" pitchFamily="34" charset="-120"/>
-              </a:rPr>
-              <a:t>The whole pipeline is a git push.</a:t>
-            </a:r>
-            <a:endParaRPr lang="en-US" sz="1400" dirty="0"/>
+              <a:rPr lang="en-US" sz="1050" dirty="0">
+                <a:solidFill>
+                  <a:srgbClr val="9DB0D9"/>
+                </a:solidFill>
+                <a:latin typeface="Arial" pitchFamily="34" charset="0"/>
+                <a:ea typeface="Arial" pitchFamily="34" charset="-122"/>
+                <a:cs typeface="Arial" pitchFamily="34" charset="-120"/>
+              </a:rPr>
+              <a:t>AI exposure’s signal that decade. Expected — no LLMs existed yet</a:t>
+            </a:r>
+            <a:endParaRPr lang="en-US" sz="1050" dirty="0"/>
           </a:p>
         </p:txBody>
       </p:sp>
@@ -11675,16 +12839,16 @@
         </p:nvSpPr>
         <p:spPr>
           <a:xfrm>
-            <a:off x="548640" y="3383280"/>
-            <a:ext cx="2743200" cy="2011680"/>
+            <a:off x="548640" y="3566160"/>
+            <a:ext cx="11091672" cy="2286000"/>
           </a:xfrm>
           <a:prstGeom prst="roundRect">
             <a:avLst>
-              <a:gd name="adj" fmla="val 4091"/>
+              <a:gd name="adj" fmla="val 3600"/>
             </a:avLst>
           </a:prstGeom>
           <a:solidFill>
-            <a:srgbClr val="0C1530"/>
+            <a:srgbClr val="101A38"/>
           </a:solidFill>
           <a:ln w="9525">
             <a:solidFill>
@@ -11702,8 +12866,47 @@
         </p:nvSpPr>
         <p:spPr>
           <a:xfrm>
-            <a:off x="713232" y="3566160"/>
-            <a:ext cx="2414016" cy="365760"/>
+            <a:off x="822960" y="3730752"/>
+            <a:ext cx="10515600" cy="320040"/>
+          </a:xfrm>
+          <a:prstGeom prst="rect">
+            <a:avLst/>
+          </a:prstGeom>
+          <a:noFill/>
+          <a:ln/>
+        </p:spPr>
+        <p:txBody>
+          <a:bodyPr wrap="square" lIns="0" tIns="0" rIns="0" bIns="0" rtlCol="0" anchor="ctr"/>
+          <a:lstStyle/>
+          <a:p>
+            <a:pPr indent="0" marL="0">
+              <a:buNone/>
+            </a:pPr>
+            <a:r>
+              <a:rPr lang="en-US" sz="1400" b="1" dirty="0">
+                <a:solidFill>
+                  <a:srgbClr val="FBBF24"/>
+                </a:solidFill>
+                <a:latin typeface="Arial" pitchFamily="34" charset="0"/>
+                <a:ea typeface="Arial" pitchFamily="34" charset="-122"/>
+                <a:cs typeface="Arial" pitchFamily="34" charset="-120"/>
+              </a:rPr>
+              <a:t>And here’s me volunteering the awkward number:</a:t>
+            </a:r>
+            <a:endParaRPr lang="en-US" sz="1400" dirty="0"/>
+          </a:p>
+        </p:txBody>
+      </p:sp>
+      <p:sp>
+        <p:nvSpPr>
+          <p:cNvPr id="19" name="Text 16"/>
+          <p:cNvSpPr/>
+          <p:nvPr/>
+        </p:nvSpPr>
+        <p:spPr>
+          <a:xfrm>
+            <a:off x="822960" y="4114800"/>
+            <a:ext cx="10515600" cy="868680"/>
           </a:xfrm>
           <a:prstGeom prst="rect">
             <a:avLst/>
@@ -11721,13 +12924,27 @@
             <a:r>
               <a:rPr lang="en-US" sz="1250" b="1" dirty="0">
                 <a:solidFill>
-                  <a:srgbClr val="4F74F0"/>
-                </a:solidFill>
-                <a:latin typeface="Arial" pitchFamily="34" charset="0"/>
-                <a:ea typeface="Arial" pitchFamily="34" charset="-122"/>
-                <a:cs typeface="Arial" pitchFamily="34" charset="-120"/>
-              </a:rPr>
-              <a:t>Managed services</a:t>
+                  <a:srgbClr val="E8EEFC"/>
+                </a:solidFill>
+                <a:latin typeface="Arial" pitchFamily="34" charset="0"/>
+                <a:ea typeface="Arial" pitchFamily="34" charset="-122"/>
+                <a:cs typeface="Arial" pitchFamily="34" charset="-120"/>
+              </a:rPr>
+              <a:t>The government’s plain projections beat my full model on that decade, 0.411 to 0.39. </a:t>
+            </a:r>
+            <a:pPr indent="0" marL="0">
+              <a:buNone/>
+            </a:pPr>
+            <a:r>
+              <a:rPr lang="en-US" sz="1250" dirty="0">
+                <a:solidFill>
+                  <a:srgbClr val="9DB0D9"/>
+                </a:solidFill>
+                <a:latin typeface="Arial" pitchFamily="34" charset="0"/>
+                <a:ea typeface="Arial" pitchFamily="34" charset="-122"/>
+                <a:cs typeface="Arial" pitchFamily="34" charset="-120"/>
+              </a:rPr>
+              <a:t>That’s the model working, not failing: the AI-risk term is a bet about the coming decade, and the decade I tested had no LLMs in it. A backward test can’t score a forward bet. It can only validate the machinery — and it did.</a:t>
             </a:r>
             <a:endParaRPr lang="en-US" sz="1250" dirty="0"/>
           </a:p>
@@ -11735,30 +12952,44 @@
       </p:sp>
       <p:sp>
         <p:nvSpPr>
-          <p:cNvPr id="19" name="Text 16"/>
-          <p:cNvSpPr/>
-          <p:nvPr/>
-        </p:nvSpPr>
-        <p:spPr>
-          <a:xfrm>
-            <a:off x="713232" y="3950208"/>
-            <a:ext cx="2414016" cy="1325880"/>
-          </a:xfrm>
-          <a:prstGeom prst="rect">
-            <a:avLst/>
-          </a:prstGeom>
-          <a:noFill/>
-          <a:ln/>
-        </p:spPr>
-        <p:txBody>
-          <a:bodyPr wrap="square" lIns="0" tIns="0" rIns="0" bIns="0" rtlCol="0" anchor="ctr"/>
-          <a:lstStyle/>
-          <a:p>
-            <a:pPr indent="0" marL="0">
-              <a:buNone/>
-            </a:pPr>
-            <a:r>
-              <a:rPr lang="en-US" sz="1100" dirty="0">
+          <p:cNvPr id="20" name="Text 17"/>
+          <p:cNvSpPr/>
+          <p:nvPr/>
+        </p:nvSpPr>
+        <p:spPr>
+          <a:xfrm>
+            <a:off x="822960" y="5074920"/>
+            <a:ext cx="10515600" cy="731520"/>
+          </a:xfrm>
+          <a:prstGeom prst="rect">
+            <a:avLst/>
+          </a:prstGeom>
+          <a:noFill/>
+          <a:ln/>
+        </p:spPr>
+        <p:txBody>
+          <a:bodyPr wrap="square" lIns="0" tIns="0" rIns="0" bIns="0" rtlCol="0" anchor="ctr"/>
+          <a:lstStyle/>
+          <a:p>
+            <a:pPr indent="0" marL="0">
+              <a:buNone/>
+            </a:pPr>
+            <a:r>
+              <a:rPr lang="en-US" sz="1250" b="1" dirty="0">
+                <a:solidFill>
+                  <a:srgbClr val="E8EEFC"/>
+                </a:solidFill>
+                <a:latin typeface="Arial" pitchFamily="34" charset="0"/>
+                <a:ea typeface="Arial" pitchFamily="34" charset="-122"/>
+                <a:cs typeface="Arial" pitchFamily="34" charset="-120"/>
+              </a:rPr>
+              <a:t>The back-test never tunes the weights. </a:t>
+            </a:r>
+            <a:pPr indent="0" marL="0">
+              <a:buNone/>
+            </a:pPr>
+            <a:r>
+              <a:rPr lang="en-US" sz="1250" dirty="0">
                 <a:solidFill>
                   <a:srgbClr val="9DB0D9"/>
                 </a:solidFill>
@@ -11766,369 +12997,15 @@
                 <a:ea typeface="Arial" pitchFamily="34" charset="-122"/>
                 <a:cs typeface="Arial" pitchFamily="34" charset="-120"/>
               </a:rPr>
-              <a:t>no servers to own; Amplify builds and serves the Next.js app</a:t>
-            </a:r>
-            <a:endParaRPr lang="en-US" sz="1100" dirty="0"/>
-          </a:p>
-        </p:txBody>
-      </p:sp>
-      <p:sp>
-        <p:nvSpPr>
-          <p:cNvPr id="20" name="Shape 17"/>
-          <p:cNvSpPr/>
-          <p:nvPr/>
-        </p:nvSpPr>
-        <p:spPr>
-          <a:xfrm>
-            <a:off x="3456432" y="3383280"/>
-            <a:ext cx="2743200" cy="2011680"/>
-          </a:xfrm>
-          <a:prstGeom prst="roundRect">
-            <a:avLst>
-              <a:gd name="adj" fmla="val 4091"/>
-            </a:avLst>
-          </a:prstGeom>
-          <a:solidFill>
-            <a:srgbClr val="0C1530"/>
-          </a:solidFill>
-          <a:ln w="9525">
-            <a:solidFill>
-              <a:srgbClr val="24325C"/>
-            </a:solidFill>
-            <a:prstDash val="solid"/>
-          </a:ln>
-        </p:spPr>
+              <a:t>Fit to the test and it stops being a test. Calibrating on a pre-LLM decade would zero out the AI term — the one thing the model exists to say.</a:t>
+            </a:r>
+            <a:endParaRPr lang="en-US" sz="1250" dirty="0"/>
+          </a:p>
+        </p:txBody>
       </p:sp>
       <p:sp>
         <p:nvSpPr>
           <p:cNvPr id="21" name="Text 18"/>
-          <p:cNvSpPr/>
-          <p:nvPr/>
-        </p:nvSpPr>
-        <p:spPr>
-          <a:xfrm>
-            <a:off x="3621024" y="3566160"/>
-            <a:ext cx="2414016" cy="365760"/>
-          </a:xfrm>
-          <a:prstGeom prst="rect">
-            <a:avLst/>
-          </a:prstGeom>
-          <a:noFill/>
-          <a:ln/>
-        </p:spPr>
-        <p:txBody>
-          <a:bodyPr wrap="square" lIns="0" tIns="0" rIns="0" bIns="0" rtlCol="0" anchor="ctr"/>
-          <a:lstStyle/>
-          <a:p>
-            <a:pPr indent="0" marL="0">
-              <a:buNone/>
-            </a:pPr>
-            <a:r>
-              <a:rPr lang="en-US" sz="1250" b="1" dirty="0">
-                <a:solidFill>
-                  <a:srgbClr val="4F74F0"/>
-                </a:solidFill>
-                <a:latin typeface="Arial" pitchFamily="34" charset="0"/>
-                <a:ea typeface="Arial" pitchFamily="34" charset="-122"/>
-                <a:cs typeface="Arial" pitchFamily="34" charset="-120"/>
-              </a:rPr>
-              <a:t>Edge caching</a:t>
-            </a:r>
-            <a:endParaRPr lang="en-US" sz="1250" dirty="0"/>
-          </a:p>
-        </p:txBody>
-      </p:sp>
-      <p:sp>
-        <p:nvSpPr>
-          <p:cNvPr id="22" name="Text 19"/>
-          <p:cNvSpPr/>
-          <p:nvPr/>
-        </p:nvSpPr>
-        <p:spPr>
-          <a:xfrm>
-            <a:off x="3621024" y="3950208"/>
-            <a:ext cx="2414016" cy="1325880"/>
-          </a:xfrm>
-          <a:prstGeom prst="rect">
-            <a:avLst/>
-          </a:prstGeom>
-          <a:noFill/>
-          <a:ln/>
-        </p:spPr>
-        <p:txBody>
-          <a:bodyPr wrap="square" lIns="0" tIns="0" rIns="0" bIns="0" rtlCol="0" anchor="ctr"/>
-          <a:lstStyle/>
-          <a:p>
-            <a:pPr indent="0" marL="0">
-              <a:buNone/>
-            </a:pPr>
-            <a:r>
-              <a:rPr lang="en-US" sz="1100" dirty="0">
-                <a:solidFill>
-                  <a:srgbClr val="9DB0D9"/>
-                </a:solidFill>
-                <a:latin typeface="Arial" pitchFamily="34" charset="0"/>
-                <a:ea typeface="Arial" pitchFamily="34" charset="-122"/>
-                <a:cs typeface="Arial" pitchFamily="34" charset="-120"/>
-              </a:rPr>
-              <a:t>CloudFront serves the static pages from the edge; SSR only where needed</a:t>
-            </a:r>
-            <a:endParaRPr lang="en-US" sz="1100" dirty="0"/>
-          </a:p>
-        </p:txBody>
-      </p:sp>
-      <p:sp>
-        <p:nvSpPr>
-          <p:cNvPr id="23" name="Shape 20"/>
-          <p:cNvSpPr/>
-          <p:nvPr/>
-        </p:nvSpPr>
-        <p:spPr>
-          <a:xfrm>
-            <a:off x="6364224" y="3383280"/>
-            <a:ext cx="2743200" cy="2011680"/>
-          </a:xfrm>
-          <a:prstGeom prst="roundRect">
-            <a:avLst>
-              <a:gd name="adj" fmla="val 4091"/>
-            </a:avLst>
-          </a:prstGeom>
-          <a:solidFill>
-            <a:srgbClr val="0C1530"/>
-          </a:solidFill>
-          <a:ln w="9525">
-            <a:solidFill>
-              <a:srgbClr val="24325C"/>
-            </a:solidFill>
-            <a:prstDash val="solid"/>
-          </a:ln>
-        </p:spPr>
-      </p:sp>
-      <p:sp>
-        <p:nvSpPr>
-          <p:cNvPr id="24" name="Text 21"/>
-          <p:cNvSpPr/>
-          <p:nvPr/>
-        </p:nvSpPr>
-        <p:spPr>
-          <a:xfrm>
-            <a:off x="6528816" y="3566160"/>
-            <a:ext cx="2414016" cy="365760"/>
-          </a:xfrm>
-          <a:prstGeom prst="rect">
-            <a:avLst/>
-          </a:prstGeom>
-          <a:noFill/>
-          <a:ln/>
-        </p:spPr>
-        <p:txBody>
-          <a:bodyPr wrap="square" lIns="0" tIns="0" rIns="0" bIns="0" rtlCol="0" anchor="ctr"/>
-          <a:lstStyle/>
-          <a:p>
-            <a:pPr indent="0" marL="0">
-              <a:buNone/>
-            </a:pPr>
-            <a:r>
-              <a:rPr lang="en-US" sz="1250" b="1" dirty="0">
-                <a:solidFill>
-                  <a:srgbClr val="4F74F0"/>
-                </a:solidFill>
-                <a:latin typeface="Arial" pitchFamily="34" charset="0"/>
-                <a:ea typeface="Arial" pitchFamily="34" charset="-122"/>
-                <a:cs typeface="Arial" pitchFamily="34" charset="-120"/>
-              </a:rPr>
-              <a:t>Shared responsibility</a:t>
-            </a:r>
-            <a:endParaRPr lang="en-US" sz="1250" dirty="0"/>
-          </a:p>
-        </p:txBody>
-      </p:sp>
-      <p:sp>
-        <p:nvSpPr>
-          <p:cNvPr id="25" name="Text 22"/>
-          <p:cNvSpPr/>
-          <p:nvPr/>
-        </p:nvSpPr>
-        <p:spPr>
-          <a:xfrm>
-            <a:off x="6528816" y="3950208"/>
-            <a:ext cx="2414016" cy="1325880"/>
-          </a:xfrm>
-          <a:prstGeom prst="rect">
-            <a:avLst/>
-          </a:prstGeom>
-          <a:noFill/>
-          <a:ln/>
-        </p:spPr>
-        <p:txBody>
-          <a:bodyPr wrap="square" lIns="0" tIns="0" rIns="0" bIns="0" rtlCol="0" anchor="ctr"/>
-          <a:lstStyle/>
-          <a:p>
-            <a:pPr indent="0" marL="0">
-              <a:buNone/>
-            </a:pPr>
-            <a:r>
-              <a:rPr lang="en-US" sz="1100" dirty="0">
-                <a:solidFill>
-                  <a:srgbClr val="9DB0D9"/>
-                </a:solidFill>
-                <a:latin typeface="Arial" pitchFamily="34" charset="0"/>
-                <a:ea typeface="Arial" pitchFamily="34" charset="-122"/>
-                <a:cs typeface="Arial" pitchFamily="34" charset="-120"/>
-              </a:rPr>
-              <a:t>AWS runs the platform, my code’s security is on me — see next slide</a:t>
-            </a:r>
-            <a:endParaRPr lang="en-US" sz="1100" dirty="0"/>
-          </a:p>
-        </p:txBody>
-      </p:sp>
-      <p:sp>
-        <p:nvSpPr>
-          <p:cNvPr id="26" name="Shape 23"/>
-          <p:cNvSpPr/>
-          <p:nvPr/>
-        </p:nvSpPr>
-        <p:spPr>
-          <a:xfrm>
-            <a:off x="9272016" y="3383280"/>
-            <a:ext cx="2743200" cy="2011680"/>
-          </a:xfrm>
-          <a:prstGeom prst="roundRect">
-            <a:avLst>
-              <a:gd name="adj" fmla="val 4091"/>
-            </a:avLst>
-          </a:prstGeom>
-          <a:solidFill>
-            <a:srgbClr val="0C1530"/>
-          </a:solidFill>
-          <a:ln w="9525">
-            <a:solidFill>
-              <a:srgbClr val="24325C"/>
-            </a:solidFill>
-            <a:prstDash val="solid"/>
-          </a:ln>
-        </p:spPr>
-      </p:sp>
-      <p:sp>
-        <p:nvSpPr>
-          <p:cNvPr id="27" name="Text 24"/>
-          <p:cNvSpPr/>
-          <p:nvPr/>
-        </p:nvSpPr>
-        <p:spPr>
-          <a:xfrm>
-            <a:off x="9436608" y="3566160"/>
-            <a:ext cx="2414016" cy="365760"/>
-          </a:xfrm>
-          <a:prstGeom prst="rect">
-            <a:avLst/>
-          </a:prstGeom>
-          <a:noFill/>
-          <a:ln/>
-        </p:spPr>
-        <p:txBody>
-          <a:bodyPr wrap="square" lIns="0" tIns="0" rIns="0" bIns="0" rtlCol="0" anchor="ctr"/>
-          <a:lstStyle/>
-          <a:p>
-            <a:pPr indent="0" marL="0">
-              <a:buNone/>
-            </a:pPr>
-            <a:r>
-              <a:rPr lang="en-US" sz="1250" b="1" dirty="0">
-                <a:solidFill>
-                  <a:srgbClr val="4F74F0"/>
-                </a:solidFill>
-                <a:latin typeface="Arial" pitchFamily="34" charset="0"/>
-                <a:ea typeface="Arial" pitchFamily="34" charset="-122"/>
-                <a:cs typeface="Arial" pitchFamily="34" charset="-120"/>
-              </a:rPr>
-              <a:t>DNS &amp; certs</a:t>
-            </a:r>
-            <a:endParaRPr lang="en-US" sz="1250" dirty="0"/>
-          </a:p>
-        </p:txBody>
-      </p:sp>
-      <p:sp>
-        <p:nvSpPr>
-          <p:cNvPr id="28" name="Text 25"/>
-          <p:cNvSpPr/>
-          <p:nvPr/>
-        </p:nvSpPr>
-        <p:spPr>
-          <a:xfrm>
-            <a:off x="9436608" y="3950208"/>
-            <a:ext cx="2414016" cy="1325880"/>
-          </a:xfrm>
-          <a:prstGeom prst="rect">
-            <a:avLst/>
-          </a:prstGeom>
-          <a:noFill/>
-          <a:ln/>
-        </p:spPr>
-        <p:txBody>
-          <a:bodyPr wrap="square" lIns="0" tIns="0" rIns="0" bIns="0" rtlCol="0" anchor="ctr"/>
-          <a:lstStyle/>
-          <a:p>
-            <a:pPr indent="0" marL="0">
-              <a:buNone/>
-            </a:pPr>
-            <a:r>
-              <a:rPr lang="en-US" sz="1100" dirty="0">
-                <a:solidFill>
-                  <a:srgbClr val="9DB0D9"/>
-                </a:solidFill>
-                <a:latin typeface="Arial" pitchFamily="34" charset="0"/>
-                <a:ea typeface="Arial" pitchFamily="34" charset="-122"/>
-                <a:cs typeface="Arial" pitchFamily="34" charset="-120"/>
-              </a:rPr>
-              <a:t>Route 53 + managed TLS on the custom domain</a:t>
-            </a:r>
-            <a:endParaRPr lang="en-US" sz="1100" dirty="0"/>
-          </a:p>
-        </p:txBody>
-      </p:sp>
-      <p:sp>
-        <p:nvSpPr>
-          <p:cNvPr id="29" name="Text 26"/>
-          <p:cNvSpPr/>
-          <p:nvPr/>
-        </p:nvSpPr>
-        <p:spPr>
-          <a:xfrm>
-            <a:off x="548640" y="5623560"/>
-            <a:ext cx="11091672" cy="365760"/>
-          </a:xfrm>
-          <a:prstGeom prst="rect">
-            <a:avLst/>
-          </a:prstGeom>
-          <a:noFill/>
-          <a:ln/>
-        </p:spPr>
-        <p:txBody>
-          <a:bodyPr wrap="square" lIns="0" tIns="0" rIns="0" bIns="0" rtlCol="0" anchor="ctr"/>
-          <a:lstStyle/>
-          <a:p>
-            <a:pPr indent="0" marL="0">
-              <a:buNone/>
-            </a:pPr>
-            <a:r>
-              <a:rPr lang="en-US" sz="1200" i="1" dirty="0">
-                <a:solidFill>
-                  <a:srgbClr val="9DB0D9"/>
-                </a:solidFill>
-                <a:latin typeface="Arial" pitchFamily="34" charset="0"/>
-                <a:ea typeface="Arial" pitchFamily="34" charset="-122"/>
-                <a:cs typeface="Arial" pitchFamily="34" charset="-120"/>
-              </a:rPr>
-              <a:t>Studying for the AWS Cloud Practitioner cert — this project is where the exam concepts became real.</a:t>
-            </a:r>
-            <a:endParaRPr lang="en-US" sz="1200" dirty="0"/>
-          </a:p>
-        </p:txBody>
-      </p:sp>
-      <p:sp>
-        <p:nvSpPr>
-          <p:cNvPr id="30" name="Text 27"/>
           <p:cNvSpPr/>
           <p:nvPr/>
         </p:nvSpPr>
@@ -12167,7 +13044,7 @@
       </p:sp>
       <p:sp>
         <p:nvSpPr>
-          <p:cNvPr id="31" name="Text 28"/>
+          <p:cNvPr id="22" name="Text 19"/>
           <p:cNvSpPr/>
           <p:nvPr/>
         </p:nvSpPr>

--- a/docs/CareerStar-CapitalOne.pptx
+++ b/docs/CareerStar-CapitalOne.pptx
@@ -1897,7 +1897,7 @@
         <p:spPr>
           <a:xfrm>
             <a:off x="548640" y="777240"/>
-            <a:ext cx="11091672" cy="914400"/>
+            <a:ext cx="11091672" cy="1143000"/>
           </a:xfrm>
           <a:prstGeom prst="rect">
             <a:avLst/>
@@ -2480,7 +2480,7 @@
           </a:ln>
         </p:spPr>
         <p:txBody>
-          <a:bodyPr wrap="square" lIns="1270" tIns="1270" rIns="1270" bIns="1270" rtlCol="0" anchor="ctr"/>
+          <a:bodyPr wrap="square" lIns="101600" tIns="101600" rIns="101600" bIns="101600" rtlCol="0" anchor="ctr"/>
           <a:lstStyle/>
           <a:p>
             <a:pPr algn="ctr" indent="0" marL="0">
@@ -2625,7 +2625,7 @@
         <p:spPr>
           <a:xfrm>
             <a:off x="548640" y="777240"/>
-            <a:ext cx="11091672" cy="914400"/>
+            <a:ext cx="11091672" cy="1143000"/>
           </a:xfrm>
           <a:prstGeom prst="rect">
             <a:avLst/>
@@ -2681,7 +2681,7 @@
           </a:ln>
         </p:spPr>
         <p:txBody>
-          <a:bodyPr wrap="square" lIns="1778" tIns="1778" rIns="1778" bIns="1778" rtlCol="0" anchor="t"/>
+          <a:bodyPr wrap="square" lIns="127000" tIns="127000" rIns="127000" bIns="127000" rtlCol="0" anchor="t"/>
           <a:lstStyle/>
           <a:p>
             <a:pPr algn="l" indent="0" marL="0">
@@ -2768,7 +2768,7 @@
           </a:ln>
         </p:spPr>
         <p:txBody>
-          <a:bodyPr wrap="square" lIns="1778" tIns="1778" rIns="1778" bIns="1778" rtlCol="0" anchor="t"/>
+          <a:bodyPr wrap="square" lIns="127000" tIns="127000" rIns="127000" bIns="127000" rtlCol="0" anchor="t"/>
           <a:lstStyle/>
           <a:p>
             <a:pPr algn="l" indent="0" marL="0">
@@ -2838,7 +2838,7 @@
           </a:ln>
         </p:spPr>
         <p:txBody>
-          <a:bodyPr wrap="square" lIns="1778" tIns="1778" rIns="1778" bIns="1778" rtlCol="0" anchor="t"/>
+          <a:bodyPr wrap="square" lIns="127000" tIns="127000" rIns="127000" bIns="127000" rtlCol="0" anchor="t"/>
           <a:lstStyle/>
           <a:p>
             <a:pPr algn="l" indent="0" marL="0">
@@ -2986,7 +2986,7 @@
           </a:ln>
         </p:spPr>
         <p:txBody>
-          <a:bodyPr wrap="square" lIns="1778" tIns="1778" rIns="1778" bIns="1778" rtlCol="0" anchor="ctr"/>
+          <a:bodyPr wrap="square" lIns="127000" tIns="127000" rIns="127000" bIns="127000" rtlCol="0" anchor="ctr"/>
           <a:lstStyle/>
           <a:p>
             <a:pPr algn="l" indent="0" marL="0">
@@ -3122,7 +3122,7 @@
         <p:spPr>
           <a:xfrm>
             <a:off x="548640" y="777240"/>
-            <a:ext cx="11091672" cy="914400"/>
+            <a:ext cx="11091672" cy="1143000"/>
           </a:xfrm>
           <a:prstGeom prst="rect">
             <a:avLst/>
@@ -3178,7 +3178,7 @@
           </a:ln>
         </p:spPr>
         <p:txBody>
-          <a:bodyPr wrap="square" lIns="1778" tIns="1778" rIns="1778" bIns="1778" rtlCol="0" anchor="ctr"/>
+          <a:bodyPr wrap="square" lIns="127000" tIns="127000" rIns="127000" bIns="127000" rtlCol="0" anchor="ctr"/>
           <a:lstStyle/>
           <a:p>
             <a:pPr algn="l" indent="0" marL="0">
@@ -3239,7 +3239,7 @@
           </a:ln>
         </p:spPr>
         <p:txBody>
-          <a:bodyPr wrap="square" lIns="1778" tIns="1778" rIns="1778" bIns="1778" rtlCol="0" anchor="ctr"/>
+          <a:bodyPr wrap="square" lIns="127000" tIns="127000" rIns="127000" bIns="127000" rtlCol="0" anchor="ctr"/>
           <a:lstStyle/>
           <a:p>
             <a:pPr algn="l" indent="0" marL="0">
@@ -3300,7 +3300,7 @@
           </a:ln>
         </p:spPr>
         <p:txBody>
-          <a:bodyPr wrap="square" lIns="1778" tIns="1778" rIns="1778" bIns="1778" rtlCol="0" anchor="ctr"/>
+          <a:bodyPr wrap="square" lIns="127000" tIns="127000" rIns="127000" bIns="127000" rtlCol="0" anchor="ctr"/>
           <a:lstStyle/>
           <a:p>
             <a:pPr algn="l" indent="0" marL="0">
@@ -3361,7 +3361,7 @@
           </a:ln>
         </p:spPr>
         <p:txBody>
-          <a:bodyPr wrap="square" lIns="1778" tIns="1778" rIns="1778" bIns="1778" rtlCol="0" anchor="ctr"/>
+          <a:bodyPr wrap="square" lIns="127000" tIns="127000" rIns="127000" bIns="127000" rtlCol="0" anchor="ctr"/>
           <a:lstStyle/>
           <a:p>
             <a:pPr algn="l" indent="0" marL="0">
@@ -3422,7 +3422,7 @@
           </a:ln>
         </p:spPr>
         <p:txBody>
-          <a:bodyPr wrap="square" lIns="1778" tIns="1778" rIns="1778" bIns="1778" rtlCol="0" anchor="ctr"/>
+          <a:bodyPr wrap="square" lIns="127000" tIns="127000" rIns="127000" bIns="127000" rtlCol="0" anchor="ctr"/>
           <a:lstStyle/>
           <a:p>
             <a:pPr algn="ctr" indent="0" marL="0">
@@ -3535,7 +3535,7 @@
           </a:ln>
         </p:spPr>
         <p:txBody>
-          <a:bodyPr wrap="square" lIns="1778" tIns="1778" rIns="1778" bIns="1778" rtlCol="0" anchor="ctr"/>
+          <a:bodyPr wrap="square" lIns="127000" tIns="127000" rIns="127000" bIns="127000" rtlCol="0" anchor="ctr"/>
           <a:lstStyle/>
           <a:p>
             <a:pPr algn="l" indent="0" marL="0">
@@ -3596,7 +3596,7 @@
           </a:ln>
         </p:spPr>
         <p:txBody>
-          <a:bodyPr wrap="square" lIns="1778" tIns="1778" rIns="1778" bIns="1778" rtlCol="0" anchor="ctr"/>
+          <a:bodyPr wrap="square" lIns="127000" tIns="127000" rIns="127000" bIns="127000" rtlCol="0" anchor="ctr"/>
           <a:lstStyle/>
           <a:p>
             <a:pPr algn="l" indent="0" marL="0">
@@ -3657,7 +3657,7 @@
           </a:ln>
         </p:spPr>
         <p:txBody>
-          <a:bodyPr wrap="square" lIns="1778" tIns="1778" rIns="1778" bIns="1778" rtlCol="0" anchor="ctr"/>
+          <a:bodyPr wrap="square" lIns="127000" tIns="127000" rIns="127000" bIns="127000" rtlCol="0" anchor="ctr"/>
           <a:lstStyle/>
           <a:p>
             <a:pPr algn="l" indent="0" marL="0">
@@ -3718,7 +3718,7 @@
           </a:ln>
         </p:spPr>
         <p:txBody>
-          <a:bodyPr wrap="square" lIns="1778" tIns="1778" rIns="1778" bIns="1778" rtlCol="0" anchor="t"/>
+          <a:bodyPr wrap="square" lIns="127000" tIns="127000" rIns="127000" bIns="127000" rtlCol="0" anchor="t"/>
           <a:lstStyle/>
           <a:p>
             <a:pPr algn="l" indent="0" marL="0">
@@ -3951,7 +3951,7 @@
         <p:spPr>
           <a:xfrm>
             <a:off x="548640" y="777240"/>
-            <a:ext cx="11091672" cy="914400"/>
+            <a:ext cx="11091672" cy="1143000"/>
           </a:xfrm>
           <a:prstGeom prst="rect">
             <a:avLst/>
@@ -4007,7 +4007,7 @@
           </a:ln>
         </p:spPr>
         <p:txBody>
-          <a:bodyPr wrap="square" lIns="1778" tIns="1778" rIns="1778" bIns="1778" rtlCol="0" anchor="t"/>
+          <a:bodyPr wrap="square" lIns="127000" tIns="127000" rIns="127000" bIns="127000" rtlCol="0" anchor="t"/>
           <a:lstStyle/>
           <a:p>
             <a:pPr algn="l" indent="0" marL="0">
@@ -4071,7 +4071,7 @@
           </a:ln>
         </p:spPr>
         <p:txBody>
-          <a:bodyPr wrap="square" lIns="1778" tIns="1778" rIns="1778" bIns="1778" rtlCol="0" anchor="t"/>
+          <a:bodyPr wrap="square" lIns="127000" tIns="127000" rIns="127000" bIns="127000" rtlCol="0" anchor="t"/>
           <a:lstStyle/>
           <a:p>
             <a:pPr algn="l" indent="0" marL="0">
@@ -4135,7 +4135,7 @@
           </a:ln>
         </p:spPr>
         <p:txBody>
-          <a:bodyPr wrap="square" lIns="1778" tIns="1778" rIns="1778" bIns="1778" rtlCol="0" anchor="t"/>
+          <a:bodyPr wrap="square" lIns="127000" tIns="127000" rIns="127000" bIns="127000" rtlCol="0" anchor="t"/>
           <a:lstStyle/>
           <a:p>
             <a:pPr algn="l" indent="0" marL="0">
@@ -4274,7 +4274,7 @@
         <p:spPr>
           <a:xfrm>
             <a:off x="548640" y="777240"/>
-            <a:ext cx="11091672" cy="914400"/>
+            <a:ext cx="11091672" cy="1143000"/>
           </a:xfrm>
           <a:prstGeom prst="rect">
             <a:avLst/>
@@ -4330,7 +4330,7 @@
           </a:ln>
         </p:spPr>
         <p:txBody>
-          <a:bodyPr wrap="square" lIns="1778" tIns="1778" rIns="1778" bIns="1778" rtlCol="0" anchor="t"/>
+          <a:bodyPr wrap="square" lIns="127000" tIns="127000" rIns="127000" bIns="127000" rtlCol="0" anchor="t"/>
           <a:lstStyle/>
           <a:p>
             <a:pPr algn="l" indent="0" marL="0">
@@ -4394,7 +4394,7 @@
           </a:ln>
         </p:spPr>
         <p:txBody>
-          <a:bodyPr wrap="square" lIns="1778" tIns="1778" rIns="1778" bIns="1778" rtlCol="0" anchor="t"/>
+          <a:bodyPr wrap="square" lIns="127000" tIns="127000" rIns="127000" bIns="127000" rtlCol="0" anchor="t"/>
           <a:lstStyle/>
           <a:p>
             <a:pPr algn="l" indent="0" marL="0">
@@ -4458,7 +4458,7 @@
           </a:ln>
         </p:spPr>
         <p:txBody>
-          <a:bodyPr wrap="square" lIns="1778" tIns="1778" rIns="1778" bIns="1778" rtlCol="0" anchor="t"/>
+          <a:bodyPr wrap="square" lIns="127000" tIns="127000" rIns="127000" bIns="127000" rtlCol="0" anchor="t"/>
           <a:lstStyle/>
           <a:p>
             <a:pPr algn="l" indent="0" marL="0">
@@ -4597,7 +4597,7 @@
         <p:spPr>
           <a:xfrm>
             <a:off x="548640" y="777240"/>
-            <a:ext cx="11091672" cy="914400"/>
+            <a:ext cx="11091672" cy="1143000"/>
           </a:xfrm>
           <a:prstGeom prst="rect">
             <a:avLst/>
@@ -4653,7 +4653,7 @@
           </a:ln>
         </p:spPr>
         <p:txBody>
-          <a:bodyPr wrap="square" lIns="1778" tIns="1778" rIns="1778" bIns="1778" rtlCol="0" anchor="t"/>
+          <a:bodyPr wrap="square" lIns="127000" tIns="127000" rIns="127000" bIns="127000" rtlCol="0" anchor="t"/>
           <a:lstStyle/>
           <a:p>
             <a:pPr algn="l" indent="0" marL="0">
@@ -4717,7 +4717,7 @@
           </a:ln>
         </p:spPr>
         <p:txBody>
-          <a:bodyPr wrap="square" lIns="1778" tIns="1778" rIns="1778" bIns="1778" rtlCol="0" anchor="t"/>
+          <a:bodyPr wrap="square" lIns="127000" tIns="127000" rIns="127000" bIns="127000" rtlCol="0" anchor="t"/>
           <a:lstStyle/>
           <a:p>
             <a:pPr algn="l" indent="0" marL="0">
@@ -4781,7 +4781,7 @@
           </a:ln>
         </p:spPr>
         <p:txBody>
-          <a:bodyPr wrap="square" lIns="1778" tIns="1778" rIns="1778" bIns="1778" rtlCol="0" anchor="t"/>
+          <a:bodyPr wrap="square" lIns="127000" tIns="127000" rIns="127000" bIns="127000" rtlCol="0" anchor="t"/>
           <a:lstStyle/>
           <a:p>
             <a:pPr algn="l" indent="0" marL="0">
@@ -4920,7 +4920,7 @@
         <p:spPr>
           <a:xfrm>
             <a:off x="548640" y="777240"/>
-            <a:ext cx="11091672" cy="914400"/>
+            <a:ext cx="11091672" cy="1143000"/>
           </a:xfrm>
           <a:prstGeom prst="rect">
             <a:avLst/>
@@ -4976,7 +4976,7 @@
           </a:ln>
         </p:spPr>
         <p:txBody>
-          <a:bodyPr wrap="square" lIns="1778" tIns="1778" rIns="1778" bIns="1778" rtlCol="0" anchor="t"/>
+          <a:bodyPr wrap="square" lIns="127000" tIns="127000" rIns="127000" bIns="127000" rtlCol="0" anchor="t"/>
           <a:lstStyle/>
           <a:p>
             <a:pPr algn="l" indent="0" marL="0">
@@ -5112,7 +5112,7 @@
           </a:ln>
         </p:spPr>
         <p:txBody>
-          <a:bodyPr wrap="square" lIns="1778" tIns="1778" rIns="1778" bIns="1778" rtlCol="0" anchor="t"/>
+          <a:bodyPr wrap="square" lIns="127000" tIns="127000" rIns="127000" bIns="127000" rtlCol="0" anchor="t"/>
           <a:lstStyle/>
           <a:p>
             <a:pPr algn="l" indent="0" marL="0">
@@ -5176,7 +5176,7 @@
           </a:ln>
         </p:spPr>
         <p:txBody>
-          <a:bodyPr wrap="square" lIns="1778" tIns="1778" rIns="1778" bIns="1778" rtlCol="0" anchor="t"/>
+          <a:bodyPr wrap="square" lIns="127000" tIns="127000" rIns="127000" bIns="127000" rtlCol="0" anchor="t"/>
           <a:lstStyle/>
           <a:p>
             <a:pPr algn="l" indent="0" marL="0">
@@ -5240,7 +5240,7 @@
           </a:ln>
         </p:spPr>
         <p:txBody>
-          <a:bodyPr wrap="square" lIns="1778" tIns="1778" rIns="1778" bIns="1778" rtlCol="0" anchor="t"/>
+          <a:bodyPr wrap="square" lIns="127000" tIns="127000" rIns="127000" bIns="127000" rtlCol="0" anchor="t"/>
           <a:lstStyle/>
           <a:p>
             <a:pPr algn="l" indent="0" marL="0">
@@ -5304,7 +5304,7 @@
           </a:ln>
         </p:spPr>
         <p:txBody>
-          <a:bodyPr wrap="square" lIns="1778" tIns="1778" rIns="1778" bIns="1778" rtlCol="0" anchor="ctr"/>
+          <a:bodyPr wrap="square" lIns="127000" tIns="127000" rIns="127000" bIns="127000" rtlCol="0" anchor="ctr"/>
           <a:lstStyle/>
           <a:p>
             <a:pPr algn="l" indent="0" marL="0">
@@ -5440,7 +5440,7 @@
         <p:spPr>
           <a:xfrm>
             <a:off x="548640" y="777240"/>
-            <a:ext cx="11091672" cy="914400"/>
+            <a:ext cx="11091672" cy="1143000"/>
           </a:xfrm>
           <a:prstGeom prst="rect">
             <a:avLst/>
@@ -5496,7 +5496,7 @@
           </a:ln>
         </p:spPr>
         <p:txBody>
-          <a:bodyPr wrap="square" lIns="1778" tIns="1778" rIns="1778" bIns="1778" rtlCol="0" anchor="t"/>
+          <a:bodyPr wrap="square" lIns="127000" tIns="127000" rIns="127000" bIns="127000" rtlCol="0" anchor="t"/>
           <a:lstStyle/>
           <a:p>
             <a:pPr algn="l" indent="0" marL="0">
@@ -5566,7 +5566,7 @@
           </a:ln>
         </p:spPr>
         <p:txBody>
-          <a:bodyPr wrap="square" lIns="1778" tIns="1778" rIns="1778" bIns="1778" rtlCol="0" anchor="t"/>
+          <a:bodyPr wrap="square" lIns="127000" tIns="127000" rIns="127000" bIns="127000" rtlCol="0" anchor="t"/>
           <a:lstStyle/>
           <a:p>
             <a:pPr algn="l" indent="0" marL="0">
@@ -5647,7 +5647,7 @@
           </a:ln>
         </p:spPr>
         <p:txBody>
-          <a:bodyPr wrap="square" lIns="1778" tIns="1778" rIns="1778" bIns="1778" rtlCol="0" anchor="ctr"/>
+          <a:bodyPr wrap="square" lIns="127000" tIns="127000" rIns="127000" bIns="127000" rtlCol="0" anchor="ctr"/>
           <a:lstStyle/>
           <a:p>
             <a:pPr algn="l" indent="0" marL="0">
@@ -5783,7 +5783,7 @@
         <p:spPr>
           <a:xfrm>
             <a:off x="548640" y="777240"/>
-            <a:ext cx="11091672" cy="914400"/>
+            <a:ext cx="11091672" cy="1143000"/>
           </a:xfrm>
           <a:prstGeom prst="rect">
             <a:avLst/>
@@ -5839,7 +5839,7 @@
           </a:ln>
         </p:spPr>
         <p:txBody>
-          <a:bodyPr wrap="square" lIns="1778" tIns="1778" rIns="1778" bIns="1778" rtlCol="0" anchor="t"/>
+          <a:bodyPr wrap="square" lIns="127000" tIns="127000" rIns="127000" bIns="127000" rtlCol="0" anchor="t"/>
           <a:lstStyle/>
           <a:p>
             <a:pPr algn="l" indent="0" marL="0">
@@ -5926,7 +5926,7 @@
           </a:ln>
         </p:spPr>
         <p:txBody>
-          <a:bodyPr wrap="square" lIns="1778" tIns="1778" rIns="1778" bIns="1778" rtlCol="0" anchor="t"/>
+          <a:bodyPr wrap="square" lIns="127000" tIns="127000" rIns="127000" bIns="127000" rtlCol="0" anchor="t"/>
           <a:lstStyle/>
           <a:p>
             <a:pPr algn="l" indent="0" marL="0">
@@ -6013,7 +6013,7 @@
           </a:ln>
         </p:spPr>
         <p:txBody>
-          <a:bodyPr wrap="square" lIns="1778" tIns="1778" rIns="1778" bIns="1778" rtlCol="0" anchor="t"/>
+          <a:bodyPr wrap="square" lIns="127000" tIns="127000" rIns="127000" bIns="127000" rtlCol="0" anchor="t"/>
           <a:lstStyle/>
           <a:p>
             <a:pPr algn="l" indent="0" marL="0">
@@ -6178,7 +6178,7 @@
           </a:ln>
         </p:spPr>
         <p:txBody>
-          <a:bodyPr wrap="square" lIns="1778" tIns="1778" rIns="1778" bIns="1778" rtlCol="0" anchor="ctr"/>
+          <a:bodyPr wrap="square" lIns="127000" tIns="127000" rIns="127000" bIns="127000" rtlCol="0" anchor="ctr"/>
           <a:lstStyle/>
           <a:p>
             <a:pPr algn="l" indent="0" marL="0">
@@ -6328,7 +6328,7 @@
         <p:spPr>
           <a:xfrm>
             <a:off x="548640" y="777240"/>
-            <a:ext cx="11091672" cy="914400"/>
+            <a:ext cx="11091672" cy="1143000"/>
           </a:xfrm>
           <a:prstGeom prst="rect">
             <a:avLst/>
@@ -6384,7 +6384,7 @@
           </a:ln>
         </p:spPr>
         <p:txBody>
-          <a:bodyPr wrap="square" lIns="1778" tIns="1778" rIns="1778" bIns="1778" rtlCol="0" anchor="t"/>
+          <a:bodyPr wrap="square" lIns="127000" tIns="127000" rIns="127000" bIns="127000" rtlCol="0" anchor="t"/>
           <a:lstStyle/>
           <a:p>
             <a:pPr algn="l" indent="0" marL="0">
@@ -6516,7 +6516,7 @@
           </a:ln>
         </p:spPr>
         <p:txBody>
-          <a:bodyPr wrap="square" lIns="1778" tIns="1778" rIns="1778" bIns="1778" rtlCol="0" anchor="t"/>
+          <a:bodyPr wrap="square" lIns="127000" tIns="127000" rIns="127000" bIns="127000" rtlCol="0" anchor="t"/>
           <a:lstStyle/>
           <a:p>
             <a:pPr algn="l" indent="0" marL="0">
@@ -6597,7 +6597,7 @@
           </a:ln>
         </p:spPr>
         <p:txBody>
-          <a:bodyPr wrap="square" lIns="1778" tIns="1778" rIns="1778" bIns="1778" rtlCol="0" anchor="ctr"/>
+          <a:bodyPr wrap="square" lIns="127000" tIns="127000" rIns="127000" bIns="127000" rtlCol="0" anchor="ctr"/>
           <a:lstStyle/>
           <a:p>
             <a:pPr algn="ctr" indent="0" marL="0">
@@ -6719,7 +6719,7 @@
         <p:spPr>
           <a:xfrm>
             <a:off x="548640" y="777240"/>
-            <a:ext cx="11091672" cy="914400"/>
+            <a:ext cx="11091672" cy="1143000"/>
           </a:xfrm>
           <a:prstGeom prst="rect">
             <a:avLst/>
@@ -6775,7 +6775,7 @@
           </a:ln>
         </p:spPr>
         <p:txBody>
-          <a:bodyPr wrap="square" lIns="2286" tIns="2286" rIns="2286" bIns="2286" rtlCol="0" anchor="t"/>
+          <a:bodyPr wrap="square" lIns="165100" tIns="165100" rIns="165100" bIns="165100" rtlCol="0" anchor="t"/>
           <a:lstStyle/>
           <a:p>
             <a:pPr algn="l" indent="0" marL="0">
@@ -6907,7 +6907,7 @@
           </a:ln>
         </p:spPr>
         <p:txBody>
-          <a:bodyPr wrap="square" lIns="2286" tIns="2286" rIns="2286" bIns="2286" rtlCol="0" anchor="t"/>
+          <a:bodyPr wrap="square" lIns="165100" tIns="165100" rIns="165100" bIns="165100" rtlCol="0" anchor="t"/>
           <a:lstStyle/>
           <a:p>
             <a:pPr algn="l" indent="0" marL="0">
@@ -7039,7 +7039,7 @@
           </a:ln>
         </p:spPr>
         <p:txBody>
-          <a:bodyPr wrap="square" lIns="1778" tIns="1778" rIns="1778" bIns="1778" rtlCol="0" anchor="ctr"/>
+          <a:bodyPr wrap="square" lIns="127000" tIns="127000" rIns="127000" bIns="127000" rtlCol="0" anchor="ctr"/>
           <a:lstStyle/>
           <a:p>
             <a:pPr algn="ctr" indent="0" marL="0">
@@ -7161,7 +7161,7 @@
         <p:spPr>
           <a:xfrm>
             <a:off x="548640" y="777240"/>
-            <a:ext cx="11091672" cy="914400"/>
+            <a:ext cx="11091672" cy="1143000"/>
           </a:xfrm>
           <a:prstGeom prst="rect">
             <a:avLst/>
@@ -7217,7 +7217,7 @@
           </a:ln>
         </p:spPr>
         <p:txBody>
-          <a:bodyPr wrap="square" lIns="1778" tIns="1778" rIns="1778" bIns="1778" rtlCol="0" anchor="ctr"/>
+          <a:bodyPr wrap="square" lIns="127000" tIns="127000" rIns="127000" bIns="127000" rtlCol="0" anchor="ctr"/>
           <a:lstStyle/>
           <a:p>
             <a:pPr algn="l" indent="0" marL="0">
@@ -7292,7 +7292,7 @@
           </a:ln>
         </p:spPr>
         <p:txBody>
-          <a:bodyPr wrap="square" lIns="1778" tIns="1778" rIns="1778" bIns="1778" rtlCol="0" anchor="ctr"/>
+          <a:bodyPr wrap="square" lIns="127000" tIns="127000" rIns="127000" bIns="127000" rtlCol="0" anchor="ctr"/>
           <a:lstStyle/>
           <a:p>
             <a:pPr algn="l" indent="0" marL="0">
@@ -7367,7 +7367,7 @@
           </a:ln>
         </p:spPr>
         <p:txBody>
-          <a:bodyPr wrap="square" lIns="1778" tIns="1778" rIns="1778" bIns="1778" rtlCol="0" anchor="ctr"/>
+          <a:bodyPr wrap="square" lIns="127000" tIns="127000" rIns="127000" bIns="127000" rtlCol="0" anchor="ctr"/>
           <a:lstStyle/>
           <a:p>
             <a:pPr algn="l" indent="0" marL="0">
@@ -7442,7 +7442,7 @@
           </a:ln>
         </p:spPr>
         <p:txBody>
-          <a:bodyPr wrap="square" lIns="1778" tIns="1778" rIns="1778" bIns="1778" rtlCol="0" anchor="ctr"/>
+          <a:bodyPr wrap="square" lIns="127000" tIns="127000" rIns="127000" bIns="127000" rtlCol="0" anchor="ctr"/>
           <a:lstStyle/>
           <a:p>
             <a:pPr algn="ctr" indent="0" marL="0">
@@ -7564,7 +7564,7 @@
         <p:spPr>
           <a:xfrm>
             <a:off x="548640" y="777240"/>
-            <a:ext cx="11091672" cy="914400"/>
+            <a:ext cx="11091672" cy="1143000"/>
           </a:xfrm>
           <a:prstGeom prst="rect">
             <a:avLst/>
@@ -7620,7 +7620,7 @@
           </a:ln>
         </p:spPr>
         <p:txBody>
-          <a:bodyPr wrap="square" lIns="1778" tIns="1778" rIns="1778" bIns="1778" rtlCol="0" anchor="ctr"/>
+          <a:bodyPr wrap="square" lIns="127000" tIns="127000" rIns="127000" bIns="127000" rtlCol="0" anchor="ctr"/>
           <a:lstStyle/>
           <a:p>
             <a:pPr algn="l" indent="0" marL="0">
@@ -7667,7 +7667,7 @@
           </a:ln>
         </p:spPr>
         <p:txBody>
-          <a:bodyPr wrap="square" lIns="1778" tIns="1778" rIns="1778" bIns="1778" rtlCol="0" anchor="ctr"/>
+          <a:bodyPr wrap="square" lIns="127000" tIns="127000" rIns="127000" bIns="127000" rtlCol="0" anchor="ctr"/>
           <a:lstStyle/>
           <a:p>
             <a:pPr algn="l" indent="0" marL="0">
@@ -7714,7 +7714,7 @@
           </a:ln>
         </p:spPr>
         <p:txBody>
-          <a:bodyPr wrap="square" lIns="1778" tIns="1778" rIns="1778" bIns="1778" rtlCol="0" anchor="ctr"/>
+          <a:bodyPr wrap="square" lIns="127000" tIns="127000" rIns="127000" bIns="127000" rtlCol="0" anchor="ctr"/>
           <a:lstStyle/>
           <a:p>
             <a:pPr algn="l" indent="0" marL="0">
@@ -7761,7 +7761,7 @@
           </a:ln>
         </p:spPr>
         <p:txBody>
-          <a:bodyPr wrap="square" lIns="1778" tIns="1778" rIns="1778" bIns="1778" rtlCol="0" anchor="ctr"/>
+          <a:bodyPr wrap="square" lIns="127000" tIns="127000" rIns="127000" bIns="127000" rtlCol="0" anchor="ctr"/>
           <a:lstStyle/>
           <a:p>
             <a:pPr algn="l" indent="0" marL="0">
@@ -7808,7 +7808,7 @@
           </a:ln>
         </p:spPr>
         <p:txBody>
-          <a:bodyPr wrap="square" lIns="1778" tIns="1778" rIns="1778" bIns="1778" rtlCol="0" anchor="ctr"/>
+          <a:bodyPr wrap="square" lIns="127000" tIns="127000" rIns="127000" bIns="127000" rtlCol="0" anchor="ctr"/>
           <a:lstStyle/>
           <a:p>
             <a:pPr algn="l" indent="0" marL="0">
@@ -7855,7 +7855,7 @@
           </a:ln>
         </p:spPr>
         <p:txBody>
-          <a:bodyPr wrap="square" lIns="1778" tIns="1778" rIns="1778" bIns="1778" rtlCol="0" anchor="ctr"/>
+          <a:bodyPr wrap="square" lIns="127000" tIns="127000" rIns="127000" bIns="127000" rtlCol="0" anchor="ctr"/>
           <a:lstStyle/>
           <a:p>
             <a:pPr algn="l" indent="0" marL="0">
@@ -7902,7 +7902,7 @@
           </a:ln>
         </p:spPr>
         <p:txBody>
-          <a:bodyPr wrap="square" lIns="1778" tIns="1778" rIns="1778" bIns="1778" rtlCol="0" anchor="ctr"/>
+          <a:bodyPr wrap="square" lIns="127000" tIns="127000" rIns="127000" bIns="127000" rtlCol="0" anchor="ctr"/>
           <a:lstStyle/>
           <a:p>
             <a:pPr algn="l" indent="0" marL="0">
@@ -7949,7 +7949,7 @@
           </a:ln>
         </p:spPr>
         <p:txBody>
-          <a:bodyPr wrap="square" lIns="1778" tIns="1778" rIns="1778" bIns="1778" rtlCol="0" anchor="ctr"/>
+          <a:bodyPr wrap="square" lIns="127000" tIns="127000" rIns="127000" bIns="127000" rtlCol="0" anchor="ctr"/>
           <a:lstStyle/>
           <a:p>
             <a:pPr algn="l" indent="0" marL="0">
@@ -7996,7 +7996,7 @@
           </a:ln>
         </p:spPr>
         <p:txBody>
-          <a:bodyPr wrap="square" lIns="1778" tIns="1778" rIns="1778" bIns="1778" rtlCol="0" anchor="ctr"/>
+          <a:bodyPr wrap="square" lIns="127000" tIns="127000" rIns="127000" bIns="127000" rtlCol="0" anchor="ctr"/>
           <a:lstStyle/>
           <a:p>
             <a:pPr algn="l" indent="0" marL="0">
@@ -8132,7 +8132,7 @@
         <p:spPr>
           <a:xfrm>
             <a:off x="548640" y="777240"/>
-            <a:ext cx="11091672" cy="914400"/>
+            <a:ext cx="11091672" cy="1143000"/>
           </a:xfrm>
           <a:prstGeom prst="rect">
             <a:avLst/>
@@ -8170,12 +8170,12 @@
         </p:nvSpPr>
         <p:spPr>
           <a:xfrm>
-            <a:off x="548640" y="1828800"/>
-            <a:ext cx="5468112" cy="1097280"/>
+            <a:off x="548640" y="1874520"/>
+            <a:ext cx="5468112" cy="1371600"/>
           </a:xfrm>
           <a:prstGeom prst="roundRect">
             <a:avLst>
-              <a:gd name="adj" fmla="val 7500"/>
+              <a:gd name="adj" fmla="val 6000"/>
             </a:avLst>
           </a:prstGeom>
           <a:solidFill>
@@ -8188,7 +8188,7 @@
           </a:ln>
         </p:spPr>
         <p:txBody>
-          <a:bodyPr wrap="square" lIns="1778" tIns="1778" rIns="1778" bIns="1778" rtlCol="0" anchor="ctr"/>
+          <a:bodyPr wrap="square" lIns="127000" tIns="127000" rIns="127000" bIns="127000" rtlCol="0" anchor="ctr"/>
           <a:lstStyle/>
           <a:p>
             <a:pPr algn="l" indent="0" marL="0">
@@ -8203,8 +8203,11 @@
                 <a:ea typeface="Courier New" pitchFamily="34" charset="-122"/>
                 <a:cs typeface="Courier New" pitchFamily="34" charset="-120"/>
               </a:rPr>
-              <a:t>0.39   </a:t>
-            </a:r>
+              <a:t>0.39</a:t>
+            </a:r>
+            <a:endParaRPr lang="en-US" sz="1400" dirty="0"/>
+          </a:p>
+          <a:p>
             <a:pPr algn="l" indent="0" marL="0">
               <a:buNone/>
             </a:pPr>
@@ -8217,7 +8220,7 @@
                 <a:ea typeface="Arial" pitchFamily="34" charset="-122"/>
                 <a:cs typeface="Arial" pitchFamily="34" charset="-120"/>
               </a:rPr>
-              <a:t>rank correlation, 2014 scores vs what happened (0 = noise, 1 = perfect)</a:t>
+              <a:t>rank correlation vs what really happened (0 = noise, 1 = perfect)</a:t>
             </a:r>
             <a:endParaRPr lang="en-US" sz="1400" dirty="0"/>
           </a:p>
@@ -8231,12 +8234,12 @@
         </p:nvSpPr>
         <p:spPr>
           <a:xfrm>
-            <a:off x="6172200" y="1828800"/>
-            <a:ext cx="5468112" cy="1097280"/>
+            <a:off x="6172200" y="1874520"/>
+            <a:ext cx="5468112" cy="1371600"/>
           </a:xfrm>
           <a:prstGeom prst="roundRect">
             <a:avLst>
-              <a:gd name="adj" fmla="val 7500"/>
+              <a:gd name="adj" fmla="val 6000"/>
             </a:avLst>
           </a:prstGeom>
           <a:solidFill>
@@ -8249,7 +8252,7 @@
           </a:ln>
         </p:spPr>
         <p:txBody>
-          <a:bodyPr wrap="square" lIns="1778" tIns="1778" rIns="1778" bIns="1778" rtlCol="0" anchor="ctr"/>
+          <a:bodyPr wrap="square" lIns="127000" tIns="127000" rIns="127000" bIns="127000" rtlCol="0" anchor="ctr"/>
           <a:lstStyle/>
           <a:p>
             <a:pPr algn="l" indent="0" marL="0">
@@ -8264,8 +8267,11 @@
                 <a:ea typeface="Courier New" pitchFamily="34" charset="-122"/>
                 <a:cs typeface="Courier New" pitchFamily="34" charset="-120"/>
               </a:rPr>
-              <a:t>48%   </a:t>
-            </a:r>
+              <a:t>48%</a:t>
+            </a:r>
+            <a:endParaRPr lang="en-US" sz="1400" dirty="0"/>
+          </a:p>
+          <a:p>
             <a:pPr algn="l" indent="0" marL="0">
               <a:buNone/>
             </a:pPr>
@@ -8278,7 +8284,7 @@
                 <a:ea typeface="Arial" pitchFamily="34" charset="-122"/>
                 <a:cs typeface="Arial" pitchFamily="34" charset="-120"/>
               </a:rPr>
-              <a:t>of the careers that really declined were flagged — 33% by chance</a:t>
+              <a:t>of real decliners flagged — 33% by chance</a:t>
             </a:r>
             <a:endParaRPr lang="en-US" sz="1400" dirty="0"/>
           </a:p>
@@ -8292,12 +8298,12 @@
         </p:nvSpPr>
         <p:spPr>
           <a:xfrm>
-            <a:off x="548640" y="3063240"/>
-            <a:ext cx="5468112" cy="1097280"/>
+            <a:off x="548640" y="3337560"/>
+            <a:ext cx="5468112" cy="1371600"/>
           </a:xfrm>
           <a:prstGeom prst="roundRect">
             <a:avLst>
-              <a:gd name="adj" fmla="val 7500"/>
+              <a:gd name="adj" fmla="val 6000"/>
             </a:avLst>
           </a:prstGeom>
           <a:solidFill>
@@ -8310,7 +8316,7 @@
           </a:ln>
         </p:spPr>
         <p:txBody>
-          <a:bodyPr wrap="square" lIns="1778" tIns="1778" rIns="1778" bIns="1778" rtlCol="0" anchor="ctr"/>
+          <a:bodyPr wrap="square" lIns="127000" tIns="127000" rIns="127000" bIns="127000" rtlCol="0" anchor="ctr"/>
           <a:lstStyle/>
           <a:p>
             <a:pPr algn="l" indent="0" marL="0">
@@ -8325,8 +8331,11 @@
                 <a:ea typeface="Courier New" pitchFamily="34" charset="-122"/>
                 <a:cs typeface="Courier New" pitchFamily="34" charset="-120"/>
               </a:rPr>
-              <a:t>37 vs 46   </a:t>
-            </a:r>
+              <a:t>37 vs 46</a:t>
+            </a:r>
+            <a:endParaRPr lang="en-US" sz="1400" dirty="0"/>
+          </a:p>
+          <a:p>
             <a:pPr algn="l" indent="0" marL="0">
               <a:buNone/>
             </a:pPr>
@@ -8353,12 +8362,12 @@
         </p:nvSpPr>
         <p:spPr>
           <a:xfrm>
-            <a:off x="6172200" y="3063240"/>
-            <a:ext cx="5468112" cy="1097280"/>
+            <a:off x="6172200" y="3337560"/>
+            <a:ext cx="5468112" cy="1371600"/>
           </a:xfrm>
           <a:prstGeom prst="roundRect">
             <a:avLst>
-              <a:gd name="adj" fmla="val 7500"/>
+              <a:gd name="adj" fmla="val 6000"/>
             </a:avLst>
           </a:prstGeom>
           <a:solidFill>
@@ -8371,7 +8380,7 @@
           </a:ln>
         </p:spPr>
         <p:txBody>
-          <a:bodyPr wrap="square" lIns="1778" tIns="1778" rIns="1778" bIns="1778" rtlCol="0" anchor="ctr"/>
+          <a:bodyPr wrap="square" lIns="127000" tIns="127000" rIns="127000" bIns="127000" rtlCol="0" anchor="ctr"/>
           <a:lstStyle/>
           <a:p>
             <a:pPr algn="l" indent="0" marL="0">
@@ -8386,8 +8395,11 @@
                 <a:ea typeface="Courier New" pitchFamily="34" charset="-122"/>
                 <a:cs typeface="Courier New" pitchFamily="34" charset="-120"/>
               </a:rPr>
-              <a:t>~0   </a:t>
-            </a:r>
+              <a:t>~0</a:t>
+            </a:r>
+            <a:endParaRPr lang="en-US" sz="1400" dirty="0"/>
+          </a:p>
+          <a:p>
             <a:pPr algn="l" indent="0" marL="0">
               <a:buNone/>
             </a:pPr>
@@ -8400,7 +8412,7 @@
                 <a:ea typeface="Arial" pitchFamily="34" charset="-122"/>
                 <a:cs typeface="Arial" pitchFamily="34" charset="-120"/>
               </a:rPr>
-              <a:t>AI exposure’s signal that decade — expected, no LLMs existed yet</a:t>
+              <a:t>AI exposure’s signal — expected: no LLMs yet</a:t>
             </a:r>
             <a:endParaRPr lang="en-US" sz="1400" dirty="0"/>
           </a:p>
@@ -8414,12 +8426,12 @@
         </p:nvSpPr>
         <p:spPr>
           <a:xfrm>
-            <a:off x="548640" y="4434840"/>
-            <a:ext cx="11091672" cy="1691640"/>
+            <a:off x="548640" y="4846320"/>
+            <a:ext cx="11091672" cy="1828800"/>
           </a:xfrm>
           <a:prstGeom prst="roundRect">
             <a:avLst>
-              <a:gd name="adj" fmla="val 4865"/>
+              <a:gd name="adj" fmla="val 4500"/>
             </a:avLst>
           </a:prstGeom>
           <a:solidFill>
@@ -8432,7 +8444,7 @@
           </a:ln>
         </p:spPr>
         <p:txBody>
-          <a:bodyPr wrap="square" lIns="1778" tIns="1778" rIns="1778" bIns="1778" rtlCol="0" anchor="t"/>
+          <a:bodyPr wrap="square" lIns="127000" tIns="127000" rIns="127000" bIns="127000" rtlCol="0" anchor="t"/>
           <a:lstStyle/>
           <a:p>
             <a:pPr algn="l" indent="0" marL="0">
